--- a/clases/PR00_Lineas_Generales/presentaciones/pptx/PR00_PresentacionCurso.pptx
+++ b/clases/PR00_Lineas_Generales/presentaciones/pptx/PR00_PresentacionCurso.pptx
@@ -220,7 +220,7 @@
           <a:p>
             <a:fld id="{1249748F-0FE7-C64C-B0B9-9306A54D4824}" type="datetimeFigureOut">
               <a:rPr lang="en-CL" smtClean="0"/>
-              <a:t>12-03-26</a:t>
+              <a:t>04-08-26</a:t>
             </a:fld>
             <a:endParaRPr lang="en-CL"/>
           </a:p>
@@ -2415,10 +2415,10 @@
           <a:bodyPr/>
           <a:lstStyle/>
           <a:p>
-            <a:fld id="{2C457589-72F1-974D-B204-6AE212262628}" type="datetimeFigureOut">
-              <a:rPr lang="en-CL" smtClean="0"/>
-              <a:t>12-03-26</a:t>
-            </a:fld>
+            <a:r>
+              <a:rPr lang="en-US"/>
+              <a:t>(c) D.Mery - PR00</a:t>
+            </a:r>
             <a:endParaRPr lang="en-CL"/>
           </a:p>
         </p:txBody>
@@ -2615,10 +2615,10 @@
           <a:bodyPr/>
           <a:lstStyle/>
           <a:p>
-            <a:fld id="{2C457589-72F1-974D-B204-6AE212262628}" type="datetimeFigureOut">
-              <a:rPr lang="en-CL" smtClean="0"/>
-              <a:t>12-03-26</a:t>
-            </a:fld>
+            <a:r>
+              <a:rPr lang="en-US"/>
+              <a:t>(c) D.Mery - PR00</a:t>
+            </a:r>
             <a:endParaRPr lang="en-CL"/>
           </a:p>
         </p:txBody>
@@ -2825,10 +2825,10 @@
           <a:bodyPr/>
           <a:lstStyle/>
           <a:p>
-            <a:fld id="{2C457589-72F1-974D-B204-6AE212262628}" type="datetimeFigureOut">
-              <a:rPr lang="en-CL" smtClean="0"/>
-              <a:t>12-03-26</a:t>
-            </a:fld>
+            <a:r>
+              <a:rPr lang="en-US"/>
+              <a:t>(c) D.Mery - PR00</a:t>
+            </a:r>
             <a:endParaRPr lang="en-CL"/>
           </a:p>
         </p:txBody>
@@ -3025,10 +3025,10 @@
           <a:bodyPr/>
           <a:lstStyle/>
           <a:p>
-            <a:fld id="{2C457589-72F1-974D-B204-6AE212262628}" type="datetimeFigureOut">
-              <a:rPr lang="en-CL" smtClean="0"/>
-              <a:t>12-03-26</a:t>
-            </a:fld>
+            <a:r>
+              <a:rPr lang="en-US"/>
+              <a:t>(c) D.Mery - PR00</a:t>
+            </a:r>
             <a:endParaRPr lang="en-CL"/>
           </a:p>
         </p:txBody>
@@ -3301,10 +3301,10 @@
           <a:bodyPr/>
           <a:lstStyle/>
           <a:p>
-            <a:fld id="{2C457589-72F1-974D-B204-6AE212262628}" type="datetimeFigureOut">
-              <a:rPr lang="en-CL" smtClean="0"/>
-              <a:t>12-03-26</a:t>
-            </a:fld>
+            <a:r>
+              <a:rPr lang="en-US"/>
+              <a:t>(c) D.Mery - PR00</a:t>
+            </a:r>
             <a:endParaRPr lang="en-CL"/>
           </a:p>
         </p:txBody>
@@ -3569,10 +3569,10 @@
           <a:bodyPr/>
           <a:lstStyle/>
           <a:p>
-            <a:fld id="{2C457589-72F1-974D-B204-6AE212262628}" type="datetimeFigureOut">
-              <a:rPr lang="en-CL" smtClean="0"/>
-              <a:t>12-03-26</a:t>
-            </a:fld>
+            <a:r>
+              <a:rPr lang="en-US"/>
+              <a:t>(c) D.Mery - PR00</a:t>
+            </a:r>
             <a:endParaRPr lang="en-CL"/>
           </a:p>
         </p:txBody>
@@ -3984,10 +3984,10 @@
           <a:bodyPr/>
           <a:lstStyle/>
           <a:p>
-            <a:fld id="{2C457589-72F1-974D-B204-6AE212262628}" type="datetimeFigureOut">
-              <a:rPr lang="en-CL" smtClean="0"/>
-              <a:t>12-03-26</a:t>
-            </a:fld>
+            <a:r>
+              <a:rPr lang="en-US"/>
+              <a:t>(c) D.Mery - PR00</a:t>
+            </a:r>
             <a:endParaRPr lang="en-CL"/>
           </a:p>
         </p:txBody>
@@ -4126,10 +4126,10 @@
           <a:bodyPr/>
           <a:lstStyle/>
           <a:p>
-            <a:fld id="{2C457589-72F1-974D-B204-6AE212262628}" type="datetimeFigureOut">
-              <a:rPr lang="en-CL" smtClean="0"/>
-              <a:t>12-03-26</a:t>
-            </a:fld>
+            <a:r>
+              <a:rPr lang="en-US"/>
+              <a:t>(c) D.Mery - PR00</a:t>
+            </a:r>
             <a:endParaRPr lang="en-CL"/>
           </a:p>
         </p:txBody>
@@ -4239,10 +4239,10 @@
           <a:bodyPr/>
           <a:lstStyle/>
           <a:p>
-            <a:fld id="{2C457589-72F1-974D-B204-6AE212262628}" type="datetimeFigureOut">
-              <a:rPr lang="en-CL" smtClean="0"/>
-              <a:t>12-03-26</a:t>
-            </a:fld>
+            <a:r>
+              <a:rPr lang="en-US"/>
+              <a:t>(c) D.Mery - PR00</a:t>
+            </a:r>
             <a:endParaRPr lang="en-CL"/>
           </a:p>
         </p:txBody>
@@ -4552,10 +4552,10 @@
           <a:bodyPr/>
           <a:lstStyle/>
           <a:p>
-            <a:fld id="{2C457589-72F1-974D-B204-6AE212262628}" type="datetimeFigureOut">
-              <a:rPr lang="en-CL" smtClean="0"/>
-              <a:t>12-03-26</a:t>
-            </a:fld>
+            <a:r>
+              <a:rPr lang="en-US"/>
+              <a:t>(c) D.Mery - PR00</a:t>
+            </a:r>
             <a:endParaRPr lang="en-CL"/>
           </a:p>
         </p:txBody>
@@ -4841,10 +4841,10 @@
           <a:bodyPr/>
           <a:lstStyle/>
           <a:p>
-            <a:fld id="{2C457589-72F1-974D-B204-6AE212262628}" type="datetimeFigureOut">
-              <a:rPr lang="en-CL" smtClean="0"/>
-              <a:t>12-03-26</a:t>
-            </a:fld>
+            <a:r>
+              <a:rPr lang="en-US"/>
+              <a:t>(c) D.Mery - PR00</a:t>
+            </a:r>
             <a:endParaRPr lang="en-CL"/>
           </a:p>
         </p:txBody>
@@ -5084,10 +5084,10 @@
             </a:lvl1pPr>
           </a:lstStyle>
           <a:p>
-            <a:fld id="{2C457589-72F1-974D-B204-6AE212262628}" type="datetimeFigureOut">
-              <a:rPr lang="en-CL" smtClean="0"/>
-              <a:t>12-03-26</a:t>
-            </a:fld>
+            <a:r>
+              <a:rPr lang="en-US"/>
+              <a:t>(c) D.Mery - PR00</a:t>
+            </a:r>
             <a:endParaRPr lang="en-CL"/>
           </a:p>
         </p:txBody>
@@ -5203,6 +5203,7 @@
     <p:sldLayoutId id="2147483658" r:id="rId10"/>
     <p:sldLayoutId id="2147483659" r:id="rId11"/>
   </p:sldLayoutIdLst>
+  <p:hf hdr="0" ftr="0"/>
   <p:txStyles>
     <p:titleStyle>
       <a:lvl1pPr algn="l" defTabSz="914400" rtl="0" eaLnBrk="1" latinLnBrk="0" hangingPunct="1">
@@ -5785,7 +5786,7 @@
                 </a:solidFill>
                 <a:latin typeface="Gill Sans MT" panose="020B0502020104020203" pitchFamily="34" charset="77"/>
               </a:rPr>
-              <a:t>(CAPÍTULO 0)</a:t>
+              <a:t>(CAPÍTULO 0 – PR00)</a:t>
             </a:r>
             <a:endParaRPr lang="es-ES_tradnl" sz="4400" noProof="1">
               <a:solidFill>
@@ -6161,6 +6162,64 @@
           </a:sp3d>
         </p:spPr>
       </p:pic>
+      <p:sp>
+        <p:nvSpPr>
+          <p:cNvPr id="3" name="Date Placeholder 2">
+            <a:extLst>
+              <a:ext uri="{FF2B5EF4-FFF2-40B4-BE49-F238E27FC236}">
+                <a16:creationId xmlns:a16="http://schemas.microsoft.com/office/drawing/2014/main" id="{5365DAE6-1265-4A2F-F814-3F201FD3F5C3}"/>
+              </a:ext>
+            </a:extLst>
+          </p:cNvPr>
+          <p:cNvSpPr>
+            <a:spLocks noGrp="1"/>
+          </p:cNvSpPr>
+          <p:nvPr>
+            <p:ph type="dt" sz="half" idx="10"/>
+          </p:nvPr>
+        </p:nvSpPr>
+        <p:spPr/>
+        <p:txBody>
+          <a:bodyPr/>
+          <a:lstStyle/>
+          <a:p>
+            <a:r>
+              <a:rPr lang="en-US"/>
+              <a:t>(c) D.Mery - PR00</a:t>
+            </a:r>
+            <a:endParaRPr lang="en-CL"/>
+          </a:p>
+        </p:txBody>
+      </p:sp>
+      <p:sp>
+        <p:nvSpPr>
+          <p:cNvPr id="6" name="Slide Number Placeholder 5">
+            <a:extLst>
+              <a:ext uri="{FF2B5EF4-FFF2-40B4-BE49-F238E27FC236}">
+                <a16:creationId xmlns:a16="http://schemas.microsoft.com/office/drawing/2014/main" id="{445A675C-B538-E38C-6BA5-0361461F7896}"/>
+              </a:ext>
+            </a:extLst>
+          </p:cNvPr>
+          <p:cNvSpPr>
+            <a:spLocks noGrp="1"/>
+          </p:cNvSpPr>
+          <p:nvPr>
+            <p:ph type="sldNum" sz="quarter" idx="12"/>
+          </p:nvPr>
+        </p:nvSpPr>
+        <p:spPr/>
+        <p:txBody>
+          <a:bodyPr/>
+          <a:lstStyle/>
+          <a:p>
+            <a:fld id="{006AE8E3-C79C-E14F-9140-34B0C7F543F1}" type="slidenum">
+              <a:rPr lang="en-CL" smtClean="0"/>
+              <a:t>1</a:t>
+            </a:fld>
+            <a:endParaRPr lang="en-CL"/>
+          </a:p>
+        </p:txBody>
+      </p:sp>
     </p:spTree>
     <p:extLst>
       <p:ext uri="{BB962C8B-B14F-4D97-AF65-F5344CB8AC3E}">
@@ -6786,6 +6845,64 @@
           </a:p>
         </p:txBody>
       </p:sp>
+      <p:sp>
+        <p:nvSpPr>
+          <p:cNvPr id="2" name="Date Placeholder 1">
+            <a:extLst>
+              <a:ext uri="{FF2B5EF4-FFF2-40B4-BE49-F238E27FC236}">
+                <a16:creationId xmlns:a16="http://schemas.microsoft.com/office/drawing/2014/main" id="{A892B4C6-05B6-F8BF-1F71-D39606052CCD}"/>
+              </a:ext>
+            </a:extLst>
+          </p:cNvPr>
+          <p:cNvSpPr>
+            <a:spLocks noGrp="1"/>
+          </p:cNvSpPr>
+          <p:nvPr>
+            <p:ph type="dt" sz="half" idx="10"/>
+          </p:nvPr>
+        </p:nvSpPr>
+        <p:spPr/>
+        <p:txBody>
+          <a:bodyPr/>
+          <a:lstStyle/>
+          <a:p>
+            <a:r>
+              <a:rPr lang="en-US"/>
+              <a:t>(c) D.Mery - PR00</a:t>
+            </a:r>
+            <a:endParaRPr lang="en-CL"/>
+          </a:p>
+        </p:txBody>
+      </p:sp>
+      <p:sp>
+        <p:nvSpPr>
+          <p:cNvPr id="3" name="Slide Number Placeholder 2">
+            <a:extLst>
+              <a:ext uri="{FF2B5EF4-FFF2-40B4-BE49-F238E27FC236}">
+                <a16:creationId xmlns:a16="http://schemas.microsoft.com/office/drawing/2014/main" id="{573AC492-29C0-F119-B713-8D989D345E79}"/>
+              </a:ext>
+            </a:extLst>
+          </p:cNvPr>
+          <p:cNvSpPr>
+            <a:spLocks noGrp="1"/>
+          </p:cNvSpPr>
+          <p:nvPr>
+            <p:ph type="sldNum" sz="quarter" idx="12"/>
+          </p:nvPr>
+        </p:nvSpPr>
+        <p:spPr/>
+        <p:txBody>
+          <a:bodyPr/>
+          <a:lstStyle/>
+          <a:p>
+            <a:fld id="{006AE8E3-C79C-E14F-9140-34B0C7F543F1}" type="slidenum">
+              <a:rPr lang="en-CL" smtClean="0"/>
+              <a:t>10</a:t>
+            </a:fld>
+            <a:endParaRPr lang="en-CL"/>
+          </a:p>
+        </p:txBody>
+      </p:sp>
     </p:spTree>
   </p:cSld>
   <p:clrMapOvr>
@@ -6912,6 +7029,64 @@
               </a:solidFill>
               <a:latin typeface="Gill Sans MT" panose="020B0502020104020203" pitchFamily="34" charset="77"/>
             </a:endParaRPr>
+          </a:p>
+        </p:txBody>
+      </p:sp>
+      <p:sp>
+        <p:nvSpPr>
+          <p:cNvPr id="2" name="Date Placeholder 1">
+            <a:extLst>
+              <a:ext uri="{FF2B5EF4-FFF2-40B4-BE49-F238E27FC236}">
+                <a16:creationId xmlns:a16="http://schemas.microsoft.com/office/drawing/2014/main" id="{A7C68DC9-776D-19DD-2008-049364774740}"/>
+              </a:ext>
+            </a:extLst>
+          </p:cNvPr>
+          <p:cNvSpPr>
+            <a:spLocks noGrp="1"/>
+          </p:cNvSpPr>
+          <p:nvPr>
+            <p:ph type="dt" sz="half" idx="10"/>
+          </p:nvPr>
+        </p:nvSpPr>
+        <p:spPr/>
+        <p:txBody>
+          <a:bodyPr/>
+          <a:lstStyle/>
+          <a:p>
+            <a:r>
+              <a:rPr lang="en-US"/>
+              <a:t>(c) D.Mery - PR00</a:t>
+            </a:r>
+            <a:endParaRPr lang="en-CL"/>
+          </a:p>
+        </p:txBody>
+      </p:sp>
+      <p:sp>
+        <p:nvSpPr>
+          <p:cNvPr id="3" name="Slide Number Placeholder 2">
+            <a:extLst>
+              <a:ext uri="{FF2B5EF4-FFF2-40B4-BE49-F238E27FC236}">
+                <a16:creationId xmlns:a16="http://schemas.microsoft.com/office/drawing/2014/main" id="{9ED625A3-F33A-CB9E-4DED-66BDE0304A13}"/>
+              </a:ext>
+            </a:extLst>
+          </p:cNvPr>
+          <p:cNvSpPr>
+            <a:spLocks noGrp="1"/>
+          </p:cNvSpPr>
+          <p:nvPr>
+            <p:ph type="sldNum" sz="quarter" idx="12"/>
+          </p:nvPr>
+        </p:nvSpPr>
+        <p:spPr/>
+        <p:txBody>
+          <a:bodyPr/>
+          <a:lstStyle/>
+          <a:p>
+            <a:fld id="{006AE8E3-C79C-E14F-9140-34B0C7F543F1}" type="slidenum">
+              <a:rPr lang="en-CL" smtClean="0"/>
+              <a:t>11</a:t>
+            </a:fld>
+            <a:endParaRPr lang="en-CL"/>
           </a:p>
         </p:txBody>
       </p:sp>
@@ -7062,6 +7237,64 @@
           </a:p>
         </p:txBody>
       </p:sp>
+      <p:sp>
+        <p:nvSpPr>
+          <p:cNvPr id="2" name="Date Placeholder 1">
+            <a:extLst>
+              <a:ext uri="{FF2B5EF4-FFF2-40B4-BE49-F238E27FC236}">
+                <a16:creationId xmlns:a16="http://schemas.microsoft.com/office/drawing/2014/main" id="{58C5DD50-05B2-2B0E-7816-1AA4A42F50F7}"/>
+              </a:ext>
+            </a:extLst>
+          </p:cNvPr>
+          <p:cNvSpPr>
+            <a:spLocks noGrp="1"/>
+          </p:cNvSpPr>
+          <p:nvPr>
+            <p:ph type="dt" sz="half" idx="10"/>
+          </p:nvPr>
+        </p:nvSpPr>
+        <p:spPr/>
+        <p:txBody>
+          <a:bodyPr/>
+          <a:lstStyle/>
+          <a:p>
+            <a:r>
+              <a:rPr lang="en-US"/>
+              <a:t>(c) D.Mery - PR00</a:t>
+            </a:r>
+            <a:endParaRPr lang="en-CL"/>
+          </a:p>
+        </p:txBody>
+      </p:sp>
+      <p:sp>
+        <p:nvSpPr>
+          <p:cNvPr id="3" name="Slide Number Placeholder 2">
+            <a:extLst>
+              <a:ext uri="{FF2B5EF4-FFF2-40B4-BE49-F238E27FC236}">
+                <a16:creationId xmlns:a16="http://schemas.microsoft.com/office/drawing/2014/main" id="{EE3E2456-715B-852A-A4D9-339DE6D9EF8C}"/>
+              </a:ext>
+            </a:extLst>
+          </p:cNvPr>
+          <p:cNvSpPr>
+            <a:spLocks noGrp="1"/>
+          </p:cNvSpPr>
+          <p:nvPr>
+            <p:ph type="sldNum" sz="quarter" idx="12"/>
+          </p:nvPr>
+        </p:nvSpPr>
+        <p:spPr/>
+        <p:txBody>
+          <a:bodyPr/>
+          <a:lstStyle/>
+          <a:p>
+            <a:fld id="{006AE8E3-C79C-E14F-9140-34B0C7F543F1}" type="slidenum">
+              <a:rPr lang="en-CL" smtClean="0"/>
+              <a:t>12</a:t>
+            </a:fld>
+            <a:endParaRPr lang="en-CL"/>
+          </a:p>
+        </p:txBody>
+      </p:sp>
     </p:spTree>
     <p:extLst>
       <p:ext uri="{BB962C8B-B14F-4D97-AF65-F5344CB8AC3E}">
@@ -7430,6 +7663,64 @@
           </a:p>
         </p:txBody>
       </p:sp>
+      <p:sp>
+        <p:nvSpPr>
+          <p:cNvPr id="2" name="Date Placeholder 1">
+            <a:extLst>
+              <a:ext uri="{FF2B5EF4-FFF2-40B4-BE49-F238E27FC236}">
+                <a16:creationId xmlns:a16="http://schemas.microsoft.com/office/drawing/2014/main" id="{080A7BB0-99B1-28B9-3935-1077D749B9EB}"/>
+              </a:ext>
+            </a:extLst>
+          </p:cNvPr>
+          <p:cNvSpPr>
+            <a:spLocks noGrp="1"/>
+          </p:cNvSpPr>
+          <p:nvPr>
+            <p:ph type="dt" sz="half" idx="10"/>
+          </p:nvPr>
+        </p:nvSpPr>
+        <p:spPr/>
+        <p:txBody>
+          <a:bodyPr/>
+          <a:lstStyle/>
+          <a:p>
+            <a:r>
+              <a:rPr lang="en-US"/>
+              <a:t>(c) D.Mery - PR00</a:t>
+            </a:r>
+            <a:endParaRPr lang="en-CL"/>
+          </a:p>
+        </p:txBody>
+      </p:sp>
+      <p:sp>
+        <p:nvSpPr>
+          <p:cNvPr id="3" name="Slide Number Placeholder 2">
+            <a:extLst>
+              <a:ext uri="{FF2B5EF4-FFF2-40B4-BE49-F238E27FC236}">
+                <a16:creationId xmlns:a16="http://schemas.microsoft.com/office/drawing/2014/main" id="{5F4649D7-567F-142D-FF5F-E1EA5CDF0AB6}"/>
+              </a:ext>
+            </a:extLst>
+          </p:cNvPr>
+          <p:cNvSpPr>
+            <a:spLocks noGrp="1"/>
+          </p:cNvSpPr>
+          <p:nvPr>
+            <p:ph type="sldNum" sz="quarter" idx="12"/>
+          </p:nvPr>
+        </p:nvSpPr>
+        <p:spPr/>
+        <p:txBody>
+          <a:bodyPr/>
+          <a:lstStyle/>
+          <a:p>
+            <a:fld id="{006AE8E3-C79C-E14F-9140-34B0C7F543F1}" type="slidenum">
+              <a:rPr lang="en-CL" smtClean="0"/>
+              <a:t>13</a:t>
+            </a:fld>
+            <a:endParaRPr lang="en-CL"/>
+          </a:p>
+        </p:txBody>
+      </p:sp>
     </p:spTree>
   </p:cSld>
   <p:clrMapOvr>
@@ -7714,6 +8005,64 @@
           </a:prstGeom>
         </p:spPr>
       </p:pic>
+      <p:sp>
+        <p:nvSpPr>
+          <p:cNvPr id="2" name="Date Placeholder 1">
+            <a:extLst>
+              <a:ext uri="{FF2B5EF4-FFF2-40B4-BE49-F238E27FC236}">
+                <a16:creationId xmlns:a16="http://schemas.microsoft.com/office/drawing/2014/main" id="{3C239174-F058-4A9C-FE11-4D5F9773F35A}"/>
+              </a:ext>
+            </a:extLst>
+          </p:cNvPr>
+          <p:cNvSpPr>
+            <a:spLocks noGrp="1"/>
+          </p:cNvSpPr>
+          <p:nvPr>
+            <p:ph type="dt" sz="half" idx="10"/>
+          </p:nvPr>
+        </p:nvSpPr>
+        <p:spPr/>
+        <p:txBody>
+          <a:bodyPr/>
+          <a:lstStyle/>
+          <a:p>
+            <a:r>
+              <a:rPr lang="en-US"/>
+              <a:t>(c) D.Mery - PR00</a:t>
+            </a:r>
+            <a:endParaRPr lang="en-CL"/>
+          </a:p>
+        </p:txBody>
+      </p:sp>
+      <p:sp>
+        <p:nvSpPr>
+          <p:cNvPr id="4" name="Slide Number Placeholder 3">
+            <a:extLst>
+              <a:ext uri="{FF2B5EF4-FFF2-40B4-BE49-F238E27FC236}">
+                <a16:creationId xmlns:a16="http://schemas.microsoft.com/office/drawing/2014/main" id="{E1A21044-C0ED-4B37-3603-DCD1E8794BF9}"/>
+              </a:ext>
+            </a:extLst>
+          </p:cNvPr>
+          <p:cNvSpPr>
+            <a:spLocks noGrp="1"/>
+          </p:cNvSpPr>
+          <p:nvPr>
+            <p:ph type="sldNum" sz="quarter" idx="12"/>
+          </p:nvPr>
+        </p:nvSpPr>
+        <p:spPr/>
+        <p:txBody>
+          <a:bodyPr/>
+          <a:lstStyle/>
+          <a:p>
+            <a:fld id="{006AE8E3-C79C-E14F-9140-34B0C7F543F1}" type="slidenum">
+              <a:rPr lang="en-CL" smtClean="0"/>
+              <a:t>14</a:t>
+            </a:fld>
+            <a:endParaRPr lang="en-CL"/>
+          </a:p>
+        </p:txBody>
+      </p:sp>
     </p:spTree>
     <p:extLst>
       <p:ext uri="{BB962C8B-B14F-4D97-AF65-F5344CB8AC3E}">
@@ -7877,6 +8226,64 @@
           </a:prstGeom>
         </p:spPr>
       </p:pic>
+      <p:sp>
+        <p:nvSpPr>
+          <p:cNvPr id="3" name="Date Placeholder 2">
+            <a:extLst>
+              <a:ext uri="{FF2B5EF4-FFF2-40B4-BE49-F238E27FC236}">
+                <a16:creationId xmlns:a16="http://schemas.microsoft.com/office/drawing/2014/main" id="{AE3D851C-A04E-7302-1498-D070DD0FFCD5}"/>
+              </a:ext>
+            </a:extLst>
+          </p:cNvPr>
+          <p:cNvSpPr>
+            <a:spLocks noGrp="1"/>
+          </p:cNvSpPr>
+          <p:nvPr>
+            <p:ph type="dt" sz="half" idx="10"/>
+          </p:nvPr>
+        </p:nvSpPr>
+        <p:spPr/>
+        <p:txBody>
+          <a:bodyPr/>
+          <a:lstStyle/>
+          <a:p>
+            <a:r>
+              <a:rPr lang="en-US"/>
+              <a:t>(c) D.Mery - PR00</a:t>
+            </a:r>
+            <a:endParaRPr lang="en-CL"/>
+          </a:p>
+        </p:txBody>
+      </p:sp>
+      <p:sp>
+        <p:nvSpPr>
+          <p:cNvPr id="5" name="Slide Number Placeholder 4">
+            <a:extLst>
+              <a:ext uri="{FF2B5EF4-FFF2-40B4-BE49-F238E27FC236}">
+                <a16:creationId xmlns:a16="http://schemas.microsoft.com/office/drawing/2014/main" id="{B305D8F7-DF0B-4029-26B8-CB716CF63DA5}"/>
+              </a:ext>
+            </a:extLst>
+          </p:cNvPr>
+          <p:cNvSpPr>
+            <a:spLocks noGrp="1"/>
+          </p:cNvSpPr>
+          <p:nvPr>
+            <p:ph type="sldNum" sz="quarter" idx="12"/>
+          </p:nvPr>
+        </p:nvSpPr>
+        <p:spPr/>
+        <p:txBody>
+          <a:bodyPr/>
+          <a:lstStyle/>
+          <a:p>
+            <a:fld id="{006AE8E3-C79C-E14F-9140-34B0C7F543F1}" type="slidenum">
+              <a:rPr lang="en-CL" smtClean="0"/>
+              <a:t>15</a:t>
+            </a:fld>
+            <a:endParaRPr lang="en-CL"/>
+          </a:p>
+        </p:txBody>
+      </p:sp>
     </p:spTree>
     <p:extLst>
       <p:ext uri="{BB962C8B-B14F-4D97-AF65-F5344CB8AC3E}">
@@ -8052,6 +8459,64 @@
           </a:prstGeom>
         </p:spPr>
       </p:pic>
+      <p:sp>
+        <p:nvSpPr>
+          <p:cNvPr id="2" name="Date Placeholder 1">
+            <a:extLst>
+              <a:ext uri="{FF2B5EF4-FFF2-40B4-BE49-F238E27FC236}">
+                <a16:creationId xmlns:a16="http://schemas.microsoft.com/office/drawing/2014/main" id="{A36854D7-3322-D3EA-942C-267B1DC6FFF8}"/>
+              </a:ext>
+            </a:extLst>
+          </p:cNvPr>
+          <p:cNvSpPr>
+            <a:spLocks noGrp="1"/>
+          </p:cNvSpPr>
+          <p:nvPr>
+            <p:ph type="dt" sz="half" idx="10"/>
+          </p:nvPr>
+        </p:nvSpPr>
+        <p:spPr/>
+        <p:txBody>
+          <a:bodyPr/>
+          <a:lstStyle/>
+          <a:p>
+            <a:r>
+              <a:rPr lang="en-US"/>
+              <a:t>(c) D.Mery - PR00</a:t>
+            </a:r>
+            <a:endParaRPr lang="en-CL"/>
+          </a:p>
+        </p:txBody>
+      </p:sp>
+      <p:sp>
+        <p:nvSpPr>
+          <p:cNvPr id="3" name="Slide Number Placeholder 2">
+            <a:extLst>
+              <a:ext uri="{FF2B5EF4-FFF2-40B4-BE49-F238E27FC236}">
+                <a16:creationId xmlns:a16="http://schemas.microsoft.com/office/drawing/2014/main" id="{72472466-8C95-A6B2-0C26-05D0243B0D07}"/>
+              </a:ext>
+            </a:extLst>
+          </p:cNvPr>
+          <p:cNvSpPr>
+            <a:spLocks noGrp="1"/>
+          </p:cNvSpPr>
+          <p:nvPr>
+            <p:ph type="sldNum" sz="quarter" idx="12"/>
+          </p:nvPr>
+        </p:nvSpPr>
+        <p:spPr/>
+        <p:txBody>
+          <a:bodyPr/>
+          <a:lstStyle/>
+          <a:p>
+            <a:fld id="{006AE8E3-C79C-E14F-9140-34B0C7F543F1}" type="slidenum">
+              <a:rPr lang="en-CL" smtClean="0"/>
+              <a:t>16</a:t>
+            </a:fld>
+            <a:endParaRPr lang="en-CL"/>
+          </a:p>
+        </p:txBody>
+      </p:sp>
     </p:spTree>
     <p:extLst>
       <p:ext uri="{BB962C8B-B14F-4D97-AF65-F5344CB8AC3E}">
@@ -8293,6 +8758,64 @@
               </a:solidFill>
               <a:latin typeface="Gill Sans MT" panose="020B0502020104020203" pitchFamily="34" charset="77"/>
             </a:endParaRPr>
+          </a:p>
+        </p:txBody>
+      </p:sp>
+      <p:sp>
+        <p:nvSpPr>
+          <p:cNvPr id="2" name="Date Placeholder 1">
+            <a:extLst>
+              <a:ext uri="{FF2B5EF4-FFF2-40B4-BE49-F238E27FC236}">
+                <a16:creationId xmlns:a16="http://schemas.microsoft.com/office/drawing/2014/main" id="{1B059FFE-B38B-2653-698C-CD35591367EF}"/>
+              </a:ext>
+            </a:extLst>
+          </p:cNvPr>
+          <p:cNvSpPr>
+            <a:spLocks noGrp="1"/>
+          </p:cNvSpPr>
+          <p:nvPr>
+            <p:ph type="dt" sz="half" idx="10"/>
+          </p:nvPr>
+        </p:nvSpPr>
+        <p:spPr/>
+        <p:txBody>
+          <a:bodyPr/>
+          <a:lstStyle/>
+          <a:p>
+            <a:r>
+              <a:rPr lang="en-US"/>
+              <a:t>(c) D.Mery - PR00</a:t>
+            </a:r>
+            <a:endParaRPr lang="en-CL"/>
+          </a:p>
+        </p:txBody>
+      </p:sp>
+      <p:sp>
+        <p:nvSpPr>
+          <p:cNvPr id="4" name="Slide Number Placeholder 3">
+            <a:extLst>
+              <a:ext uri="{FF2B5EF4-FFF2-40B4-BE49-F238E27FC236}">
+                <a16:creationId xmlns:a16="http://schemas.microsoft.com/office/drawing/2014/main" id="{652CEAC5-24FE-BA58-8B8F-56D611E857D2}"/>
+              </a:ext>
+            </a:extLst>
+          </p:cNvPr>
+          <p:cNvSpPr>
+            <a:spLocks noGrp="1"/>
+          </p:cNvSpPr>
+          <p:nvPr>
+            <p:ph type="sldNum" sz="quarter" idx="12"/>
+          </p:nvPr>
+        </p:nvSpPr>
+        <p:spPr/>
+        <p:txBody>
+          <a:bodyPr/>
+          <a:lstStyle/>
+          <a:p>
+            <a:fld id="{006AE8E3-C79C-E14F-9140-34B0C7F543F1}" type="slidenum">
+              <a:rPr lang="en-CL" smtClean="0"/>
+              <a:t>17</a:t>
+            </a:fld>
+            <a:endParaRPr lang="en-CL"/>
           </a:p>
         </p:txBody>
       </p:sp>
@@ -8506,6 +9029,64 @@
           </a:p>
         </p:txBody>
       </p:sp>
+      <p:sp>
+        <p:nvSpPr>
+          <p:cNvPr id="2" name="Date Placeholder 1">
+            <a:extLst>
+              <a:ext uri="{FF2B5EF4-FFF2-40B4-BE49-F238E27FC236}">
+                <a16:creationId xmlns:a16="http://schemas.microsoft.com/office/drawing/2014/main" id="{BA3CEE1A-E968-000B-FBF5-3B586A48AF82}"/>
+              </a:ext>
+            </a:extLst>
+          </p:cNvPr>
+          <p:cNvSpPr>
+            <a:spLocks noGrp="1"/>
+          </p:cNvSpPr>
+          <p:nvPr>
+            <p:ph type="dt" sz="half" idx="10"/>
+          </p:nvPr>
+        </p:nvSpPr>
+        <p:spPr/>
+        <p:txBody>
+          <a:bodyPr/>
+          <a:lstStyle/>
+          <a:p>
+            <a:r>
+              <a:rPr lang="en-US"/>
+              <a:t>(c) D.Mery - PR00</a:t>
+            </a:r>
+            <a:endParaRPr lang="en-CL"/>
+          </a:p>
+        </p:txBody>
+      </p:sp>
+      <p:sp>
+        <p:nvSpPr>
+          <p:cNvPr id="3" name="Slide Number Placeholder 2">
+            <a:extLst>
+              <a:ext uri="{FF2B5EF4-FFF2-40B4-BE49-F238E27FC236}">
+                <a16:creationId xmlns:a16="http://schemas.microsoft.com/office/drawing/2014/main" id="{F6B88860-1923-2D97-CB87-95833419AEF7}"/>
+              </a:ext>
+            </a:extLst>
+          </p:cNvPr>
+          <p:cNvSpPr>
+            <a:spLocks noGrp="1"/>
+          </p:cNvSpPr>
+          <p:nvPr>
+            <p:ph type="sldNum" sz="quarter" idx="12"/>
+          </p:nvPr>
+        </p:nvSpPr>
+        <p:spPr/>
+        <p:txBody>
+          <a:bodyPr/>
+          <a:lstStyle/>
+          <a:p>
+            <a:fld id="{006AE8E3-C79C-E14F-9140-34B0C7F543F1}" type="slidenum">
+              <a:rPr lang="en-CL" smtClean="0"/>
+              <a:t>18</a:t>
+            </a:fld>
+            <a:endParaRPr lang="en-CL"/>
+          </a:p>
+        </p:txBody>
+      </p:sp>
     </p:spTree>
     <p:extLst>
       <p:ext uri="{BB962C8B-B14F-4D97-AF65-F5344CB8AC3E}">
@@ -8710,6 +9291,64 @@
           </a:prstGeom>
         </p:spPr>
       </p:pic>
+      <p:sp>
+        <p:nvSpPr>
+          <p:cNvPr id="2" name="Date Placeholder 1">
+            <a:extLst>
+              <a:ext uri="{FF2B5EF4-FFF2-40B4-BE49-F238E27FC236}">
+                <a16:creationId xmlns:a16="http://schemas.microsoft.com/office/drawing/2014/main" id="{2924B9C7-EF88-0EBC-40F7-DF6226E6AF68}"/>
+              </a:ext>
+            </a:extLst>
+          </p:cNvPr>
+          <p:cNvSpPr>
+            <a:spLocks noGrp="1"/>
+          </p:cNvSpPr>
+          <p:nvPr>
+            <p:ph type="dt" sz="half" idx="10"/>
+          </p:nvPr>
+        </p:nvSpPr>
+        <p:spPr/>
+        <p:txBody>
+          <a:bodyPr/>
+          <a:lstStyle/>
+          <a:p>
+            <a:r>
+              <a:rPr lang="en-US"/>
+              <a:t>(c) D.Mery - PR00</a:t>
+            </a:r>
+            <a:endParaRPr lang="en-CL"/>
+          </a:p>
+        </p:txBody>
+      </p:sp>
+      <p:sp>
+        <p:nvSpPr>
+          <p:cNvPr id="4" name="Slide Number Placeholder 3">
+            <a:extLst>
+              <a:ext uri="{FF2B5EF4-FFF2-40B4-BE49-F238E27FC236}">
+                <a16:creationId xmlns:a16="http://schemas.microsoft.com/office/drawing/2014/main" id="{66A5551B-3905-D66A-AA2D-977E2A4ECABE}"/>
+              </a:ext>
+            </a:extLst>
+          </p:cNvPr>
+          <p:cNvSpPr>
+            <a:spLocks noGrp="1"/>
+          </p:cNvSpPr>
+          <p:nvPr>
+            <p:ph type="sldNum" sz="quarter" idx="12"/>
+          </p:nvPr>
+        </p:nvSpPr>
+        <p:spPr/>
+        <p:txBody>
+          <a:bodyPr/>
+          <a:lstStyle/>
+          <a:p>
+            <a:fld id="{006AE8E3-C79C-E14F-9140-34B0C7F543F1}" type="slidenum">
+              <a:rPr lang="en-CL" smtClean="0"/>
+              <a:t>19</a:t>
+            </a:fld>
+            <a:endParaRPr lang="en-CL"/>
+          </a:p>
+        </p:txBody>
+      </p:sp>
     </p:spTree>
     <p:extLst>
       <p:ext uri="{BB962C8B-B14F-4D97-AF65-F5344CB8AC3E}">
@@ -8947,6 +9586,64 @@
               </a:solidFill>
               <a:latin typeface="Gill Sans MT" panose="020B0502020104020203" pitchFamily="34" charset="77"/>
             </a:endParaRPr>
+          </a:p>
+        </p:txBody>
+      </p:sp>
+      <p:sp>
+        <p:nvSpPr>
+          <p:cNvPr id="3" name="Date Placeholder 2">
+            <a:extLst>
+              <a:ext uri="{FF2B5EF4-FFF2-40B4-BE49-F238E27FC236}">
+                <a16:creationId xmlns:a16="http://schemas.microsoft.com/office/drawing/2014/main" id="{EE019BE4-CDC9-5A3F-C9A9-0239289B6F8E}"/>
+              </a:ext>
+            </a:extLst>
+          </p:cNvPr>
+          <p:cNvSpPr>
+            <a:spLocks noGrp="1"/>
+          </p:cNvSpPr>
+          <p:nvPr>
+            <p:ph type="dt" sz="half" idx="10"/>
+          </p:nvPr>
+        </p:nvSpPr>
+        <p:spPr/>
+        <p:txBody>
+          <a:bodyPr/>
+          <a:lstStyle/>
+          <a:p>
+            <a:r>
+              <a:rPr lang="en-US"/>
+              <a:t>(c) D.Mery - PR00</a:t>
+            </a:r>
+            <a:endParaRPr lang="en-CL"/>
+          </a:p>
+        </p:txBody>
+      </p:sp>
+      <p:sp>
+        <p:nvSpPr>
+          <p:cNvPr id="4" name="Slide Number Placeholder 3">
+            <a:extLst>
+              <a:ext uri="{FF2B5EF4-FFF2-40B4-BE49-F238E27FC236}">
+                <a16:creationId xmlns:a16="http://schemas.microsoft.com/office/drawing/2014/main" id="{1BA0F0C1-CDAC-C998-B0D0-993739337F86}"/>
+              </a:ext>
+            </a:extLst>
+          </p:cNvPr>
+          <p:cNvSpPr>
+            <a:spLocks noGrp="1"/>
+          </p:cNvSpPr>
+          <p:nvPr>
+            <p:ph type="sldNum" sz="quarter" idx="12"/>
+          </p:nvPr>
+        </p:nvSpPr>
+        <p:spPr/>
+        <p:txBody>
+          <a:bodyPr/>
+          <a:lstStyle/>
+          <a:p>
+            <a:fld id="{006AE8E3-C79C-E14F-9140-34B0C7F543F1}" type="slidenum">
+              <a:rPr lang="en-CL" smtClean="0"/>
+              <a:t>2</a:t>
+            </a:fld>
+            <a:endParaRPr lang="en-CL"/>
           </a:p>
         </p:txBody>
       </p:sp>
@@ -9114,6 +9811,64 @@
           </a:p>
         </p:txBody>
       </p:sp>
+      <p:sp>
+        <p:nvSpPr>
+          <p:cNvPr id="2" name="Date Placeholder 1">
+            <a:extLst>
+              <a:ext uri="{FF2B5EF4-FFF2-40B4-BE49-F238E27FC236}">
+                <a16:creationId xmlns:a16="http://schemas.microsoft.com/office/drawing/2014/main" id="{D3617796-6F32-039B-9EAD-84D99A186663}"/>
+              </a:ext>
+            </a:extLst>
+          </p:cNvPr>
+          <p:cNvSpPr>
+            <a:spLocks noGrp="1"/>
+          </p:cNvSpPr>
+          <p:nvPr>
+            <p:ph type="dt" sz="half" idx="10"/>
+          </p:nvPr>
+        </p:nvSpPr>
+        <p:spPr/>
+        <p:txBody>
+          <a:bodyPr/>
+          <a:lstStyle/>
+          <a:p>
+            <a:r>
+              <a:rPr lang="en-US"/>
+              <a:t>(c) D.Mery - PR00</a:t>
+            </a:r>
+            <a:endParaRPr lang="en-CL"/>
+          </a:p>
+        </p:txBody>
+      </p:sp>
+      <p:sp>
+        <p:nvSpPr>
+          <p:cNvPr id="3" name="Slide Number Placeholder 2">
+            <a:extLst>
+              <a:ext uri="{FF2B5EF4-FFF2-40B4-BE49-F238E27FC236}">
+                <a16:creationId xmlns:a16="http://schemas.microsoft.com/office/drawing/2014/main" id="{7E1D71C6-A26C-E7D3-0226-2DFD9F99D809}"/>
+              </a:ext>
+            </a:extLst>
+          </p:cNvPr>
+          <p:cNvSpPr>
+            <a:spLocks noGrp="1"/>
+          </p:cNvSpPr>
+          <p:nvPr>
+            <p:ph type="sldNum" sz="quarter" idx="12"/>
+          </p:nvPr>
+        </p:nvSpPr>
+        <p:spPr/>
+        <p:txBody>
+          <a:bodyPr/>
+          <a:lstStyle/>
+          <a:p>
+            <a:fld id="{006AE8E3-C79C-E14F-9140-34B0C7F543F1}" type="slidenum">
+              <a:rPr lang="en-CL" smtClean="0"/>
+              <a:t>20</a:t>
+            </a:fld>
+            <a:endParaRPr lang="en-CL"/>
+          </a:p>
+        </p:txBody>
+      </p:sp>
     </p:spTree>
     <p:extLst>
       <p:ext uri="{BB962C8B-B14F-4D97-AF65-F5344CB8AC3E}">
@@ -9801,6 +10556,64 @@
           </a:p>
         </p:txBody>
       </p:sp>
+      <p:sp>
+        <p:nvSpPr>
+          <p:cNvPr id="2" name="Date Placeholder 1">
+            <a:extLst>
+              <a:ext uri="{FF2B5EF4-FFF2-40B4-BE49-F238E27FC236}">
+                <a16:creationId xmlns:a16="http://schemas.microsoft.com/office/drawing/2014/main" id="{1C381D52-23A7-24BE-8A56-7B19C012B3F5}"/>
+              </a:ext>
+            </a:extLst>
+          </p:cNvPr>
+          <p:cNvSpPr>
+            <a:spLocks noGrp="1"/>
+          </p:cNvSpPr>
+          <p:nvPr>
+            <p:ph type="dt" sz="half" idx="10"/>
+          </p:nvPr>
+        </p:nvSpPr>
+        <p:spPr/>
+        <p:txBody>
+          <a:bodyPr/>
+          <a:lstStyle/>
+          <a:p>
+            <a:r>
+              <a:rPr lang="en-US"/>
+              <a:t>(c) D.Mery - PR00</a:t>
+            </a:r>
+            <a:endParaRPr lang="en-CL"/>
+          </a:p>
+        </p:txBody>
+      </p:sp>
+      <p:sp>
+        <p:nvSpPr>
+          <p:cNvPr id="4" name="Slide Number Placeholder 3">
+            <a:extLst>
+              <a:ext uri="{FF2B5EF4-FFF2-40B4-BE49-F238E27FC236}">
+                <a16:creationId xmlns:a16="http://schemas.microsoft.com/office/drawing/2014/main" id="{4561F125-713B-8A0D-E3F0-158AA8AF9EF8}"/>
+              </a:ext>
+            </a:extLst>
+          </p:cNvPr>
+          <p:cNvSpPr>
+            <a:spLocks noGrp="1"/>
+          </p:cNvSpPr>
+          <p:nvPr>
+            <p:ph type="sldNum" sz="quarter" idx="12"/>
+          </p:nvPr>
+        </p:nvSpPr>
+        <p:spPr/>
+        <p:txBody>
+          <a:bodyPr/>
+          <a:lstStyle/>
+          <a:p>
+            <a:fld id="{006AE8E3-C79C-E14F-9140-34B0C7F543F1}" type="slidenum">
+              <a:rPr lang="en-CL" smtClean="0"/>
+              <a:t>21</a:t>
+            </a:fld>
+            <a:endParaRPr lang="en-CL"/>
+          </a:p>
+        </p:txBody>
+      </p:sp>
     </p:spTree>
     <p:extLst>
       <p:ext uri="{BB962C8B-B14F-4D97-AF65-F5344CB8AC3E}">
@@ -9971,6 +10784,64 @@
               </a:rPr>
               <a:t> para hacer explicaciones más detalladas.</a:t>
             </a:r>
+          </a:p>
+        </p:txBody>
+      </p:sp>
+      <p:sp>
+        <p:nvSpPr>
+          <p:cNvPr id="4" name="Date Placeholder 3">
+            <a:extLst>
+              <a:ext uri="{FF2B5EF4-FFF2-40B4-BE49-F238E27FC236}">
+                <a16:creationId xmlns:a16="http://schemas.microsoft.com/office/drawing/2014/main" id="{92FCDC0E-7F58-D883-5D17-678FF37ED683}"/>
+              </a:ext>
+            </a:extLst>
+          </p:cNvPr>
+          <p:cNvSpPr>
+            <a:spLocks noGrp="1"/>
+          </p:cNvSpPr>
+          <p:nvPr>
+            <p:ph type="dt" sz="half" idx="10"/>
+          </p:nvPr>
+        </p:nvSpPr>
+        <p:spPr/>
+        <p:txBody>
+          <a:bodyPr/>
+          <a:lstStyle/>
+          <a:p>
+            <a:r>
+              <a:rPr lang="en-US"/>
+              <a:t>(c) D.Mery - PR00</a:t>
+            </a:r>
+            <a:endParaRPr lang="en-CL"/>
+          </a:p>
+        </p:txBody>
+      </p:sp>
+      <p:sp>
+        <p:nvSpPr>
+          <p:cNvPr id="5" name="Slide Number Placeholder 4">
+            <a:extLst>
+              <a:ext uri="{FF2B5EF4-FFF2-40B4-BE49-F238E27FC236}">
+                <a16:creationId xmlns:a16="http://schemas.microsoft.com/office/drawing/2014/main" id="{C4EFCC52-2089-52D7-4D83-F3A4B0EF9115}"/>
+              </a:ext>
+            </a:extLst>
+          </p:cNvPr>
+          <p:cNvSpPr>
+            <a:spLocks noGrp="1"/>
+          </p:cNvSpPr>
+          <p:nvPr>
+            <p:ph type="sldNum" sz="quarter" idx="12"/>
+          </p:nvPr>
+        </p:nvSpPr>
+        <p:spPr/>
+        <p:txBody>
+          <a:bodyPr/>
+          <a:lstStyle/>
+          <a:p>
+            <a:fld id="{006AE8E3-C79C-E14F-9140-34B0C7F543F1}" type="slidenum">
+              <a:rPr lang="en-CL" smtClean="0"/>
+              <a:t>22</a:t>
+            </a:fld>
+            <a:endParaRPr lang="en-CL"/>
           </a:p>
         </p:txBody>
       </p:sp>
@@ -10290,6 +11161,64 @@
               </a:solidFill>
               <a:latin typeface="Gill Sans MT" panose="020B0502020104020203" pitchFamily="34" charset="77"/>
             </a:endParaRPr>
+          </a:p>
+        </p:txBody>
+      </p:sp>
+      <p:sp>
+        <p:nvSpPr>
+          <p:cNvPr id="2" name="Date Placeholder 1">
+            <a:extLst>
+              <a:ext uri="{FF2B5EF4-FFF2-40B4-BE49-F238E27FC236}">
+                <a16:creationId xmlns:a16="http://schemas.microsoft.com/office/drawing/2014/main" id="{21BE5DC2-DAC8-1F30-8F5C-AD9CE91E984B}"/>
+              </a:ext>
+            </a:extLst>
+          </p:cNvPr>
+          <p:cNvSpPr>
+            <a:spLocks noGrp="1"/>
+          </p:cNvSpPr>
+          <p:nvPr>
+            <p:ph type="dt" sz="half" idx="10"/>
+          </p:nvPr>
+        </p:nvSpPr>
+        <p:spPr/>
+        <p:txBody>
+          <a:bodyPr/>
+          <a:lstStyle/>
+          <a:p>
+            <a:r>
+              <a:rPr lang="en-US"/>
+              <a:t>(c) D.Mery - PR00</a:t>
+            </a:r>
+            <a:endParaRPr lang="en-CL"/>
+          </a:p>
+        </p:txBody>
+      </p:sp>
+      <p:sp>
+        <p:nvSpPr>
+          <p:cNvPr id="4" name="Slide Number Placeholder 3">
+            <a:extLst>
+              <a:ext uri="{FF2B5EF4-FFF2-40B4-BE49-F238E27FC236}">
+                <a16:creationId xmlns:a16="http://schemas.microsoft.com/office/drawing/2014/main" id="{A10936B8-4672-5A62-59FA-98704ED79BA9}"/>
+              </a:ext>
+            </a:extLst>
+          </p:cNvPr>
+          <p:cNvSpPr>
+            <a:spLocks noGrp="1"/>
+          </p:cNvSpPr>
+          <p:nvPr>
+            <p:ph type="sldNum" sz="quarter" idx="12"/>
+          </p:nvPr>
+        </p:nvSpPr>
+        <p:spPr/>
+        <p:txBody>
+          <a:bodyPr/>
+          <a:lstStyle/>
+          <a:p>
+            <a:fld id="{006AE8E3-C79C-E14F-9140-34B0C7F543F1}" type="slidenum">
+              <a:rPr lang="en-CL" smtClean="0"/>
+              <a:t>23</a:t>
+            </a:fld>
+            <a:endParaRPr lang="en-CL"/>
           </a:p>
         </p:txBody>
       </p:sp>
@@ -10728,6 +11657,64 @@
               </a:solidFill>
               <a:latin typeface="Gill Sans MT" panose="020B0502020104020203" pitchFamily="34" charset="77"/>
             </a:endParaRPr>
+          </a:p>
+        </p:txBody>
+      </p:sp>
+      <p:sp>
+        <p:nvSpPr>
+          <p:cNvPr id="2" name="Date Placeholder 1">
+            <a:extLst>
+              <a:ext uri="{FF2B5EF4-FFF2-40B4-BE49-F238E27FC236}">
+                <a16:creationId xmlns:a16="http://schemas.microsoft.com/office/drawing/2014/main" id="{A95132D5-892A-B5CA-E367-93DA5CD76646}"/>
+              </a:ext>
+            </a:extLst>
+          </p:cNvPr>
+          <p:cNvSpPr>
+            <a:spLocks noGrp="1"/>
+          </p:cNvSpPr>
+          <p:nvPr>
+            <p:ph type="dt" sz="half" idx="10"/>
+          </p:nvPr>
+        </p:nvSpPr>
+        <p:spPr/>
+        <p:txBody>
+          <a:bodyPr/>
+          <a:lstStyle/>
+          <a:p>
+            <a:r>
+              <a:rPr lang="en-US"/>
+              <a:t>(c) D.Mery - PR00</a:t>
+            </a:r>
+            <a:endParaRPr lang="en-CL"/>
+          </a:p>
+        </p:txBody>
+      </p:sp>
+      <p:sp>
+        <p:nvSpPr>
+          <p:cNvPr id="4" name="Slide Number Placeholder 3">
+            <a:extLst>
+              <a:ext uri="{FF2B5EF4-FFF2-40B4-BE49-F238E27FC236}">
+                <a16:creationId xmlns:a16="http://schemas.microsoft.com/office/drawing/2014/main" id="{CBB053F0-F6C1-A879-7B62-23BB6F16E254}"/>
+              </a:ext>
+            </a:extLst>
+          </p:cNvPr>
+          <p:cNvSpPr>
+            <a:spLocks noGrp="1"/>
+          </p:cNvSpPr>
+          <p:nvPr>
+            <p:ph type="sldNum" sz="quarter" idx="12"/>
+          </p:nvPr>
+        </p:nvSpPr>
+        <p:spPr/>
+        <p:txBody>
+          <a:bodyPr/>
+          <a:lstStyle/>
+          <a:p>
+            <a:fld id="{006AE8E3-C79C-E14F-9140-34B0C7F543F1}" type="slidenum">
+              <a:rPr lang="en-CL" smtClean="0"/>
+              <a:t>24</a:t>
+            </a:fld>
+            <a:endParaRPr lang="en-CL"/>
           </a:p>
         </p:txBody>
       </p:sp>
@@ -11200,6 +12187,64 @@
           </a:p>
         </p:txBody>
       </p:sp>
+      <p:sp>
+        <p:nvSpPr>
+          <p:cNvPr id="2" name="Date Placeholder 1">
+            <a:extLst>
+              <a:ext uri="{FF2B5EF4-FFF2-40B4-BE49-F238E27FC236}">
+                <a16:creationId xmlns:a16="http://schemas.microsoft.com/office/drawing/2014/main" id="{508FE1D6-27FA-2843-7BE5-4894D7167E7D}"/>
+              </a:ext>
+            </a:extLst>
+          </p:cNvPr>
+          <p:cNvSpPr>
+            <a:spLocks noGrp="1"/>
+          </p:cNvSpPr>
+          <p:nvPr>
+            <p:ph type="dt" sz="half" idx="10"/>
+          </p:nvPr>
+        </p:nvSpPr>
+        <p:spPr/>
+        <p:txBody>
+          <a:bodyPr/>
+          <a:lstStyle/>
+          <a:p>
+            <a:r>
+              <a:rPr lang="en-US"/>
+              <a:t>(c) D.Mery - PR00</a:t>
+            </a:r>
+            <a:endParaRPr lang="en-CL"/>
+          </a:p>
+        </p:txBody>
+      </p:sp>
+      <p:sp>
+        <p:nvSpPr>
+          <p:cNvPr id="3" name="Slide Number Placeholder 2">
+            <a:extLst>
+              <a:ext uri="{FF2B5EF4-FFF2-40B4-BE49-F238E27FC236}">
+                <a16:creationId xmlns:a16="http://schemas.microsoft.com/office/drawing/2014/main" id="{CA5A7CDC-A94D-6F75-8916-CBC1E1ABECA1}"/>
+              </a:ext>
+            </a:extLst>
+          </p:cNvPr>
+          <p:cNvSpPr>
+            <a:spLocks noGrp="1"/>
+          </p:cNvSpPr>
+          <p:nvPr>
+            <p:ph type="sldNum" sz="quarter" idx="12"/>
+          </p:nvPr>
+        </p:nvSpPr>
+        <p:spPr/>
+        <p:txBody>
+          <a:bodyPr/>
+          <a:lstStyle/>
+          <a:p>
+            <a:fld id="{006AE8E3-C79C-E14F-9140-34B0C7F543F1}" type="slidenum">
+              <a:rPr lang="en-CL" smtClean="0"/>
+              <a:t>3</a:t>
+            </a:fld>
+            <a:endParaRPr lang="en-CL"/>
+          </a:p>
+        </p:txBody>
+      </p:sp>
     </p:spTree>
   </p:cSld>
   <p:clrMapOvr>
@@ -11608,6 +12653,64 @@
               <a:latin typeface="Gill Sans MT" panose="020B0502020104020203" pitchFamily="34" charset="77"/>
               <a:cs typeface="Trebuchet MS"/>
             </a:endParaRPr>
+          </a:p>
+        </p:txBody>
+      </p:sp>
+      <p:sp>
+        <p:nvSpPr>
+          <p:cNvPr id="3" name="Date Placeholder 2">
+            <a:extLst>
+              <a:ext uri="{FF2B5EF4-FFF2-40B4-BE49-F238E27FC236}">
+                <a16:creationId xmlns:a16="http://schemas.microsoft.com/office/drawing/2014/main" id="{961068B5-1CE4-AE3D-BC62-E93161373300}"/>
+              </a:ext>
+            </a:extLst>
+          </p:cNvPr>
+          <p:cNvSpPr>
+            <a:spLocks noGrp="1"/>
+          </p:cNvSpPr>
+          <p:nvPr>
+            <p:ph type="dt" sz="half" idx="10"/>
+          </p:nvPr>
+        </p:nvSpPr>
+        <p:spPr/>
+        <p:txBody>
+          <a:bodyPr/>
+          <a:lstStyle/>
+          <a:p>
+            <a:r>
+              <a:rPr lang="en-US"/>
+              <a:t>(c) D.Mery - PR00</a:t>
+            </a:r>
+            <a:endParaRPr lang="en-CL"/>
+          </a:p>
+        </p:txBody>
+      </p:sp>
+      <p:sp>
+        <p:nvSpPr>
+          <p:cNvPr id="5" name="Slide Number Placeholder 4">
+            <a:extLst>
+              <a:ext uri="{FF2B5EF4-FFF2-40B4-BE49-F238E27FC236}">
+                <a16:creationId xmlns:a16="http://schemas.microsoft.com/office/drawing/2014/main" id="{3F3B761C-1BE8-5E12-4F6A-5F39E00A2B0A}"/>
+              </a:ext>
+            </a:extLst>
+          </p:cNvPr>
+          <p:cNvSpPr>
+            <a:spLocks noGrp="1"/>
+          </p:cNvSpPr>
+          <p:nvPr>
+            <p:ph type="sldNum" sz="quarter" idx="12"/>
+          </p:nvPr>
+        </p:nvSpPr>
+        <p:spPr/>
+        <p:txBody>
+          <a:bodyPr/>
+          <a:lstStyle/>
+          <a:p>
+            <a:fld id="{006AE8E3-C79C-E14F-9140-34B0C7F543F1}" type="slidenum">
+              <a:rPr lang="en-CL" smtClean="0"/>
+              <a:t>4</a:t>
+            </a:fld>
+            <a:endParaRPr lang="en-CL"/>
           </a:p>
         </p:txBody>
       </p:sp>
@@ -12371,6 +13474,64 @@
           </a:graphicData>
         </a:graphic>
       </p:graphicFrame>
+      <p:sp>
+        <p:nvSpPr>
+          <p:cNvPr id="3" name="Date Placeholder 2">
+            <a:extLst>
+              <a:ext uri="{FF2B5EF4-FFF2-40B4-BE49-F238E27FC236}">
+                <a16:creationId xmlns:a16="http://schemas.microsoft.com/office/drawing/2014/main" id="{09179903-7BEA-7880-2FB2-959061EE4B51}"/>
+              </a:ext>
+            </a:extLst>
+          </p:cNvPr>
+          <p:cNvSpPr>
+            <a:spLocks noGrp="1"/>
+          </p:cNvSpPr>
+          <p:nvPr>
+            <p:ph type="dt" sz="half" idx="10"/>
+          </p:nvPr>
+        </p:nvSpPr>
+        <p:spPr/>
+        <p:txBody>
+          <a:bodyPr/>
+          <a:lstStyle/>
+          <a:p>
+            <a:r>
+              <a:rPr lang="en-US"/>
+              <a:t>(c) D.Mery - PR00</a:t>
+            </a:r>
+            <a:endParaRPr lang="en-CL"/>
+          </a:p>
+        </p:txBody>
+      </p:sp>
+      <p:sp>
+        <p:nvSpPr>
+          <p:cNvPr id="4" name="Slide Number Placeholder 3">
+            <a:extLst>
+              <a:ext uri="{FF2B5EF4-FFF2-40B4-BE49-F238E27FC236}">
+                <a16:creationId xmlns:a16="http://schemas.microsoft.com/office/drawing/2014/main" id="{AA8550FD-050A-CEC4-6BBC-33696C3952EC}"/>
+              </a:ext>
+            </a:extLst>
+          </p:cNvPr>
+          <p:cNvSpPr>
+            <a:spLocks noGrp="1"/>
+          </p:cNvSpPr>
+          <p:nvPr>
+            <p:ph type="sldNum" sz="quarter" idx="12"/>
+          </p:nvPr>
+        </p:nvSpPr>
+        <p:spPr/>
+        <p:txBody>
+          <a:bodyPr/>
+          <a:lstStyle/>
+          <a:p>
+            <a:fld id="{006AE8E3-C79C-E14F-9140-34B0C7F543F1}" type="slidenum">
+              <a:rPr lang="en-CL" smtClean="0"/>
+              <a:t>5</a:t>
+            </a:fld>
+            <a:endParaRPr lang="en-CL"/>
+          </a:p>
+        </p:txBody>
+      </p:sp>
     </p:spTree>
     <p:extLst>
       <p:ext uri="{BB962C8B-B14F-4D97-AF65-F5344CB8AC3E}">
@@ -12465,6 +13626,64 @@
           </a:p>
         </p:txBody>
       </p:sp>
+      <p:sp>
+        <p:nvSpPr>
+          <p:cNvPr id="2" name="Date Placeholder 1">
+            <a:extLst>
+              <a:ext uri="{FF2B5EF4-FFF2-40B4-BE49-F238E27FC236}">
+                <a16:creationId xmlns:a16="http://schemas.microsoft.com/office/drawing/2014/main" id="{07E98903-23E8-4521-4D34-C438BA71C742}"/>
+              </a:ext>
+            </a:extLst>
+          </p:cNvPr>
+          <p:cNvSpPr>
+            <a:spLocks noGrp="1"/>
+          </p:cNvSpPr>
+          <p:nvPr>
+            <p:ph type="dt" sz="half" idx="10"/>
+          </p:nvPr>
+        </p:nvSpPr>
+        <p:spPr/>
+        <p:txBody>
+          <a:bodyPr/>
+          <a:lstStyle/>
+          <a:p>
+            <a:r>
+              <a:rPr lang="en-US"/>
+              <a:t>(c) D.Mery - PR00</a:t>
+            </a:r>
+            <a:endParaRPr lang="en-CL"/>
+          </a:p>
+        </p:txBody>
+      </p:sp>
+      <p:sp>
+        <p:nvSpPr>
+          <p:cNvPr id="3" name="Slide Number Placeholder 2">
+            <a:extLst>
+              <a:ext uri="{FF2B5EF4-FFF2-40B4-BE49-F238E27FC236}">
+                <a16:creationId xmlns:a16="http://schemas.microsoft.com/office/drawing/2014/main" id="{F53E80DA-AD51-5FB0-574C-19CF29DD0A9D}"/>
+              </a:ext>
+            </a:extLst>
+          </p:cNvPr>
+          <p:cNvSpPr>
+            <a:spLocks noGrp="1"/>
+          </p:cNvSpPr>
+          <p:nvPr>
+            <p:ph type="sldNum" sz="quarter" idx="12"/>
+          </p:nvPr>
+        </p:nvSpPr>
+        <p:spPr/>
+        <p:txBody>
+          <a:bodyPr/>
+          <a:lstStyle/>
+          <a:p>
+            <a:fld id="{006AE8E3-C79C-E14F-9140-34B0C7F543F1}" type="slidenum">
+              <a:rPr lang="en-CL" smtClean="0"/>
+              <a:t>6</a:t>
+            </a:fld>
+            <a:endParaRPr lang="en-CL"/>
+          </a:p>
+        </p:txBody>
+      </p:sp>
     </p:spTree>
   </p:cSld>
   <p:clrMapOvr>
@@ -12647,6 +13866,64 @@
             <a:endParaRPr lang="en-CL" sz="2400" dirty="0">
               <a:latin typeface="Gill Sans MT" panose="020B0502020104020203" pitchFamily="34" charset="77"/>
             </a:endParaRPr>
+          </a:p>
+        </p:txBody>
+      </p:sp>
+      <p:sp>
+        <p:nvSpPr>
+          <p:cNvPr id="3" name="Date Placeholder 2">
+            <a:extLst>
+              <a:ext uri="{FF2B5EF4-FFF2-40B4-BE49-F238E27FC236}">
+                <a16:creationId xmlns:a16="http://schemas.microsoft.com/office/drawing/2014/main" id="{AEE73E4E-1BEF-2F6C-9308-449A49A730EF}"/>
+              </a:ext>
+            </a:extLst>
+          </p:cNvPr>
+          <p:cNvSpPr>
+            <a:spLocks noGrp="1"/>
+          </p:cNvSpPr>
+          <p:nvPr>
+            <p:ph type="dt" sz="half" idx="10"/>
+          </p:nvPr>
+        </p:nvSpPr>
+        <p:spPr/>
+        <p:txBody>
+          <a:bodyPr/>
+          <a:lstStyle/>
+          <a:p>
+            <a:r>
+              <a:rPr lang="en-US"/>
+              <a:t>(c) D.Mery - PR00</a:t>
+            </a:r>
+            <a:endParaRPr lang="en-CL"/>
+          </a:p>
+        </p:txBody>
+      </p:sp>
+      <p:sp>
+        <p:nvSpPr>
+          <p:cNvPr id="4" name="Slide Number Placeholder 3">
+            <a:extLst>
+              <a:ext uri="{FF2B5EF4-FFF2-40B4-BE49-F238E27FC236}">
+                <a16:creationId xmlns:a16="http://schemas.microsoft.com/office/drawing/2014/main" id="{8D07BE62-7141-3BD1-43C0-956A8A939F82}"/>
+              </a:ext>
+            </a:extLst>
+          </p:cNvPr>
+          <p:cNvSpPr>
+            <a:spLocks noGrp="1"/>
+          </p:cNvSpPr>
+          <p:nvPr>
+            <p:ph type="sldNum" sz="quarter" idx="12"/>
+          </p:nvPr>
+        </p:nvSpPr>
+        <p:spPr/>
+        <p:txBody>
+          <a:bodyPr/>
+          <a:lstStyle/>
+          <a:p>
+            <a:fld id="{006AE8E3-C79C-E14F-9140-34B0C7F543F1}" type="slidenum">
+              <a:rPr lang="en-CL" smtClean="0"/>
+              <a:t>7</a:t>
+            </a:fld>
+            <a:endParaRPr lang="en-CL"/>
           </a:p>
         </p:txBody>
       </p:sp>
@@ -12862,16 +14139,7 @@
               <a:rPr lang="es-ES_tradnl" sz="2400" dirty="0">
                 <a:latin typeface="Gill Sans MT" panose="020B0502020104020203" pitchFamily="34" charset="77"/>
               </a:rPr>
-              <a:t>Primera Interrogación: 		11/04/26 de 9:00am a 11:00am </a:t>
-            </a:r>
-            <a:r>
-              <a:rPr lang="es-ES_tradnl" sz="2400" dirty="0">
-                <a:solidFill>
-                  <a:srgbClr val="FF0000"/>
-                </a:solidFill>
-                <a:latin typeface="Gill Sans MT" panose="020B0502020104020203" pitchFamily="34" charset="77"/>
-              </a:rPr>
-              <a:t>(sábado!!!)</a:t>
+              <a:t>Primera Interrogación: 		será anunciada</a:t>
             </a:r>
             <a:endParaRPr lang="en-CL" sz="2400" dirty="0">
               <a:solidFill>
@@ -12885,7 +14153,7 @@
               <a:rPr lang="es-ES_tradnl" sz="2400" dirty="0">
                 <a:latin typeface="Gill Sans MT" panose="020B0502020104020203" pitchFamily="34" charset="77"/>
               </a:rPr>
-              <a:t>Segunda Interrogación: 		26/05/26 de 5:30pm a 7:30pm</a:t>
+              <a:t>Segunda Interrogación: 		será anunciada</a:t>
             </a:r>
             <a:endParaRPr lang="en-CL" sz="2400" dirty="0">
               <a:latin typeface="Gill Sans MT" panose="020B0502020104020203" pitchFamily="34" charset="77"/>
@@ -12896,7 +14164,25 @@
               <a:rPr lang="en-US" sz="2400" dirty="0">
                 <a:latin typeface="Gill Sans MT" panose="020B0502020104020203" pitchFamily="34" charset="77"/>
               </a:rPr>
-              <a:t>Examen Final:				02/07/26 de 9:00am a 12:00pm</a:t>
+              <a:t>Examen Final:				</a:t>
+            </a:r>
+            <a:r>
+              <a:rPr lang="en-US" sz="2400" dirty="0" err="1">
+                <a:latin typeface="Gill Sans MT" panose="020B0502020104020203" pitchFamily="34" charset="77"/>
+              </a:rPr>
+              <a:t>será</a:t>
+            </a:r>
+            <a:r>
+              <a:rPr lang="en-US" sz="2400" dirty="0">
+                <a:latin typeface="Gill Sans MT" panose="020B0502020104020203" pitchFamily="34" charset="77"/>
+              </a:rPr>
+              <a:t> </a:t>
+            </a:r>
+            <a:r>
+              <a:rPr lang="en-US" sz="2400" dirty="0" err="1">
+                <a:latin typeface="Gill Sans MT" panose="020B0502020104020203" pitchFamily="34" charset="77"/>
+              </a:rPr>
+              <a:t>anunciada</a:t>
             </a:r>
             <a:endParaRPr lang="en-CL" sz="2400" dirty="0">
               <a:latin typeface="Gill Sans MT" panose="020B0502020104020203" pitchFamily="34" charset="77"/>
@@ -12906,6 +14192,64 @@
             <a:endParaRPr lang="en-CL" sz="2400" dirty="0">
               <a:latin typeface="Gill Sans MT" panose="020B0502020104020203" pitchFamily="34" charset="77"/>
             </a:endParaRPr>
+          </a:p>
+        </p:txBody>
+      </p:sp>
+      <p:sp>
+        <p:nvSpPr>
+          <p:cNvPr id="3" name="Date Placeholder 2">
+            <a:extLst>
+              <a:ext uri="{FF2B5EF4-FFF2-40B4-BE49-F238E27FC236}">
+                <a16:creationId xmlns:a16="http://schemas.microsoft.com/office/drawing/2014/main" id="{D17C4660-465E-E5D4-A430-D6205D5DC4E1}"/>
+              </a:ext>
+            </a:extLst>
+          </p:cNvPr>
+          <p:cNvSpPr>
+            <a:spLocks noGrp="1"/>
+          </p:cNvSpPr>
+          <p:nvPr>
+            <p:ph type="dt" sz="half" idx="10"/>
+          </p:nvPr>
+        </p:nvSpPr>
+        <p:spPr/>
+        <p:txBody>
+          <a:bodyPr/>
+          <a:lstStyle/>
+          <a:p>
+            <a:r>
+              <a:rPr lang="en-US"/>
+              <a:t>(c) D.Mery - PR00</a:t>
+            </a:r>
+            <a:endParaRPr lang="en-CL"/>
+          </a:p>
+        </p:txBody>
+      </p:sp>
+      <p:sp>
+        <p:nvSpPr>
+          <p:cNvPr id="4" name="Slide Number Placeholder 3">
+            <a:extLst>
+              <a:ext uri="{FF2B5EF4-FFF2-40B4-BE49-F238E27FC236}">
+                <a16:creationId xmlns:a16="http://schemas.microsoft.com/office/drawing/2014/main" id="{80DAF5DF-AD0D-BCA8-06D4-0C76CCA3E233}"/>
+              </a:ext>
+            </a:extLst>
+          </p:cNvPr>
+          <p:cNvSpPr>
+            <a:spLocks noGrp="1"/>
+          </p:cNvSpPr>
+          <p:nvPr>
+            <p:ph type="sldNum" sz="quarter" idx="12"/>
+          </p:nvPr>
+        </p:nvSpPr>
+        <p:spPr/>
+        <p:txBody>
+          <a:bodyPr/>
+          <a:lstStyle/>
+          <a:p>
+            <a:fld id="{006AE8E3-C79C-E14F-9140-34B0C7F543F1}" type="slidenum">
+              <a:rPr lang="en-CL" smtClean="0"/>
+              <a:t>8</a:t>
+            </a:fld>
+            <a:endParaRPr lang="en-CL"/>
           </a:p>
         </p:txBody>
       </p:sp>
@@ -13932,6 +15276,64 @@
             <a:endParaRPr lang="es-ES" sz="2000" dirty="0">
               <a:latin typeface="Gill Sans MT" panose="020B0502020104020203" pitchFamily="34" charset="77"/>
             </a:endParaRPr>
+          </a:p>
+        </p:txBody>
+      </p:sp>
+      <p:sp>
+        <p:nvSpPr>
+          <p:cNvPr id="2" name="Date Placeholder 1">
+            <a:extLst>
+              <a:ext uri="{FF2B5EF4-FFF2-40B4-BE49-F238E27FC236}">
+                <a16:creationId xmlns:a16="http://schemas.microsoft.com/office/drawing/2014/main" id="{6C334AFE-9533-017F-A841-5F9A1EE8531A}"/>
+              </a:ext>
+            </a:extLst>
+          </p:cNvPr>
+          <p:cNvSpPr>
+            <a:spLocks noGrp="1"/>
+          </p:cNvSpPr>
+          <p:nvPr>
+            <p:ph type="dt" sz="half" idx="10"/>
+          </p:nvPr>
+        </p:nvSpPr>
+        <p:spPr/>
+        <p:txBody>
+          <a:bodyPr/>
+          <a:lstStyle/>
+          <a:p>
+            <a:r>
+              <a:rPr lang="en-US"/>
+              <a:t>(c) D.Mery - PR00</a:t>
+            </a:r>
+            <a:endParaRPr lang="en-CL"/>
+          </a:p>
+        </p:txBody>
+      </p:sp>
+      <p:sp>
+        <p:nvSpPr>
+          <p:cNvPr id="3" name="Slide Number Placeholder 2">
+            <a:extLst>
+              <a:ext uri="{FF2B5EF4-FFF2-40B4-BE49-F238E27FC236}">
+                <a16:creationId xmlns:a16="http://schemas.microsoft.com/office/drawing/2014/main" id="{4C7CCD9E-086D-2ADA-6568-03B37FBDEF2A}"/>
+              </a:ext>
+            </a:extLst>
+          </p:cNvPr>
+          <p:cNvSpPr>
+            <a:spLocks noGrp="1"/>
+          </p:cNvSpPr>
+          <p:nvPr>
+            <p:ph type="sldNum" sz="quarter" idx="12"/>
+          </p:nvPr>
+        </p:nvSpPr>
+        <p:spPr/>
+        <p:txBody>
+          <a:bodyPr/>
+          <a:lstStyle/>
+          <a:p>
+            <a:fld id="{006AE8E3-C79C-E14F-9140-34B0C7F543F1}" type="slidenum">
+              <a:rPr lang="en-CL" smtClean="0"/>
+              <a:t>9</a:t>
+            </a:fld>
+            <a:endParaRPr lang="en-CL"/>
           </a:p>
         </p:txBody>
       </p:sp>

--- a/clases/PR00_Lineas_Generales/presentaciones/pptx/PR00_PresentacionCurso.pptx
+++ b/clases/PR00_Lineas_Generales/presentaciones/pptx/PR00_PresentacionCurso.pptx
@@ -5,7 +5,7 @@
     <p:sldMasterId id="2147483648" r:id="rId1"/>
   </p:sldMasterIdLst>
   <p:notesMasterIdLst>
-    <p:notesMasterId r:id="rId26"/>
+    <p:notesMasterId r:id="rId10"/>
   </p:notesMasterIdLst>
   <p:sldIdLst>
     <p:sldId id="257" r:id="rId2"/>
@@ -14,24 +14,8 @@
     <p:sldId id="509" r:id="rId5"/>
     <p:sldId id="290" r:id="rId6"/>
     <p:sldId id="494" r:id="rId7"/>
-    <p:sldId id="495" r:id="rId8"/>
-    <p:sldId id="4665" r:id="rId9"/>
-    <p:sldId id="496" r:id="rId10"/>
-    <p:sldId id="499" r:id="rId11"/>
-    <p:sldId id="4666" r:id="rId12"/>
-    <p:sldId id="4667" r:id="rId13"/>
-    <p:sldId id="497" r:id="rId14"/>
-    <p:sldId id="540" r:id="rId15"/>
-    <p:sldId id="594" r:id="rId16"/>
-    <p:sldId id="597" r:id="rId17"/>
-    <p:sldId id="598" r:id="rId18"/>
-    <p:sldId id="4663" r:id="rId19"/>
-    <p:sldId id="596" r:id="rId20"/>
-    <p:sldId id="552" r:id="rId21"/>
-    <p:sldId id="577" r:id="rId22"/>
-    <p:sldId id="534" r:id="rId23"/>
-    <p:sldId id="600" r:id="rId24"/>
-    <p:sldId id="4664" r:id="rId25"/>
+    <p:sldId id="4665" r:id="rId8"/>
+    <p:sldId id="496" r:id="rId9"/>
   </p:sldIdLst>
   <p:sldSz cx="12192000" cy="6858000"/>
   <p:notesSz cx="6858000" cy="9144000"/>
@@ -220,7 +204,7 @@
           <a:p>
             <a:fld id="{1249748F-0FE7-C64C-B0B9-9306A54D4824}" type="datetimeFigureOut">
               <a:rPr lang="en-CL" smtClean="0"/>
-              <a:t>04-08-26</a:t>
+              <a:t>12-08-26</a:t>
             </a:fld>
             <a:endParaRPr lang="en-CL"/>
           </a:p>
@@ -583,883 +567,6 @@
 </p:notes>
 </file>
 
-<file path=ppt/notesSlides/notesSlide10.xml><?xml version="1.0" encoding="utf-8"?>
-<p:notes xmlns:a="http://schemas.openxmlformats.org/drawingml/2006/main" xmlns:r="http://schemas.openxmlformats.org/officeDocument/2006/relationships" xmlns:p="http://schemas.openxmlformats.org/presentationml/2006/main">
-  <p:cSld>
-    <p:spTree>
-      <p:nvGrpSpPr>
-        <p:cNvPr id="1" name="">
-          <a:extLst>
-            <a:ext uri="{FF2B5EF4-FFF2-40B4-BE49-F238E27FC236}">
-              <a16:creationId xmlns:a16="http://schemas.microsoft.com/office/drawing/2014/main" id="{AC4FAFA9-F19D-F258-A073-283E5B4D12B9}"/>
-            </a:ext>
-          </a:extLst>
-        </p:cNvPr>
-        <p:cNvGrpSpPr/>
-        <p:nvPr/>
-      </p:nvGrpSpPr>
-      <p:grpSpPr>
-        <a:xfrm>
-          <a:off x="0" y="0"/>
-          <a:ext cx="0" cy="0"/>
-          <a:chOff x="0" y="0"/>
-          <a:chExt cx="0" cy="0"/>
-        </a:xfrm>
-      </p:grpSpPr>
-      <p:sp>
-        <p:nvSpPr>
-          <p:cNvPr id="48130" name="Rectangle 7">
-            <a:extLst>
-              <a:ext uri="{FF2B5EF4-FFF2-40B4-BE49-F238E27FC236}">
-                <a16:creationId xmlns:a16="http://schemas.microsoft.com/office/drawing/2014/main" id="{EC5A5914-89E8-231F-0DEC-65DB63CC8CE0}"/>
-              </a:ext>
-            </a:extLst>
-          </p:cNvPr>
-          <p:cNvSpPr>
-            <a:spLocks noGrp="1" noChangeArrowheads="1"/>
-          </p:cNvSpPr>
-          <p:nvPr>
-            <p:ph type="sldNum" sz="quarter" idx="5"/>
-          </p:nvPr>
-        </p:nvSpPr>
-        <p:spPr>
-          <a:noFill/>
-        </p:spPr>
-        <p:txBody>
-          <a:bodyPr/>
-          <a:lstStyle/>
-          <a:p>
-            <a:fld id="{467CBDD7-73D8-9B43-BD1F-1839DCE59A40}" type="slidenum">
-              <a:rPr lang="en-US"/>
-              <a:pPr/>
-              <a:t>12</a:t>
-            </a:fld>
-            <a:endParaRPr lang="en-US"/>
-          </a:p>
-        </p:txBody>
-      </p:sp>
-      <p:sp>
-        <p:nvSpPr>
-          <p:cNvPr id="48131" name="Rectangle 2">
-            <a:extLst>
-              <a:ext uri="{FF2B5EF4-FFF2-40B4-BE49-F238E27FC236}">
-                <a16:creationId xmlns:a16="http://schemas.microsoft.com/office/drawing/2014/main" id="{D2C71209-E1B8-1ACF-0DF2-8CF1BB5C9233}"/>
-              </a:ext>
-            </a:extLst>
-          </p:cNvPr>
-          <p:cNvSpPr>
-            <a:spLocks noGrp="1" noRot="1" noChangeAspect="1" noChangeArrowheads="1" noTextEdit="1"/>
-          </p:cNvSpPr>
-          <p:nvPr>
-            <p:ph type="sldImg"/>
-          </p:nvPr>
-        </p:nvSpPr>
-        <p:spPr>
-          <a:ln/>
-        </p:spPr>
-      </p:sp>
-      <p:sp>
-        <p:nvSpPr>
-          <p:cNvPr id="48132" name="Rectangle 3">
-            <a:extLst>
-              <a:ext uri="{FF2B5EF4-FFF2-40B4-BE49-F238E27FC236}">
-                <a16:creationId xmlns:a16="http://schemas.microsoft.com/office/drawing/2014/main" id="{0BC4EB6E-96C2-4FD1-B8BE-66DCA426AC5B}"/>
-              </a:ext>
-            </a:extLst>
-          </p:cNvPr>
-          <p:cNvSpPr>
-            <a:spLocks noGrp="1" noChangeArrowheads="1"/>
-          </p:cNvSpPr>
-          <p:nvPr>
-            <p:ph type="body" idx="1"/>
-          </p:nvPr>
-        </p:nvSpPr>
-        <p:spPr>
-          <a:noFill/>
-          <a:ln/>
-        </p:spPr>
-        <p:txBody>
-          <a:bodyPr/>
-          <a:lstStyle/>
-          <a:p>
-            <a:pPr eaLnBrk="1" hangingPunct="1"/>
-            <a:endParaRPr lang="es-ES" dirty="0">
-              <a:latin typeface="Arial" charset="0"/>
-            </a:endParaRPr>
-          </a:p>
-        </p:txBody>
-      </p:sp>
-    </p:spTree>
-    <p:extLst>
-      <p:ext uri="{BB962C8B-B14F-4D97-AF65-F5344CB8AC3E}">
-        <p14:creationId xmlns:p14="http://schemas.microsoft.com/office/powerpoint/2010/main" val="3769752269"/>
-      </p:ext>
-    </p:extLst>
-  </p:cSld>
-  <p:clrMapOvr>
-    <a:masterClrMapping/>
-  </p:clrMapOvr>
-</p:notes>
-</file>
-
-<file path=ppt/notesSlides/notesSlide11.xml><?xml version="1.0" encoding="utf-8"?>
-<p:notes xmlns:a="http://schemas.openxmlformats.org/drawingml/2006/main" xmlns:r="http://schemas.openxmlformats.org/officeDocument/2006/relationships" xmlns:p="http://schemas.openxmlformats.org/presentationml/2006/main">
-  <p:cSld>
-    <p:spTree>
-      <p:nvGrpSpPr>
-        <p:cNvPr id="1" name=""/>
-        <p:cNvGrpSpPr/>
-        <p:nvPr/>
-      </p:nvGrpSpPr>
-      <p:grpSpPr>
-        <a:xfrm>
-          <a:off x="0" y="0"/>
-          <a:ext cx="0" cy="0"/>
-          <a:chOff x="0" y="0"/>
-          <a:chExt cx="0" cy="0"/>
-        </a:xfrm>
-      </p:grpSpPr>
-      <p:sp>
-        <p:nvSpPr>
-          <p:cNvPr id="49154" name="Rectangle 7"/>
-          <p:cNvSpPr>
-            <a:spLocks noGrp="1" noChangeArrowheads="1"/>
-          </p:cNvSpPr>
-          <p:nvPr>
-            <p:ph type="sldNum" sz="quarter" idx="5"/>
-          </p:nvPr>
-        </p:nvSpPr>
-        <p:spPr>
-          <a:noFill/>
-        </p:spPr>
-        <p:txBody>
-          <a:bodyPr/>
-          <a:lstStyle/>
-          <a:p>
-            <a:fld id="{3632ACF5-D53C-164B-A5FB-68C4E461EBF3}" type="slidenum">
-              <a:rPr lang="en-US"/>
-              <a:pPr/>
-              <a:t>13</a:t>
-            </a:fld>
-            <a:endParaRPr lang="en-US"/>
-          </a:p>
-        </p:txBody>
-      </p:sp>
-      <p:sp>
-        <p:nvSpPr>
-          <p:cNvPr id="49155" name="Rectangle 2"/>
-          <p:cNvSpPr>
-            <a:spLocks noGrp="1" noRot="1" noChangeAspect="1" noChangeArrowheads="1" noTextEdit="1"/>
-          </p:cNvSpPr>
-          <p:nvPr>
-            <p:ph type="sldImg"/>
-          </p:nvPr>
-        </p:nvSpPr>
-        <p:spPr>
-          <a:ln/>
-        </p:spPr>
-      </p:sp>
-      <p:sp>
-        <p:nvSpPr>
-          <p:cNvPr id="49156" name="Rectangle 3"/>
-          <p:cNvSpPr>
-            <a:spLocks noGrp="1" noChangeArrowheads="1"/>
-          </p:cNvSpPr>
-          <p:nvPr>
-            <p:ph type="body" idx="1"/>
-          </p:nvPr>
-        </p:nvSpPr>
-        <p:spPr>
-          <a:noFill/>
-          <a:ln/>
-        </p:spPr>
-        <p:txBody>
-          <a:bodyPr/>
-          <a:lstStyle/>
-          <a:p>
-            <a:pPr eaLnBrk="1" hangingPunct="1"/>
-            <a:endParaRPr lang="es-ES" dirty="0">
-              <a:latin typeface="Arial" charset="0"/>
-            </a:endParaRPr>
-          </a:p>
-        </p:txBody>
-      </p:sp>
-    </p:spTree>
-    <p:extLst>
-      <p:ext uri="{BB962C8B-B14F-4D97-AF65-F5344CB8AC3E}">
-        <p14:creationId xmlns:p14="http://schemas.microsoft.com/office/powerpoint/2010/main" val="915173020"/>
-      </p:ext>
-    </p:extLst>
-  </p:cSld>
-  <p:clrMapOvr>
-    <a:masterClrMapping/>
-  </p:clrMapOvr>
-</p:notes>
-</file>
-
-<file path=ppt/notesSlides/notesSlide12.xml><?xml version="1.0" encoding="utf-8"?>
-<p:notes xmlns:a="http://schemas.openxmlformats.org/drawingml/2006/main" xmlns:r="http://schemas.openxmlformats.org/officeDocument/2006/relationships" xmlns:p="http://schemas.openxmlformats.org/presentationml/2006/main">
-  <p:cSld>
-    <p:spTree>
-      <p:nvGrpSpPr>
-        <p:cNvPr id="1" name=""/>
-        <p:cNvGrpSpPr/>
-        <p:nvPr/>
-      </p:nvGrpSpPr>
-      <p:grpSpPr>
-        <a:xfrm>
-          <a:off x="0" y="0"/>
-          <a:ext cx="0" cy="0"/>
-          <a:chOff x="0" y="0"/>
-          <a:chExt cx="0" cy="0"/>
-        </a:xfrm>
-      </p:grpSpPr>
-      <p:sp>
-        <p:nvSpPr>
-          <p:cNvPr id="2" name="Slide Image Placeholder 1"/>
-          <p:cNvSpPr>
-            <a:spLocks noGrp="1" noRot="1" noChangeAspect="1"/>
-          </p:cNvSpPr>
-          <p:nvPr>
-            <p:ph type="sldImg"/>
-          </p:nvPr>
-        </p:nvSpPr>
-        <p:spPr/>
-      </p:sp>
-      <p:sp>
-        <p:nvSpPr>
-          <p:cNvPr id="3" name="Notes Placeholder 2"/>
-          <p:cNvSpPr>
-            <a:spLocks noGrp="1"/>
-          </p:cNvSpPr>
-          <p:nvPr>
-            <p:ph type="body" idx="1"/>
-          </p:nvPr>
-        </p:nvSpPr>
-        <p:spPr/>
-        <p:txBody>
-          <a:bodyPr/>
-          <a:lstStyle/>
-          <a:p>
-            <a:endParaRPr lang="en-CL" dirty="0"/>
-          </a:p>
-        </p:txBody>
-      </p:sp>
-      <p:sp>
-        <p:nvSpPr>
-          <p:cNvPr id="4" name="Slide Number Placeholder 3"/>
-          <p:cNvSpPr>
-            <a:spLocks noGrp="1"/>
-          </p:cNvSpPr>
-          <p:nvPr>
-            <p:ph type="sldNum" sz="quarter" idx="5"/>
-          </p:nvPr>
-        </p:nvSpPr>
-        <p:spPr/>
-        <p:txBody>
-          <a:bodyPr/>
-          <a:lstStyle/>
-          <a:p>
-            <a:fld id="{21E492AF-BD28-844A-9AE6-7501834C0083}" type="slidenum">
-              <a:rPr lang="en-US" smtClean="0"/>
-              <a:pPr/>
-              <a:t>15</a:t>
-            </a:fld>
-            <a:endParaRPr lang="en-US"/>
-          </a:p>
-        </p:txBody>
-      </p:sp>
-    </p:spTree>
-    <p:extLst>
-      <p:ext uri="{BB962C8B-B14F-4D97-AF65-F5344CB8AC3E}">
-        <p14:creationId xmlns:p14="http://schemas.microsoft.com/office/powerpoint/2010/main" val="2732349385"/>
-      </p:ext>
-    </p:extLst>
-  </p:cSld>
-  <p:clrMapOvr>
-    <a:masterClrMapping/>
-  </p:clrMapOvr>
-</p:notes>
-</file>
-
-<file path=ppt/notesSlides/notesSlide13.xml><?xml version="1.0" encoding="utf-8"?>
-<p:notes xmlns:a="http://schemas.openxmlformats.org/drawingml/2006/main" xmlns:r="http://schemas.openxmlformats.org/officeDocument/2006/relationships" xmlns:p="http://schemas.openxmlformats.org/presentationml/2006/main">
-  <p:cSld>
-    <p:spTree>
-      <p:nvGrpSpPr>
-        <p:cNvPr id="1" name=""/>
-        <p:cNvGrpSpPr/>
-        <p:nvPr/>
-      </p:nvGrpSpPr>
-      <p:grpSpPr>
-        <a:xfrm>
-          <a:off x="0" y="0"/>
-          <a:ext cx="0" cy="0"/>
-          <a:chOff x="0" y="0"/>
-          <a:chExt cx="0" cy="0"/>
-        </a:xfrm>
-      </p:grpSpPr>
-      <p:sp>
-        <p:nvSpPr>
-          <p:cNvPr id="2" name="Slide Image Placeholder 1"/>
-          <p:cNvSpPr>
-            <a:spLocks noGrp="1" noRot="1" noChangeAspect="1"/>
-          </p:cNvSpPr>
-          <p:nvPr>
-            <p:ph type="sldImg"/>
-          </p:nvPr>
-        </p:nvSpPr>
-        <p:spPr/>
-      </p:sp>
-      <p:sp>
-        <p:nvSpPr>
-          <p:cNvPr id="3" name="Notes Placeholder 2"/>
-          <p:cNvSpPr>
-            <a:spLocks noGrp="1"/>
-          </p:cNvSpPr>
-          <p:nvPr>
-            <p:ph type="body" idx="1"/>
-          </p:nvPr>
-        </p:nvSpPr>
-        <p:spPr/>
-        <p:txBody>
-          <a:bodyPr/>
-          <a:lstStyle/>
-          <a:p>
-            <a:endParaRPr lang="en-CL" dirty="0"/>
-          </a:p>
-        </p:txBody>
-      </p:sp>
-      <p:sp>
-        <p:nvSpPr>
-          <p:cNvPr id="4" name="Slide Number Placeholder 3"/>
-          <p:cNvSpPr>
-            <a:spLocks noGrp="1"/>
-          </p:cNvSpPr>
-          <p:nvPr>
-            <p:ph type="sldNum" sz="quarter" idx="5"/>
-          </p:nvPr>
-        </p:nvSpPr>
-        <p:spPr/>
-        <p:txBody>
-          <a:bodyPr/>
-          <a:lstStyle/>
-          <a:p>
-            <a:fld id="{21E492AF-BD28-844A-9AE6-7501834C0083}" type="slidenum">
-              <a:rPr lang="en-US" smtClean="0"/>
-              <a:pPr/>
-              <a:t>17</a:t>
-            </a:fld>
-            <a:endParaRPr lang="en-US" dirty="0"/>
-          </a:p>
-        </p:txBody>
-      </p:sp>
-    </p:spTree>
-    <p:extLst>
-      <p:ext uri="{BB962C8B-B14F-4D97-AF65-F5344CB8AC3E}">
-        <p14:creationId xmlns:p14="http://schemas.microsoft.com/office/powerpoint/2010/main" val="2310774299"/>
-      </p:ext>
-    </p:extLst>
-  </p:cSld>
-  <p:clrMapOvr>
-    <a:masterClrMapping/>
-  </p:clrMapOvr>
-</p:notes>
-</file>
-
-<file path=ppt/notesSlides/notesSlide14.xml><?xml version="1.0" encoding="utf-8"?>
-<p:notes xmlns:a="http://schemas.openxmlformats.org/drawingml/2006/main" xmlns:r="http://schemas.openxmlformats.org/officeDocument/2006/relationships" xmlns:p="http://schemas.openxmlformats.org/presentationml/2006/main">
-  <p:cSld>
-    <p:spTree>
-      <p:nvGrpSpPr>
-        <p:cNvPr id="1" name=""/>
-        <p:cNvGrpSpPr/>
-        <p:nvPr/>
-      </p:nvGrpSpPr>
-      <p:grpSpPr>
-        <a:xfrm>
-          <a:off x="0" y="0"/>
-          <a:ext cx="0" cy="0"/>
-          <a:chOff x="0" y="0"/>
-          <a:chExt cx="0" cy="0"/>
-        </a:xfrm>
-      </p:grpSpPr>
-      <p:sp>
-        <p:nvSpPr>
-          <p:cNvPr id="49154" name="Rectangle 7"/>
-          <p:cNvSpPr>
-            <a:spLocks noGrp="1" noChangeArrowheads="1"/>
-          </p:cNvSpPr>
-          <p:nvPr>
-            <p:ph type="sldNum" sz="quarter" idx="5"/>
-          </p:nvPr>
-        </p:nvSpPr>
-        <p:spPr>
-          <a:noFill/>
-        </p:spPr>
-        <p:txBody>
-          <a:bodyPr/>
-          <a:lstStyle/>
-          <a:p>
-            <a:fld id="{3632ACF5-D53C-164B-A5FB-68C4E461EBF3}" type="slidenum">
-              <a:rPr lang="en-US"/>
-              <a:pPr/>
-              <a:t>20</a:t>
-            </a:fld>
-            <a:endParaRPr lang="en-US"/>
-          </a:p>
-        </p:txBody>
-      </p:sp>
-      <p:sp>
-        <p:nvSpPr>
-          <p:cNvPr id="49155" name="Rectangle 2"/>
-          <p:cNvSpPr>
-            <a:spLocks noGrp="1" noRot="1" noChangeAspect="1" noChangeArrowheads="1" noTextEdit="1"/>
-          </p:cNvSpPr>
-          <p:nvPr>
-            <p:ph type="sldImg"/>
-          </p:nvPr>
-        </p:nvSpPr>
-        <p:spPr>
-          <a:ln/>
-        </p:spPr>
-      </p:sp>
-      <p:sp>
-        <p:nvSpPr>
-          <p:cNvPr id="49156" name="Rectangle 3"/>
-          <p:cNvSpPr>
-            <a:spLocks noGrp="1" noChangeArrowheads="1"/>
-          </p:cNvSpPr>
-          <p:nvPr>
-            <p:ph type="body" idx="1"/>
-          </p:nvPr>
-        </p:nvSpPr>
-        <p:spPr>
-          <a:noFill/>
-          <a:ln/>
-        </p:spPr>
-        <p:txBody>
-          <a:bodyPr/>
-          <a:lstStyle/>
-          <a:p>
-            <a:pPr eaLnBrk="1" hangingPunct="1"/>
-            <a:endParaRPr lang="es-ES" dirty="0">
-              <a:latin typeface="Arial" charset="0"/>
-            </a:endParaRPr>
-          </a:p>
-        </p:txBody>
-      </p:sp>
-    </p:spTree>
-    <p:extLst>
-      <p:ext uri="{BB962C8B-B14F-4D97-AF65-F5344CB8AC3E}">
-        <p14:creationId xmlns:p14="http://schemas.microsoft.com/office/powerpoint/2010/main" val="2449021386"/>
-      </p:ext>
-    </p:extLst>
-  </p:cSld>
-  <p:clrMapOvr>
-    <a:masterClrMapping/>
-  </p:clrMapOvr>
-</p:notes>
-</file>
-
-<file path=ppt/notesSlides/notesSlide15.xml><?xml version="1.0" encoding="utf-8"?>
-<p:notes xmlns:a="http://schemas.openxmlformats.org/drawingml/2006/main" xmlns:r="http://schemas.openxmlformats.org/officeDocument/2006/relationships" xmlns:p="http://schemas.openxmlformats.org/presentationml/2006/main">
-  <p:cSld>
-    <p:spTree>
-      <p:nvGrpSpPr>
-        <p:cNvPr id="1" name=""/>
-        <p:cNvGrpSpPr/>
-        <p:nvPr/>
-      </p:nvGrpSpPr>
-      <p:grpSpPr>
-        <a:xfrm>
-          <a:off x="0" y="0"/>
-          <a:ext cx="0" cy="0"/>
-          <a:chOff x="0" y="0"/>
-          <a:chExt cx="0" cy="0"/>
-        </a:xfrm>
-      </p:grpSpPr>
-      <p:sp>
-        <p:nvSpPr>
-          <p:cNvPr id="49154" name="Rectangle 7"/>
-          <p:cNvSpPr>
-            <a:spLocks noGrp="1" noChangeArrowheads="1"/>
-          </p:cNvSpPr>
-          <p:nvPr>
-            <p:ph type="sldNum" sz="quarter" idx="5"/>
-          </p:nvPr>
-        </p:nvSpPr>
-        <p:spPr>
-          <a:noFill/>
-        </p:spPr>
-        <p:txBody>
-          <a:bodyPr/>
-          <a:lstStyle/>
-          <a:p>
-            <a:fld id="{3632ACF5-D53C-164B-A5FB-68C4E461EBF3}" type="slidenum">
-              <a:rPr lang="en-US"/>
-              <a:pPr/>
-              <a:t>21</a:t>
-            </a:fld>
-            <a:endParaRPr lang="en-US"/>
-          </a:p>
-        </p:txBody>
-      </p:sp>
-      <p:sp>
-        <p:nvSpPr>
-          <p:cNvPr id="49155" name="Rectangle 2"/>
-          <p:cNvSpPr>
-            <a:spLocks noGrp="1" noRot="1" noChangeAspect="1" noChangeArrowheads="1" noTextEdit="1"/>
-          </p:cNvSpPr>
-          <p:nvPr>
-            <p:ph type="sldImg"/>
-          </p:nvPr>
-        </p:nvSpPr>
-        <p:spPr>
-          <a:ln/>
-        </p:spPr>
-      </p:sp>
-      <p:sp>
-        <p:nvSpPr>
-          <p:cNvPr id="49156" name="Rectangle 3"/>
-          <p:cNvSpPr>
-            <a:spLocks noGrp="1" noChangeArrowheads="1"/>
-          </p:cNvSpPr>
-          <p:nvPr>
-            <p:ph type="body" idx="1"/>
-          </p:nvPr>
-        </p:nvSpPr>
-        <p:spPr>
-          <a:noFill/>
-          <a:ln/>
-        </p:spPr>
-        <p:txBody>
-          <a:bodyPr/>
-          <a:lstStyle/>
-          <a:p>
-            <a:pPr eaLnBrk="1" hangingPunct="1"/>
-            <a:endParaRPr lang="es-ES" dirty="0">
-              <a:latin typeface="Arial" charset="0"/>
-            </a:endParaRPr>
-          </a:p>
-        </p:txBody>
-      </p:sp>
-    </p:spTree>
-    <p:extLst>
-      <p:ext uri="{BB962C8B-B14F-4D97-AF65-F5344CB8AC3E}">
-        <p14:creationId xmlns:p14="http://schemas.microsoft.com/office/powerpoint/2010/main" val="2385207708"/>
-      </p:ext>
-    </p:extLst>
-  </p:cSld>
-  <p:clrMapOvr>
-    <a:masterClrMapping/>
-  </p:clrMapOvr>
-</p:notes>
-</file>
-
-<file path=ppt/notesSlides/notesSlide16.xml><?xml version="1.0" encoding="utf-8"?>
-<p:notes xmlns:a="http://schemas.openxmlformats.org/drawingml/2006/main" xmlns:r="http://schemas.openxmlformats.org/officeDocument/2006/relationships" xmlns:p="http://schemas.openxmlformats.org/presentationml/2006/main">
-  <p:cSld>
-    <p:spTree>
-      <p:nvGrpSpPr>
-        <p:cNvPr id="1" name=""/>
-        <p:cNvGrpSpPr/>
-        <p:nvPr/>
-      </p:nvGrpSpPr>
-      <p:grpSpPr>
-        <a:xfrm>
-          <a:off x="0" y="0"/>
-          <a:ext cx="0" cy="0"/>
-          <a:chOff x="0" y="0"/>
-          <a:chExt cx="0" cy="0"/>
-        </a:xfrm>
-      </p:grpSpPr>
-      <p:sp>
-        <p:nvSpPr>
-          <p:cNvPr id="2" name="Slide Image Placeholder 1"/>
-          <p:cNvSpPr>
-            <a:spLocks noGrp="1" noRot="1" noChangeAspect="1"/>
-          </p:cNvSpPr>
-          <p:nvPr>
-            <p:ph type="sldImg"/>
-          </p:nvPr>
-        </p:nvSpPr>
-        <p:spPr/>
-      </p:sp>
-      <p:sp>
-        <p:nvSpPr>
-          <p:cNvPr id="3" name="Notes Placeholder 2"/>
-          <p:cNvSpPr>
-            <a:spLocks noGrp="1"/>
-          </p:cNvSpPr>
-          <p:nvPr>
-            <p:ph type="body" idx="1"/>
-          </p:nvPr>
-        </p:nvSpPr>
-        <p:spPr/>
-        <p:txBody>
-          <a:bodyPr/>
-          <a:lstStyle/>
-          <a:p>
-            <a:endParaRPr lang="en-CL" dirty="0"/>
-          </a:p>
-        </p:txBody>
-      </p:sp>
-      <p:sp>
-        <p:nvSpPr>
-          <p:cNvPr id="4" name="Slide Number Placeholder 3"/>
-          <p:cNvSpPr>
-            <a:spLocks noGrp="1"/>
-          </p:cNvSpPr>
-          <p:nvPr>
-            <p:ph type="sldNum" sz="quarter" idx="5"/>
-          </p:nvPr>
-        </p:nvSpPr>
-        <p:spPr/>
-        <p:txBody>
-          <a:bodyPr/>
-          <a:lstStyle/>
-          <a:p>
-            <a:fld id="{21E492AF-BD28-844A-9AE6-7501834C0083}" type="slidenum">
-              <a:rPr lang="en-US" smtClean="0"/>
-              <a:pPr/>
-              <a:t>22</a:t>
-            </a:fld>
-            <a:endParaRPr lang="en-US"/>
-          </a:p>
-        </p:txBody>
-      </p:sp>
-    </p:spTree>
-    <p:extLst>
-      <p:ext uri="{BB962C8B-B14F-4D97-AF65-F5344CB8AC3E}">
-        <p14:creationId xmlns:p14="http://schemas.microsoft.com/office/powerpoint/2010/main" val="4108146571"/>
-      </p:ext>
-    </p:extLst>
-  </p:cSld>
-  <p:clrMapOvr>
-    <a:masterClrMapping/>
-  </p:clrMapOvr>
-</p:notes>
-</file>
-
-<file path=ppt/notesSlides/notesSlide17.xml><?xml version="1.0" encoding="utf-8"?>
-<p:notes xmlns:a="http://schemas.openxmlformats.org/drawingml/2006/main" xmlns:r="http://schemas.openxmlformats.org/officeDocument/2006/relationships" xmlns:p="http://schemas.openxmlformats.org/presentationml/2006/main">
-  <p:cSld>
-    <p:spTree>
-      <p:nvGrpSpPr>
-        <p:cNvPr id="1" name="">
-          <a:extLst>
-            <a:ext uri="{FF2B5EF4-FFF2-40B4-BE49-F238E27FC236}">
-              <a16:creationId xmlns:a16="http://schemas.microsoft.com/office/drawing/2014/main" id="{ED0902F1-DD15-4FF7-88A2-CC447A47536D}"/>
-            </a:ext>
-          </a:extLst>
-        </p:cNvPr>
-        <p:cNvGrpSpPr/>
-        <p:nvPr/>
-      </p:nvGrpSpPr>
-      <p:grpSpPr>
-        <a:xfrm>
-          <a:off x="0" y="0"/>
-          <a:ext cx="0" cy="0"/>
-          <a:chOff x="0" y="0"/>
-          <a:chExt cx="0" cy="0"/>
-        </a:xfrm>
-      </p:grpSpPr>
-      <p:sp>
-        <p:nvSpPr>
-          <p:cNvPr id="2" name="Slide Image Placeholder 1">
-            <a:extLst>
-              <a:ext uri="{FF2B5EF4-FFF2-40B4-BE49-F238E27FC236}">
-                <a16:creationId xmlns:a16="http://schemas.microsoft.com/office/drawing/2014/main" id="{DA1D4703-E691-FD99-6EBE-5EF0E4A288F0}"/>
-              </a:ext>
-            </a:extLst>
-          </p:cNvPr>
-          <p:cNvSpPr>
-            <a:spLocks noGrp="1" noRot="1" noChangeAspect="1"/>
-          </p:cNvSpPr>
-          <p:nvPr>
-            <p:ph type="sldImg"/>
-          </p:nvPr>
-        </p:nvSpPr>
-        <p:spPr/>
-      </p:sp>
-      <p:sp>
-        <p:nvSpPr>
-          <p:cNvPr id="3" name="Notes Placeholder 2">
-            <a:extLst>
-              <a:ext uri="{FF2B5EF4-FFF2-40B4-BE49-F238E27FC236}">
-                <a16:creationId xmlns:a16="http://schemas.microsoft.com/office/drawing/2014/main" id="{4FFD624E-E8C7-E4FF-3862-A9FB984DC477}"/>
-              </a:ext>
-            </a:extLst>
-          </p:cNvPr>
-          <p:cNvSpPr>
-            <a:spLocks noGrp="1"/>
-          </p:cNvSpPr>
-          <p:nvPr>
-            <p:ph type="body" idx="1"/>
-          </p:nvPr>
-        </p:nvSpPr>
-        <p:spPr/>
-        <p:txBody>
-          <a:bodyPr/>
-          <a:lstStyle/>
-          <a:p>
-            <a:endParaRPr lang="en-CL" dirty="0"/>
-          </a:p>
-        </p:txBody>
-      </p:sp>
-      <p:sp>
-        <p:nvSpPr>
-          <p:cNvPr id="4" name="Slide Number Placeholder 3">
-            <a:extLst>
-              <a:ext uri="{FF2B5EF4-FFF2-40B4-BE49-F238E27FC236}">
-                <a16:creationId xmlns:a16="http://schemas.microsoft.com/office/drawing/2014/main" id="{433DC2B4-DEC3-C83A-8852-328E6EFA9180}"/>
-              </a:ext>
-            </a:extLst>
-          </p:cNvPr>
-          <p:cNvSpPr>
-            <a:spLocks noGrp="1"/>
-          </p:cNvSpPr>
-          <p:nvPr>
-            <p:ph type="sldNum" sz="quarter" idx="5"/>
-          </p:nvPr>
-        </p:nvSpPr>
-        <p:spPr/>
-        <p:txBody>
-          <a:bodyPr/>
-          <a:lstStyle/>
-          <a:p>
-            <a:fld id="{21E492AF-BD28-844A-9AE6-7501834C0083}" type="slidenum">
-              <a:rPr lang="en-US" smtClean="0"/>
-              <a:pPr/>
-              <a:t>23</a:t>
-            </a:fld>
-            <a:endParaRPr lang="en-US"/>
-          </a:p>
-        </p:txBody>
-      </p:sp>
-    </p:spTree>
-    <p:extLst>
-      <p:ext uri="{BB962C8B-B14F-4D97-AF65-F5344CB8AC3E}">
-        <p14:creationId xmlns:p14="http://schemas.microsoft.com/office/powerpoint/2010/main" val="1276270427"/>
-      </p:ext>
-    </p:extLst>
-  </p:cSld>
-  <p:clrMapOvr>
-    <a:masterClrMapping/>
-  </p:clrMapOvr>
-</p:notes>
-</file>
-
-<file path=ppt/notesSlides/notesSlide18.xml><?xml version="1.0" encoding="utf-8"?>
-<p:notes xmlns:a="http://schemas.openxmlformats.org/drawingml/2006/main" xmlns:r="http://schemas.openxmlformats.org/officeDocument/2006/relationships" xmlns:p="http://schemas.openxmlformats.org/presentationml/2006/main">
-  <p:cSld>
-    <p:spTree>
-      <p:nvGrpSpPr>
-        <p:cNvPr id="1" name="">
-          <a:extLst>
-            <a:ext uri="{FF2B5EF4-FFF2-40B4-BE49-F238E27FC236}">
-              <a16:creationId xmlns:a16="http://schemas.microsoft.com/office/drawing/2014/main" id="{92206A47-EAE9-1F6B-8FCB-0AE66FE946D2}"/>
-            </a:ext>
-          </a:extLst>
-        </p:cNvPr>
-        <p:cNvGrpSpPr/>
-        <p:nvPr/>
-      </p:nvGrpSpPr>
-      <p:grpSpPr>
-        <a:xfrm>
-          <a:off x="0" y="0"/>
-          <a:ext cx="0" cy="0"/>
-          <a:chOff x="0" y="0"/>
-          <a:chExt cx="0" cy="0"/>
-        </a:xfrm>
-      </p:grpSpPr>
-      <p:sp>
-        <p:nvSpPr>
-          <p:cNvPr id="2" name="Slide Image Placeholder 1">
-            <a:extLst>
-              <a:ext uri="{FF2B5EF4-FFF2-40B4-BE49-F238E27FC236}">
-                <a16:creationId xmlns:a16="http://schemas.microsoft.com/office/drawing/2014/main" id="{AED5511A-ECDA-524F-3F07-552B7799DFF1}"/>
-              </a:ext>
-            </a:extLst>
-          </p:cNvPr>
-          <p:cNvSpPr>
-            <a:spLocks noGrp="1" noRot="1" noChangeAspect="1"/>
-          </p:cNvSpPr>
-          <p:nvPr>
-            <p:ph type="sldImg"/>
-          </p:nvPr>
-        </p:nvSpPr>
-        <p:spPr/>
-      </p:sp>
-      <p:sp>
-        <p:nvSpPr>
-          <p:cNvPr id="3" name="Notes Placeholder 2">
-            <a:extLst>
-              <a:ext uri="{FF2B5EF4-FFF2-40B4-BE49-F238E27FC236}">
-                <a16:creationId xmlns:a16="http://schemas.microsoft.com/office/drawing/2014/main" id="{03896A6F-FAFA-245F-028F-B85076D62A18}"/>
-              </a:ext>
-            </a:extLst>
-          </p:cNvPr>
-          <p:cNvSpPr>
-            <a:spLocks noGrp="1"/>
-          </p:cNvSpPr>
-          <p:nvPr>
-            <p:ph type="body" idx="1"/>
-          </p:nvPr>
-        </p:nvSpPr>
-        <p:spPr/>
-        <p:txBody>
-          <a:bodyPr/>
-          <a:lstStyle/>
-          <a:p>
-            <a:endParaRPr lang="en-CL" dirty="0"/>
-          </a:p>
-        </p:txBody>
-      </p:sp>
-      <p:sp>
-        <p:nvSpPr>
-          <p:cNvPr id="4" name="Slide Number Placeholder 3">
-            <a:extLst>
-              <a:ext uri="{FF2B5EF4-FFF2-40B4-BE49-F238E27FC236}">
-                <a16:creationId xmlns:a16="http://schemas.microsoft.com/office/drawing/2014/main" id="{5D6A0A14-C6EE-D313-E3C6-3ABFFDF878C3}"/>
-              </a:ext>
-            </a:extLst>
-          </p:cNvPr>
-          <p:cNvSpPr>
-            <a:spLocks noGrp="1"/>
-          </p:cNvSpPr>
-          <p:nvPr>
-            <p:ph type="sldNum" sz="quarter" idx="5"/>
-          </p:nvPr>
-        </p:nvSpPr>
-        <p:spPr/>
-        <p:txBody>
-          <a:bodyPr/>
-          <a:lstStyle/>
-          <a:p>
-            <a:fld id="{21E492AF-BD28-844A-9AE6-7501834C0083}" type="slidenum">
-              <a:rPr lang="en-US" smtClean="0"/>
-              <a:pPr/>
-              <a:t>24</a:t>
-            </a:fld>
-            <a:endParaRPr lang="en-US"/>
-          </a:p>
-        </p:txBody>
-      </p:sp>
-    </p:spTree>
-    <p:extLst>
-      <p:ext uri="{BB962C8B-B14F-4D97-AF65-F5344CB8AC3E}">
-        <p14:creationId xmlns:p14="http://schemas.microsoft.com/office/powerpoint/2010/main" val="1127994585"/>
-      </p:ext>
-    </p:extLst>
-  </p:cSld>
-  <p:clrMapOvr>
-    <a:masterClrMapping/>
-  </p:clrMapOvr>
-</p:notes>
-</file>
-
 <file path=ppt/notesSlides/notesSlide2.xml><?xml version="1.0" encoding="utf-8"?>
 <p:notes xmlns:a="http://schemas.openxmlformats.org/drawingml/2006/main" xmlns:r="http://schemas.openxmlformats.org/officeDocument/2006/relationships" xmlns:p="http://schemas.openxmlformats.org/presentationml/2006/main">
   <p:cSld>
@@ -1750,101 +857,6 @@
   <p:cSld>
     <p:spTree>
       <p:nvGrpSpPr>
-        <p:cNvPr id="1" name=""/>
-        <p:cNvGrpSpPr/>
-        <p:nvPr/>
-      </p:nvGrpSpPr>
-      <p:grpSpPr>
-        <a:xfrm>
-          <a:off x="0" y="0"/>
-          <a:ext cx="0" cy="0"/>
-          <a:chOff x="0" y="0"/>
-          <a:chExt cx="0" cy="0"/>
-        </a:xfrm>
-      </p:grpSpPr>
-      <p:sp>
-        <p:nvSpPr>
-          <p:cNvPr id="45058" name="Rectangle 7"/>
-          <p:cNvSpPr>
-            <a:spLocks noGrp="1" noChangeArrowheads="1"/>
-          </p:cNvSpPr>
-          <p:nvPr>
-            <p:ph type="sldNum" sz="quarter" idx="5"/>
-          </p:nvPr>
-        </p:nvSpPr>
-        <p:spPr>
-          <a:noFill/>
-        </p:spPr>
-        <p:txBody>
-          <a:bodyPr/>
-          <a:lstStyle/>
-          <a:p>
-            <a:fld id="{36AB4ACC-898F-094F-890C-FD5BBBEB5189}" type="slidenum">
-              <a:rPr lang="en-US"/>
-              <a:pPr/>
-              <a:t>7</a:t>
-            </a:fld>
-            <a:endParaRPr lang="en-US"/>
-          </a:p>
-        </p:txBody>
-      </p:sp>
-      <p:sp>
-        <p:nvSpPr>
-          <p:cNvPr id="45059" name="Rectangle 2"/>
-          <p:cNvSpPr>
-            <a:spLocks noGrp="1" noRot="1" noChangeAspect="1" noChangeArrowheads="1" noTextEdit="1"/>
-          </p:cNvSpPr>
-          <p:nvPr>
-            <p:ph type="sldImg"/>
-          </p:nvPr>
-        </p:nvSpPr>
-        <p:spPr>
-          <a:ln/>
-        </p:spPr>
-      </p:sp>
-      <p:sp>
-        <p:nvSpPr>
-          <p:cNvPr id="45060" name="Rectangle 3"/>
-          <p:cNvSpPr>
-            <a:spLocks noGrp="1" noChangeArrowheads="1"/>
-          </p:cNvSpPr>
-          <p:nvPr>
-            <p:ph type="body" idx="1"/>
-          </p:nvPr>
-        </p:nvSpPr>
-        <p:spPr>
-          <a:noFill/>
-          <a:ln/>
-        </p:spPr>
-        <p:txBody>
-          <a:bodyPr/>
-          <a:lstStyle/>
-          <a:p>
-            <a:pPr eaLnBrk="1" hangingPunct="1"/>
-            <a:endParaRPr lang="es-ES" dirty="0">
-              <a:latin typeface="Arial" charset="0"/>
-            </a:endParaRPr>
-          </a:p>
-        </p:txBody>
-      </p:sp>
-    </p:spTree>
-    <p:extLst>
-      <p:ext uri="{BB962C8B-B14F-4D97-AF65-F5344CB8AC3E}">
-        <p14:creationId xmlns:p14="http://schemas.microsoft.com/office/powerpoint/2010/main" val="297332740"/>
-      </p:ext>
-    </p:extLst>
-  </p:cSld>
-  <p:clrMapOvr>
-    <a:masterClrMapping/>
-  </p:clrMapOvr>
-</p:notes>
-</file>
-
-<file path=ppt/notesSlides/notesSlide6.xml><?xml version="1.0" encoding="utf-8"?>
-<p:notes xmlns:a="http://schemas.openxmlformats.org/drawingml/2006/main" xmlns:r="http://schemas.openxmlformats.org/officeDocument/2006/relationships" xmlns:p="http://schemas.openxmlformats.org/presentationml/2006/main">
-  <p:cSld>
-    <p:spTree>
-      <p:nvGrpSpPr>
         <p:cNvPr id="1" name="">
           <a:extLst>
             <a:ext uri="{FF2B5EF4-FFF2-40B4-BE49-F238E27FC236}">
@@ -1889,7 +901,7 @@
             <a:fld id="{36AB4ACC-898F-094F-890C-FD5BBBEB5189}" type="slidenum">
               <a:rPr lang="en-US"/>
               <a:pPr/>
-              <a:t>8</a:t>
+              <a:t>7</a:t>
             </a:fld>
             <a:endParaRPr lang="en-US"/>
           </a:p>
@@ -1959,7 +971,7 @@
 </p:notes>
 </file>
 
-<file path=ppt/notesSlides/notesSlide7.xml><?xml version="1.0" encoding="utf-8"?>
+<file path=ppt/notesSlides/notesSlide6.xml><?xml version="1.0" encoding="utf-8"?>
 <p:notes xmlns:a="http://schemas.openxmlformats.org/drawingml/2006/main" xmlns:r="http://schemas.openxmlformats.org/officeDocument/2006/relationships" xmlns:p="http://schemas.openxmlformats.org/presentationml/2006/main">
   <p:cSld>
     <p:spTree>
@@ -1996,7 +1008,7 @@
             <a:fld id="{CE623B0D-C2BC-E742-94BB-E3F3E8EB397C}" type="slidenum">
               <a:rPr lang="en-US"/>
               <a:pPr/>
-              <a:t>9</a:t>
+              <a:t>8</a:t>
             </a:fld>
             <a:endParaRPr lang="en-US"/>
           </a:p>
@@ -2045,220 +1057,6 @@
     <p:extLst>
       <p:ext uri="{BB962C8B-B14F-4D97-AF65-F5344CB8AC3E}">
         <p14:creationId xmlns:p14="http://schemas.microsoft.com/office/powerpoint/2010/main" val="76914611"/>
-      </p:ext>
-    </p:extLst>
-  </p:cSld>
-  <p:clrMapOvr>
-    <a:masterClrMapping/>
-  </p:clrMapOvr>
-</p:notes>
-</file>
-
-<file path=ppt/notesSlides/notesSlide8.xml><?xml version="1.0" encoding="utf-8"?>
-<p:notes xmlns:a="http://schemas.openxmlformats.org/drawingml/2006/main" xmlns:r="http://schemas.openxmlformats.org/officeDocument/2006/relationships" xmlns:p="http://schemas.openxmlformats.org/presentationml/2006/main">
-  <p:cSld>
-    <p:spTree>
-      <p:nvGrpSpPr>
-        <p:cNvPr id="1" name=""/>
-        <p:cNvGrpSpPr/>
-        <p:nvPr/>
-      </p:nvGrpSpPr>
-      <p:grpSpPr>
-        <a:xfrm>
-          <a:off x="0" y="0"/>
-          <a:ext cx="0" cy="0"/>
-          <a:chOff x="0" y="0"/>
-          <a:chExt cx="0" cy="0"/>
-        </a:xfrm>
-      </p:grpSpPr>
-      <p:sp>
-        <p:nvSpPr>
-          <p:cNvPr id="48130" name="Rectangle 7"/>
-          <p:cNvSpPr>
-            <a:spLocks noGrp="1" noChangeArrowheads="1"/>
-          </p:cNvSpPr>
-          <p:nvPr>
-            <p:ph type="sldNum" sz="quarter" idx="5"/>
-          </p:nvPr>
-        </p:nvSpPr>
-        <p:spPr>
-          <a:noFill/>
-        </p:spPr>
-        <p:txBody>
-          <a:bodyPr/>
-          <a:lstStyle/>
-          <a:p>
-            <a:fld id="{467CBDD7-73D8-9B43-BD1F-1839DCE59A40}" type="slidenum">
-              <a:rPr lang="en-US"/>
-              <a:pPr/>
-              <a:t>10</a:t>
-            </a:fld>
-            <a:endParaRPr lang="en-US"/>
-          </a:p>
-        </p:txBody>
-      </p:sp>
-      <p:sp>
-        <p:nvSpPr>
-          <p:cNvPr id="48131" name="Rectangle 2"/>
-          <p:cNvSpPr>
-            <a:spLocks noGrp="1" noRot="1" noChangeAspect="1" noChangeArrowheads="1" noTextEdit="1"/>
-          </p:cNvSpPr>
-          <p:nvPr>
-            <p:ph type="sldImg"/>
-          </p:nvPr>
-        </p:nvSpPr>
-        <p:spPr>
-          <a:ln/>
-        </p:spPr>
-      </p:sp>
-      <p:sp>
-        <p:nvSpPr>
-          <p:cNvPr id="48132" name="Rectangle 3"/>
-          <p:cNvSpPr>
-            <a:spLocks noGrp="1" noChangeArrowheads="1"/>
-          </p:cNvSpPr>
-          <p:nvPr>
-            <p:ph type="body" idx="1"/>
-          </p:nvPr>
-        </p:nvSpPr>
-        <p:spPr>
-          <a:noFill/>
-          <a:ln/>
-        </p:spPr>
-        <p:txBody>
-          <a:bodyPr/>
-          <a:lstStyle/>
-          <a:p>
-            <a:pPr eaLnBrk="1" hangingPunct="1"/>
-            <a:endParaRPr lang="es-ES" dirty="0">
-              <a:latin typeface="Arial" charset="0"/>
-            </a:endParaRPr>
-          </a:p>
-        </p:txBody>
-      </p:sp>
-    </p:spTree>
-    <p:extLst>
-      <p:ext uri="{BB962C8B-B14F-4D97-AF65-F5344CB8AC3E}">
-        <p14:creationId xmlns:p14="http://schemas.microsoft.com/office/powerpoint/2010/main" val="1732658620"/>
-      </p:ext>
-    </p:extLst>
-  </p:cSld>
-  <p:clrMapOvr>
-    <a:masterClrMapping/>
-  </p:clrMapOvr>
-</p:notes>
-</file>
-
-<file path=ppt/notesSlides/notesSlide9.xml><?xml version="1.0" encoding="utf-8"?>
-<p:notes xmlns:a="http://schemas.openxmlformats.org/drawingml/2006/main" xmlns:r="http://schemas.openxmlformats.org/officeDocument/2006/relationships" xmlns:p="http://schemas.openxmlformats.org/presentationml/2006/main">
-  <p:cSld>
-    <p:spTree>
-      <p:nvGrpSpPr>
-        <p:cNvPr id="1" name="">
-          <a:extLst>
-            <a:ext uri="{FF2B5EF4-FFF2-40B4-BE49-F238E27FC236}">
-              <a16:creationId xmlns:a16="http://schemas.microsoft.com/office/drawing/2014/main" id="{22BAF0C5-E66B-AD71-9371-CF6ED08F1B36}"/>
-            </a:ext>
-          </a:extLst>
-        </p:cNvPr>
-        <p:cNvGrpSpPr/>
-        <p:nvPr/>
-      </p:nvGrpSpPr>
-      <p:grpSpPr>
-        <a:xfrm>
-          <a:off x="0" y="0"/>
-          <a:ext cx="0" cy="0"/>
-          <a:chOff x="0" y="0"/>
-          <a:chExt cx="0" cy="0"/>
-        </a:xfrm>
-      </p:grpSpPr>
-      <p:sp>
-        <p:nvSpPr>
-          <p:cNvPr id="48130" name="Rectangle 7">
-            <a:extLst>
-              <a:ext uri="{FF2B5EF4-FFF2-40B4-BE49-F238E27FC236}">
-                <a16:creationId xmlns:a16="http://schemas.microsoft.com/office/drawing/2014/main" id="{F3526352-92FC-9722-049F-F6D91C61B3AD}"/>
-              </a:ext>
-            </a:extLst>
-          </p:cNvPr>
-          <p:cNvSpPr>
-            <a:spLocks noGrp="1" noChangeArrowheads="1"/>
-          </p:cNvSpPr>
-          <p:nvPr>
-            <p:ph type="sldNum" sz="quarter" idx="5"/>
-          </p:nvPr>
-        </p:nvSpPr>
-        <p:spPr>
-          <a:noFill/>
-        </p:spPr>
-        <p:txBody>
-          <a:bodyPr/>
-          <a:lstStyle/>
-          <a:p>
-            <a:fld id="{467CBDD7-73D8-9B43-BD1F-1839DCE59A40}" type="slidenum">
-              <a:rPr lang="en-US"/>
-              <a:pPr/>
-              <a:t>11</a:t>
-            </a:fld>
-            <a:endParaRPr lang="en-US"/>
-          </a:p>
-        </p:txBody>
-      </p:sp>
-      <p:sp>
-        <p:nvSpPr>
-          <p:cNvPr id="48131" name="Rectangle 2">
-            <a:extLst>
-              <a:ext uri="{FF2B5EF4-FFF2-40B4-BE49-F238E27FC236}">
-                <a16:creationId xmlns:a16="http://schemas.microsoft.com/office/drawing/2014/main" id="{F1A2A55C-7C39-E6CD-7A58-B705BCCA1CE2}"/>
-              </a:ext>
-            </a:extLst>
-          </p:cNvPr>
-          <p:cNvSpPr>
-            <a:spLocks noGrp="1" noRot="1" noChangeAspect="1" noChangeArrowheads="1" noTextEdit="1"/>
-          </p:cNvSpPr>
-          <p:nvPr>
-            <p:ph type="sldImg"/>
-          </p:nvPr>
-        </p:nvSpPr>
-        <p:spPr>
-          <a:ln/>
-        </p:spPr>
-      </p:sp>
-      <p:sp>
-        <p:nvSpPr>
-          <p:cNvPr id="48132" name="Rectangle 3">
-            <a:extLst>
-              <a:ext uri="{FF2B5EF4-FFF2-40B4-BE49-F238E27FC236}">
-                <a16:creationId xmlns:a16="http://schemas.microsoft.com/office/drawing/2014/main" id="{02F22295-B493-CAD1-7568-CDFE0ACC9923}"/>
-              </a:ext>
-            </a:extLst>
-          </p:cNvPr>
-          <p:cNvSpPr>
-            <a:spLocks noGrp="1" noChangeArrowheads="1"/>
-          </p:cNvSpPr>
-          <p:nvPr>
-            <p:ph type="body" idx="1"/>
-          </p:nvPr>
-        </p:nvSpPr>
-        <p:spPr>
-          <a:noFill/>
-          <a:ln/>
-        </p:spPr>
-        <p:txBody>
-          <a:bodyPr/>
-          <a:lstStyle/>
-          <a:p>
-            <a:pPr eaLnBrk="1" hangingPunct="1"/>
-            <a:endParaRPr lang="es-ES" dirty="0">
-              <a:latin typeface="Arial" charset="0"/>
-            </a:endParaRPr>
-          </a:p>
-        </p:txBody>
-      </p:sp>
-    </p:spTree>
-    <p:extLst>
-      <p:ext uri="{BB962C8B-B14F-4D97-AF65-F5344CB8AC3E}">
-        <p14:creationId xmlns:p14="http://schemas.microsoft.com/office/powerpoint/2010/main" val="2419597841"/>
       </p:ext>
     </p:extLst>
   </p:cSld>
@@ -6689,2691 +5487,6 @@
 </p:sld>
 </file>
 
-<file path=ppt/slides/slide10.xml><?xml version="1.0" encoding="utf-8"?>
-<p:sld xmlns:a="http://schemas.openxmlformats.org/drawingml/2006/main" xmlns:r="http://schemas.openxmlformats.org/officeDocument/2006/relationships" xmlns:p="http://schemas.openxmlformats.org/presentationml/2006/main">
-  <p:cSld>
-    <p:spTree>
-      <p:nvGrpSpPr>
-        <p:cNvPr id="1" name=""/>
-        <p:cNvGrpSpPr/>
-        <p:nvPr/>
-      </p:nvGrpSpPr>
-      <p:grpSpPr>
-        <a:xfrm>
-          <a:off x="0" y="0"/>
-          <a:ext cx="0" cy="0"/>
-          <a:chOff x="0" y="0"/>
-          <a:chExt cx="0" cy="0"/>
-        </a:xfrm>
-      </p:grpSpPr>
-      <p:sp>
-        <p:nvSpPr>
-          <p:cNvPr id="23554" name="Text Box 2"/>
-          <p:cNvSpPr txBox="1">
-            <a:spLocks noChangeArrowheads="1"/>
-          </p:cNvSpPr>
-          <p:nvPr/>
-        </p:nvSpPr>
-        <p:spPr bwMode="auto">
-          <a:xfrm>
-            <a:off x="591670" y="870792"/>
-            <a:ext cx="10668000" cy="7417415"/>
-          </a:xfrm>
-          <a:prstGeom prst="rect">
-            <a:avLst/>
-          </a:prstGeom>
-          <a:noFill/>
-          <a:ln w="9525">
-            <a:noFill/>
-            <a:miter lim="800000"/>
-            <a:headEnd/>
-            <a:tailEnd/>
-          </a:ln>
-        </p:spPr>
-        <p:txBody>
-          <a:bodyPr wrap="square">
-            <a:prstTxWarp prst="textNoShape">
-              <a:avLst/>
-            </a:prstTxWarp>
-            <a:spAutoFit/>
-          </a:bodyPr>
-          <a:lstStyle/>
-          <a:p>
-            <a:r>
-              <a:rPr lang="es-ES_tradnl" sz="2800" b="1" dirty="0">
-                <a:solidFill>
-                  <a:schemeClr val="accent2"/>
-                </a:solidFill>
-                <a:latin typeface="Gill Sans MT" panose="020B0502020104020203" pitchFamily="34" charset="77"/>
-              </a:rPr>
-              <a:t>Código de Honor e Integridad Académica</a:t>
-            </a:r>
-          </a:p>
-          <a:p>
-            <a:endParaRPr lang="es-ES_tradnl" sz="2800" b="1" dirty="0">
-              <a:latin typeface="Gill Sans MT" panose="020B0502020104020203" pitchFamily="34" charset="77"/>
-            </a:endParaRPr>
-          </a:p>
-          <a:p>
-            <a:r>
-              <a:rPr lang="es-ES_tradnl" sz="2800" dirty="0">
-                <a:latin typeface="Gill Sans MT" panose="020B0502020104020203" pitchFamily="34" charset="77"/>
-              </a:rPr>
-              <a:t>Este curso adscribe el Código de Honor establecido por la Escuela de Ingeniería el que es vinculante. Todo trabajo evaluado en este curso debe ser propio. En caso de que exista colaboración permitida con otros estudiantes, el trabajo deberá referenciar y atribuir correctamente dicha contribución a quien corresponda. </a:t>
-            </a:r>
-          </a:p>
-          <a:p>
-            <a:endParaRPr lang="es-ES_tradnl" sz="2800" dirty="0">
-              <a:latin typeface="Gill Sans MT" panose="020B0502020104020203" pitchFamily="34" charset="77"/>
-            </a:endParaRPr>
-          </a:p>
-          <a:p>
-            <a:r>
-              <a:rPr lang="es-ES_tradnl" sz="2800" dirty="0">
-                <a:latin typeface="Gill Sans MT" panose="020B0502020104020203" pitchFamily="34" charset="77"/>
-              </a:rPr>
-              <a:t>Como estudiante es su deber conocer la versión en línea del </a:t>
-            </a:r>
-            <a:r>
-              <a:rPr lang="es-ES_tradnl" sz="2800" dirty="0">
-                <a:latin typeface="Gill Sans MT" panose="020B0502020104020203" pitchFamily="34" charset="77"/>
-                <a:hlinkClick r:id="rId3"/>
-              </a:rPr>
-              <a:t>Código de Honor</a:t>
-            </a:r>
-            <a:r>
-              <a:rPr lang="es-ES_tradnl" sz="2800" dirty="0">
-                <a:latin typeface="Gill Sans MT" panose="020B0502020104020203" pitchFamily="34" charset="77"/>
-              </a:rPr>
-              <a:t>. </a:t>
-            </a:r>
-          </a:p>
-          <a:p>
-            <a:endParaRPr lang="es-ES_tradnl" sz="2800" dirty="0">
-              <a:latin typeface="Gill Sans MT" panose="020B0502020104020203" pitchFamily="34" charset="77"/>
-            </a:endParaRPr>
-          </a:p>
-          <a:p>
-            <a:r>
-              <a:rPr lang="es-ES_tradnl" sz="2800" dirty="0">
-                <a:latin typeface="Gill Sans MT" panose="020B0502020104020203" pitchFamily="34" charset="77"/>
-              </a:rPr>
-              <a:t>Además, los estudiantes de este curso declaran conocer </a:t>
-            </a:r>
-            <a:r>
-              <a:rPr lang="es-ES_tradnl" sz="2800" dirty="0">
-                <a:latin typeface="Gill Sans MT" panose="020B0502020104020203" pitchFamily="34" charset="77"/>
-                <a:hlinkClick r:id="rId4"/>
-              </a:rPr>
-              <a:t>Política de Integridad Académica del Departamento de Ciencia de la Computación</a:t>
-            </a:r>
-            <a:r>
-              <a:rPr lang="es-ES_tradnl" sz="2800" dirty="0">
-                <a:latin typeface="Gill Sans MT" panose="020B0502020104020203" pitchFamily="34" charset="77"/>
-              </a:rPr>
-              <a:t>.</a:t>
-            </a:r>
-          </a:p>
-          <a:p>
-            <a:endParaRPr lang="es-ES_tradnl" sz="2800" b="1" dirty="0">
-              <a:solidFill>
-                <a:schemeClr val="accent2"/>
-              </a:solidFill>
-              <a:latin typeface="Gill Sans MT" panose="020B0502020104020203" pitchFamily="34" charset="77"/>
-            </a:endParaRPr>
-          </a:p>
-          <a:p>
-            <a:endParaRPr lang="es-ES_tradnl" sz="2800" dirty="0">
-              <a:latin typeface="Gill Sans MT" panose="020B0502020104020203" pitchFamily="34" charset="77"/>
-            </a:endParaRPr>
-          </a:p>
-          <a:p>
-            <a:br>
-              <a:rPr lang="es-ES_tradnl" sz="2800" b="1" dirty="0">
-                <a:solidFill>
-                  <a:schemeClr val="accent2"/>
-                </a:solidFill>
-                <a:latin typeface="Gill Sans MT" panose="020B0502020104020203" pitchFamily="34" charset="77"/>
-              </a:rPr>
-            </a:br>
-            <a:endParaRPr lang="es-ES_tradnl" sz="2800" b="1" dirty="0">
-              <a:solidFill>
-                <a:schemeClr val="accent2"/>
-              </a:solidFill>
-              <a:latin typeface="Gill Sans MT" panose="020B0502020104020203" pitchFamily="34" charset="77"/>
-            </a:endParaRPr>
-          </a:p>
-        </p:txBody>
-      </p:sp>
-      <p:sp>
-        <p:nvSpPr>
-          <p:cNvPr id="2" name="Date Placeholder 1">
-            <a:extLst>
-              <a:ext uri="{FF2B5EF4-FFF2-40B4-BE49-F238E27FC236}">
-                <a16:creationId xmlns:a16="http://schemas.microsoft.com/office/drawing/2014/main" id="{A892B4C6-05B6-F8BF-1F71-D39606052CCD}"/>
-              </a:ext>
-            </a:extLst>
-          </p:cNvPr>
-          <p:cNvSpPr>
-            <a:spLocks noGrp="1"/>
-          </p:cNvSpPr>
-          <p:nvPr>
-            <p:ph type="dt" sz="half" idx="10"/>
-          </p:nvPr>
-        </p:nvSpPr>
-        <p:spPr/>
-        <p:txBody>
-          <a:bodyPr/>
-          <a:lstStyle/>
-          <a:p>
-            <a:r>
-              <a:rPr lang="en-US"/>
-              <a:t>(c) D.Mery - PR00</a:t>
-            </a:r>
-            <a:endParaRPr lang="en-CL"/>
-          </a:p>
-        </p:txBody>
-      </p:sp>
-      <p:sp>
-        <p:nvSpPr>
-          <p:cNvPr id="3" name="Slide Number Placeholder 2">
-            <a:extLst>
-              <a:ext uri="{FF2B5EF4-FFF2-40B4-BE49-F238E27FC236}">
-                <a16:creationId xmlns:a16="http://schemas.microsoft.com/office/drawing/2014/main" id="{573AC492-29C0-F119-B713-8D989D345E79}"/>
-              </a:ext>
-            </a:extLst>
-          </p:cNvPr>
-          <p:cNvSpPr>
-            <a:spLocks noGrp="1"/>
-          </p:cNvSpPr>
-          <p:nvPr>
-            <p:ph type="sldNum" sz="quarter" idx="12"/>
-          </p:nvPr>
-        </p:nvSpPr>
-        <p:spPr/>
-        <p:txBody>
-          <a:bodyPr/>
-          <a:lstStyle/>
-          <a:p>
-            <a:fld id="{006AE8E3-C79C-E14F-9140-34B0C7F543F1}" type="slidenum">
-              <a:rPr lang="en-CL" smtClean="0"/>
-              <a:t>10</a:t>
-            </a:fld>
-            <a:endParaRPr lang="en-CL"/>
-          </a:p>
-        </p:txBody>
-      </p:sp>
-    </p:spTree>
-  </p:cSld>
-  <p:clrMapOvr>
-    <a:masterClrMapping/>
-  </p:clrMapOvr>
-</p:sld>
-</file>
-
-<file path=ppt/slides/slide11.xml><?xml version="1.0" encoding="utf-8"?>
-<p:sld xmlns:a="http://schemas.openxmlformats.org/drawingml/2006/main" xmlns:r="http://schemas.openxmlformats.org/officeDocument/2006/relationships" xmlns:p="http://schemas.openxmlformats.org/presentationml/2006/main">
-  <p:cSld>
-    <p:spTree>
-      <p:nvGrpSpPr>
-        <p:cNvPr id="1" name="">
-          <a:extLst>
-            <a:ext uri="{FF2B5EF4-FFF2-40B4-BE49-F238E27FC236}">
-              <a16:creationId xmlns:a16="http://schemas.microsoft.com/office/drawing/2014/main" id="{27B231C5-5062-90BB-7464-FD7BF8439AA0}"/>
-            </a:ext>
-          </a:extLst>
-        </p:cNvPr>
-        <p:cNvGrpSpPr/>
-        <p:nvPr/>
-      </p:nvGrpSpPr>
-      <p:grpSpPr>
-        <a:xfrm>
-          <a:off x="0" y="0"/>
-          <a:ext cx="0" cy="0"/>
-          <a:chOff x="0" y="0"/>
-          <a:chExt cx="0" cy="0"/>
-        </a:xfrm>
-      </p:grpSpPr>
-      <p:sp>
-        <p:nvSpPr>
-          <p:cNvPr id="23554" name="Text Box 2">
-            <a:extLst>
-              <a:ext uri="{FF2B5EF4-FFF2-40B4-BE49-F238E27FC236}">
-                <a16:creationId xmlns:a16="http://schemas.microsoft.com/office/drawing/2014/main" id="{AA2EBFAC-475F-DD70-42FE-FCDD0F1CB9AA}"/>
-              </a:ext>
-            </a:extLst>
-          </p:cNvPr>
-          <p:cNvSpPr txBox="1">
-            <a:spLocks noChangeArrowheads="1"/>
-          </p:cNvSpPr>
-          <p:nvPr/>
-        </p:nvSpPr>
-        <p:spPr bwMode="auto">
-          <a:xfrm>
-            <a:off x="534520" y="402162"/>
-            <a:ext cx="10668000" cy="6247864"/>
-          </a:xfrm>
-          <a:prstGeom prst="rect">
-            <a:avLst/>
-          </a:prstGeom>
-          <a:noFill/>
-          <a:ln w="9525">
-            <a:noFill/>
-            <a:miter lim="800000"/>
-            <a:headEnd/>
-            <a:tailEnd/>
-          </a:ln>
-        </p:spPr>
-        <p:txBody>
-          <a:bodyPr wrap="square">
-            <a:prstTxWarp prst="textNoShape">
-              <a:avLst/>
-            </a:prstTxWarp>
-            <a:spAutoFit/>
-          </a:bodyPr>
-          <a:lstStyle/>
-          <a:p>
-            <a:r>
-              <a:rPr lang="es-ES_tradnl" sz="3200" b="1" dirty="0">
-                <a:solidFill>
-                  <a:schemeClr val="accent2"/>
-                </a:solidFill>
-                <a:latin typeface="Gill Sans MT" panose="020B0502020104020203" pitchFamily="34" charset="77"/>
-              </a:rPr>
-              <a:t>Lineamientos del uso de la IA en el Curso</a:t>
-            </a:r>
-          </a:p>
-          <a:p>
-            <a:endParaRPr lang="es-ES_tradnl" sz="2800" b="1" dirty="0">
-              <a:latin typeface="Gill Sans MT" panose="020B0502020104020203" pitchFamily="34" charset="77"/>
-            </a:endParaRPr>
-          </a:p>
-          <a:p>
-            <a:r>
-              <a:rPr lang="es-ES_tradnl" sz="3200" dirty="0">
-                <a:latin typeface="Gill Sans MT" panose="020B0502020104020203" pitchFamily="34" charset="77"/>
-              </a:rPr>
-              <a:t>L1. Se permite el uso de IA como un asistente en el desarrollo de tareas, proyectos o cualquier instrumento de evaluación que se realice en las tareas y en los ejercicios en clase.</a:t>
-            </a:r>
-          </a:p>
-          <a:p>
-            <a:endParaRPr lang="es-ES_tradnl" sz="3200" dirty="0">
-              <a:latin typeface="Gill Sans MT" panose="020B0502020104020203" pitchFamily="34" charset="77"/>
-            </a:endParaRPr>
-          </a:p>
-          <a:p>
-            <a:r>
-              <a:rPr lang="es-ES_tradnl" sz="3200" dirty="0">
-                <a:latin typeface="Gill Sans MT" panose="020B0502020104020203" pitchFamily="34" charset="77"/>
-              </a:rPr>
-              <a:t>L2. Todo curso debe incluir instancias de evaluación que evidencien el logro de competencias sin el uso de IA (interrogaciones y examen final). El cumplimiento de estas competencias debe ser requisito de aprobación del curso.</a:t>
-            </a:r>
-          </a:p>
-          <a:p>
-            <a:endParaRPr lang="es-ES_tradnl" sz="2800" dirty="0">
-              <a:latin typeface="Gill Sans MT" panose="020B0502020104020203" pitchFamily="34" charset="77"/>
-            </a:endParaRPr>
-          </a:p>
-          <a:p>
-            <a:br>
-              <a:rPr lang="es-ES_tradnl" sz="2800" b="1" dirty="0">
-                <a:solidFill>
-                  <a:schemeClr val="accent2"/>
-                </a:solidFill>
-                <a:latin typeface="Gill Sans MT" panose="020B0502020104020203" pitchFamily="34" charset="77"/>
-              </a:rPr>
-            </a:br>
-            <a:endParaRPr lang="es-ES_tradnl" sz="2800" b="1" dirty="0">
-              <a:solidFill>
-                <a:schemeClr val="accent2"/>
-              </a:solidFill>
-              <a:latin typeface="Gill Sans MT" panose="020B0502020104020203" pitchFamily="34" charset="77"/>
-            </a:endParaRPr>
-          </a:p>
-        </p:txBody>
-      </p:sp>
-      <p:sp>
-        <p:nvSpPr>
-          <p:cNvPr id="2" name="Date Placeholder 1">
-            <a:extLst>
-              <a:ext uri="{FF2B5EF4-FFF2-40B4-BE49-F238E27FC236}">
-                <a16:creationId xmlns:a16="http://schemas.microsoft.com/office/drawing/2014/main" id="{A7C68DC9-776D-19DD-2008-049364774740}"/>
-              </a:ext>
-            </a:extLst>
-          </p:cNvPr>
-          <p:cNvSpPr>
-            <a:spLocks noGrp="1"/>
-          </p:cNvSpPr>
-          <p:nvPr>
-            <p:ph type="dt" sz="half" idx="10"/>
-          </p:nvPr>
-        </p:nvSpPr>
-        <p:spPr/>
-        <p:txBody>
-          <a:bodyPr/>
-          <a:lstStyle/>
-          <a:p>
-            <a:r>
-              <a:rPr lang="en-US"/>
-              <a:t>(c) D.Mery - PR00</a:t>
-            </a:r>
-            <a:endParaRPr lang="en-CL"/>
-          </a:p>
-        </p:txBody>
-      </p:sp>
-      <p:sp>
-        <p:nvSpPr>
-          <p:cNvPr id="3" name="Slide Number Placeholder 2">
-            <a:extLst>
-              <a:ext uri="{FF2B5EF4-FFF2-40B4-BE49-F238E27FC236}">
-                <a16:creationId xmlns:a16="http://schemas.microsoft.com/office/drawing/2014/main" id="{9ED625A3-F33A-CB9E-4DED-66BDE0304A13}"/>
-              </a:ext>
-            </a:extLst>
-          </p:cNvPr>
-          <p:cNvSpPr>
-            <a:spLocks noGrp="1"/>
-          </p:cNvSpPr>
-          <p:nvPr>
-            <p:ph type="sldNum" sz="quarter" idx="12"/>
-          </p:nvPr>
-        </p:nvSpPr>
-        <p:spPr/>
-        <p:txBody>
-          <a:bodyPr/>
-          <a:lstStyle/>
-          <a:p>
-            <a:fld id="{006AE8E3-C79C-E14F-9140-34B0C7F543F1}" type="slidenum">
-              <a:rPr lang="en-CL" smtClean="0"/>
-              <a:t>11</a:t>
-            </a:fld>
-            <a:endParaRPr lang="en-CL"/>
-          </a:p>
-        </p:txBody>
-      </p:sp>
-    </p:spTree>
-    <p:extLst>
-      <p:ext uri="{BB962C8B-B14F-4D97-AF65-F5344CB8AC3E}">
-        <p14:creationId xmlns:p14="http://schemas.microsoft.com/office/powerpoint/2010/main" val="2486722781"/>
-      </p:ext>
-    </p:extLst>
-  </p:cSld>
-  <p:clrMapOvr>
-    <a:masterClrMapping/>
-  </p:clrMapOvr>
-</p:sld>
-</file>
-
-<file path=ppt/slides/slide12.xml><?xml version="1.0" encoding="utf-8"?>
-<p:sld xmlns:a="http://schemas.openxmlformats.org/drawingml/2006/main" xmlns:r="http://schemas.openxmlformats.org/officeDocument/2006/relationships" xmlns:p="http://schemas.openxmlformats.org/presentationml/2006/main">
-  <p:cSld>
-    <p:spTree>
-      <p:nvGrpSpPr>
-        <p:cNvPr id="1" name="">
-          <a:extLst>
-            <a:ext uri="{FF2B5EF4-FFF2-40B4-BE49-F238E27FC236}">
-              <a16:creationId xmlns:a16="http://schemas.microsoft.com/office/drawing/2014/main" id="{DDFDA77A-5B98-1837-B74E-BC19D27D394B}"/>
-            </a:ext>
-          </a:extLst>
-        </p:cNvPr>
-        <p:cNvGrpSpPr/>
-        <p:nvPr/>
-      </p:nvGrpSpPr>
-      <p:grpSpPr>
-        <a:xfrm>
-          <a:off x="0" y="0"/>
-          <a:ext cx="0" cy="0"/>
-          <a:chOff x="0" y="0"/>
-          <a:chExt cx="0" cy="0"/>
-        </a:xfrm>
-      </p:grpSpPr>
-      <p:sp>
-        <p:nvSpPr>
-          <p:cNvPr id="23554" name="Text Box 2">
-            <a:extLst>
-              <a:ext uri="{FF2B5EF4-FFF2-40B4-BE49-F238E27FC236}">
-                <a16:creationId xmlns:a16="http://schemas.microsoft.com/office/drawing/2014/main" id="{D21018D8-F002-6D7A-EB40-EC606841C838}"/>
-              </a:ext>
-            </a:extLst>
-          </p:cNvPr>
-          <p:cNvSpPr txBox="1">
-            <a:spLocks noChangeArrowheads="1"/>
-          </p:cNvSpPr>
-          <p:nvPr/>
-        </p:nvSpPr>
-        <p:spPr bwMode="auto">
-          <a:xfrm>
-            <a:off x="534520" y="402162"/>
-            <a:ext cx="10668000" cy="8156079"/>
-          </a:xfrm>
-          <a:prstGeom prst="rect">
-            <a:avLst/>
-          </a:prstGeom>
-          <a:noFill/>
-          <a:ln w="9525">
-            <a:noFill/>
-            <a:miter lim="800000"/>
-            <a:headEnd/>
-            <a:tailEnd/>
-          </a:ln>
-        </p:spPr>
-        <p:txBody>
-          <a:bodyPr wrap="square">
-            <a:prstTxWarp prst="textNoShape">
-              <a:avLst/>
-            </a:prstTxWarp>
-            <a:spAutoFit/>
-          </a:bodyPr>
-          <a:lstStyle/>
-          <a:p>
-            <a:r>
-              <a:rPr lang="es-ES_tradnl" sz="3200" b="1" dirty="0">
-                <a:solidFill>
-                  <a:schemeClr val="accent2"/>
-                </a:solidFill>
-                <a:latin typeface="Gill Sans MT" panose="020B0502020104020203" pitchFamily="34" charset="77"/>
-              </a:rPr>
-              <a:t>Lineamientos del uso de la IA en el Curso</a:t>
-            </a:r>
-          </a:p>
-          <a:p>
-            <a:endParaRPr lang="es-ES_tradnl" sz="3200" dirty="0">
-              <a:latin typeface="Gill Sans MT" panose="020B0502020104020203" pitchFamily="34" charset="77"/>
-            </a:endParaRPr>
-          </a:p>
-          <a:p>
-            <a:r>
-              <a:rPr lang="es-ES_tradnl" sz="3200" dirty="0">
-                <a:latin typeface="Gill Sans MT" panose="020B0502020104020203" pitchFamily="34" charset="77"/>
-              </a:rPr>
-              <a:t>L3. Impulsar el concepto de responsabilidad del código, informes u otro entregable. Los estudiantes son responsables de todo lo que entregan. El equipo docente puede solicitar una entrevista, una explicación o justificación de cualquier entrega realizada por un estudiante. Esto formará parte integral de la evaluación.</a:t>
-            </a:r>
-          </a:p>
-          <a:p>
-            <a:endParaRPr lang="es-ES_tradnl" sz="3200" dirty="0">
-              <a:latin typeface="Gill Sans MT" panose="020B0502020104020203" pitchFamily="34" charset="77"/>
-            </a:endParaRPr>
-          </a:p>
-          <a:p>
-            <a:r>
-              <a:rPr lang="es-ES_tradnl" sz="3200" dirty="0">
-                <a:latin typeface="Gill Sans MT" panose="020B0502020104020203" pitchFamily="34" charset="77"/>
-              </a:rPr>
-              <a:t>L4. Destinar momentos del curso a discutir los beneficios, desafíos y riesgos del uso de IA en relación con las habilidades que se busca desarrollar. Incluir ejemplos concretos.</a:t>
-            </a:r>
-          </a:p>
-          <a:p>
-            <a:endParaRPr lang="es-ES_tradnl" sz="2800" dirty="0">
-              <a:latin typeface="Gill Sans MT" panose="020B0502020104020203" pitchFamily="34" charset="77"/>
-            </a:endParaRPr>
-          </a:p>
-          <a:p>
-            <a:endParaRPr lang="es-ES_tradnl" sz="2800" b="1" dirty="0">
-              <a:solidFill>
-                <a:schemeClr val="accent2"/>
-              </a:solidFill>
-              <a:latin typeface="Gill Sans MT" panose="020B0502020104020203" pitchFamily="34" charset="77"/>
-            </a:endParaRPr>
-          </a:p>
-          <a:p>
-            <a:endParaRPr lang="es-ES_tradnl" sz="2800" dirty="0">
-              <a:latin typeface="Gill Sans MT" panose="020B0502020104020203" pitchFamily="34" charset="77"/>
-            </a:endParaRPr>
-          </a:p>
-          <a:p>
-            <a:br>
-              <a:rPr lang="es-ES_tradnl" sz="2800" b="1" dirty="0">
-                <a:solidFill>
-                  <a:schemeClr val="accent2"/>
-                </a:solidFill>
-                <a:latin typeface="Gill Sans MT" panose="020B0502020104020203" pitchFamily="34" charset="77"/>
-              </a:rPr>
-            </a:br>
-            <a:endParaRPr lang="es-ES_tradnl" sz="2800" b="1" dirty="0">
-              <a:solidFill>
-                <a:schemeClr val="accent2"/>
-              </a:solidFill>
-              <a:latin typeface="Gill Sans MT" panose="020B0502020104020203" pitchFamily="34" charset="77"/>
-            </a:endParaRPr>
-          </a:p>
-        </p:txBody>
-      </p:sp>
-      <p:sp>
-        <p:nvSpPr>
-          <p:cNvPr id="2" name="Date Placeholder 1">
-            <a:extLst>
-              <a:ext uri="{FF2B5EF4-FFF2-40B4-BE49-F238E27FC236}">
-                <a16:creationId xmlns:a16="http://schemas.microsoft.com/office/drawing/2014/main" id="{58C5DD50-05B2-2B0E-7816-1AA4A42F50F7}"/>
-              </a:ext>
-            </a:extLst>
-          </p:cNvPr>
-          <p:cNvSpPr>
-            <a:spLocks noGrp="1"/>
-          </p:cNvSpPr>
-          <p:nvPr>
-            <p:ph type="dt" sz="half" idx="10"/>
-          </p:nvPr>
-        </p:nvSpPr>
-        <p:spPr/>
-        <p:txBody>
-          <a:bodyPr/>
-          <a:lstStyle/>
-          <a:p>
-            <a:r>
-              <a:rPr lang="en-US"/>
-              <a:t>(c) D.Mery - PR00</a:t>
-            </a:r>
-            <a:endParaRPr lang="en-CL"/>
-          </a:p>
-        </p:txBody>
-      </p:sp>
-      <p:sp>
-        <p:nvSpPr>
-          <p:cNvPr id="3" name="Slide Number Placeholder 2">
-            <a:extLst>
-              <a:ext uri="{FF2B5EF4-FFF2-40B4-BE49-F238E27FC236}">
-                <a16:creationId xmlns:a16="http://schemas.microsoft.com/office/drawing/2014/main" id="{EE3E2456-715B-852A-A4D9-339DE6D9EF8C}"/>
-              </a:ext>
-            </a:extLst>
-          </p:cNvPr>
-          <p:cNvSpPr>
-            <a:spLocks noGrp="1"/>
-          </p:cNvSpPr>
-          <p:nvPr>
-            <p:ph type="sldNum" sz="quarter" idx="12"/>
-          </p:nvPr>
-        </p:nvSpPr>
-        <p:spPr/>
-        <p:txBody>
-          <a:bodyPr/>
-          <a:lstStyle/>
-          <a:p>
-            <a:fld id="{006AE8E3-C79C-E14F-9140-34B0C7F543F1}" type="slidenum">
-              <a:rPr lang="en-CL" smtClean="0"/>
-              <a:t>12</a:t>
-            </a:fld>
-            <a:endParaRPr lang="en-CL"/>
-          </a:p>
-        </p:txBody>
-      </p:sp>
-    </p:spTree>
-    <p:extLst>
-      <p:ext uri="{BB962C8B-B14F-4D97-AF65-F5344CB8AC3E}">
-        <p14:creationId xmlns:p14="http://schemas.microsoft.com/office/powerpoint/2010/main" val="4174890847"/>
-      </p:ext>
-    </p:extLst>
-  </p:cSld>
-  <p:clrMapOvr>
-    <a:masterClrMapping/>
-  </p:clrMapOvr>
-</p:sld>
-</file>
-
-<file path=ppt/slides/slide13.xml><?xml version="1.0" encoding="utf-8"?>
-<p:sld xmlns:a="http://schemas.openxmlformats.org/drawingml/2006/main" xmlns:r="http://schemas.openxmlformats.org/officeDocument/2006/relationships" xmlns:p="http://schemas.openxmlformats.org/presentationml/2006/main">
-  <p:cSld>
-    <p:spTree>
-      <p:nvGrpSpPr>
-        <p:cNvPr id="1" name=""/>
-        <p:cNvGrpSpPr/>
-        <p:nvPr/>
-      </p:nvGrpSpPr>
-      <p:grpSpPr>
-        <a:xfrm>
-          <a:off x="0" y="0"/>
-          <a:ext cx="0" cy="0"/>
-          <a:chOff x="0" y="0"/>
-          <a:chExt cx="0" cy="0"/>
-        </a:xfrm>
-      </p:grpSpPr>
-      <p:sp>
-        <p:nvSpPr>
-          <p:cNvPr id="24578" name="Text Box 2"/>
-          <p:cNvSpPr txBox="1">
-            <a:spLocks noChangeArrowheads="1"/>
-          </p:cNvSpPr>
-          <p:nvPr/>
-        </p:nvSpPr>
-        <p:spPr bwMode="auto">
-          <a:xfrm>
-            <a:off x="322730" y="1102030"/>
-            <a:ext cx="11510682" cy="5570756"/>
-          </a:xfrm>
-          <a:prstGeom prst="rect">
-            <a:avLst/>
-          </a:prstGeom>
-          <a:noFill/>
-          <a:ln w="9525">
-            <a:noFill/>
-            <a:miter lim="800000"/>
-            <a:headEnd/>
-            <a:tailEnd/>
-          </a:ln>
-        </p:spPr>
-        <p:txBody>
-          <a:bodyPr wrap="square">
-            <a:prstTxWarp prst="textNoShape">
-              <a:avLst/>
-            </a:prstTxWarp>
-            <a:spAutoFit/>
-          </a:bodyPr>
-          <a:lstStyle/>
-          <a:p>
-            <a:r>
-              <a:rPr lang="es-ES" sz="3200" b="1" dirty="0">
-                <a:solidFill>
-                  <a:schemeClr val="accent2"/>
-                </a:solidFill>
-                <a:latin typeface="Gill Sans MT" panose="020B0502020104020203" pitchFamily="34" charset="77"/>
-              </a:rPr>
-              <a:t>Coordenadas</a:t>
-            </a:r>
-          </a:p>
-          <a:p>
-            <a:endParaRPr lang="es-CL" b="1" dirty="0">
-              <a:solidFill>
-                <a:schemeClr val="accent2"/>
-              </a:solidFill>
-              <a:latin typeface="Gill Sans MT" panose="020B0502020104020203" pitchFamily="34" charset="77"/>
-            </a:endParaRPr>
-          </a:p>
-          <a:p>
-            <a:endParaRPr lang="es-CL" sz="2400" b="1" dirty="0">
-              <a:solidFill>
-                <a:schemeClr val="accent2"/>
-              </a:solidFill>
-              <a:latin typeface="Gill Sans MT" panose="020B0502020104020203" pitchFamily="34" charset="77"/>
-            </a:endParaRPr>
-          </a:p>
-          <a:p>
-            <a:r>
-              <a:rPr lang="es-CL" sz="2400" b="1" dirty="0">
-                <a:solidFill>
-                  <a:schemeClr val="tx2">
-                    <a:lumMod val="50000"/>
-                    <a:lumOff val="50000"/>
-                  </a:schemeClr>
-                </a:solidFill>
-                <a:latin typeface="Gill Sans MT" panose="020B0502020104020203" pitchFamily="34" charset="77"/>
-              </a:rPr>
-              <a:t>Domingo Mery	Departamento de Ciencia de la Computación</a:t>
-            </a:r>
-          </a:p>
-          <a:p>
-            <a:r>
-              <a:rPr lang="es-CL" sz="2400" b="1" dirty="0">
-                <a:solidFill>
-                  <a:schemeClr val="tx2">
-                    <a:lumMod val="50000"/>
-                    <a:lumOff val="50000"/>
-                  </a:schemeClr>
-                </a:solidFill>
-                <a:latin typeface="Gill Sans MT" panose="020B0502020104020203" pitchFamily="34" charset="77"/>
-              </a:rPr>
-              <a:t>			Pontificia Universidad Católica de Chile</a:t>
-            </a:r>
-          </a:p>
-          <a:p>
-            <a:r>
-              <a:rPr lang="es-CL" sz="2400" b="1" dirty="0">
-                <a:solidFill>
-                  <a:schemeClr val="tx2">
-                    <a:lumMod val="50000"/>
-                    <a:lumOff val="50000"/>
-                  </a:schemeClr>
-                </a:solidFill>
-                <a:latin typeface="Gill Sans MT" panose="020B0502020104020203" pitchFamily="34" charset="77"/>
-              </a:rPr>
-              <a:t>			</a:t>
-            </a:r>
-            <a:r>
-              <a:rPr lang="es-CL" sz="2400" b="1" dirty="0">
-                <a:solidFill>
-                  <a:schemeClr val="accent2"/>
-                </a:solidFill>
-                <a:latin typeface="Gill Sans MT" panose="020B0502020104020203" pitchFamily="34" charset="77"/>
-                <a:hlinkClick r:id="rId3"/>
-              </a:rPr>
-              <a:t>http://domingomery.ing.uc.cl</a:t>
-            </a:r>
-            <a:endParaRPr lang="es-CL" sz="2400" b="1" dirty="0">
-              <a:solidFill>
-                <a:schemeClr val="accent2"/>
-              </a:solidFill>
-              <a:latin typeface="Gill Sans MT" panose="020B0502020104020203" pitchFamily="34" charset="77"/>
-            </a:endParaRPr>
-          </a:p>
-          <a:p>
-            <a:endParaRPr lang="es-CL" sz="2400" b="1" dirty="0">
-              <a:solidFill>
-                <a:schemeClr val="accent2"/>
-              </a:solidFill>
-              <a:latin typeface="Gill Sans MT" panose="020B0502020104020203" pitchFamily="34" charset="77"/>
-            </a:endParaRPr>
-          </a:p>
-          <a:p>
-            <a:r>
-              <a:rPr lang="es-CL" sz="2400" b="1" dirty="0">
-                <a:solidFill>
-                  <a:schemeClr val="accent2"/>
-                </a:solidFill>
-                <a:latin typeface="Gill Sans MT" panose="020B0502020104020203" pitchFamily="34" charset="77"/>
-              </a:rPr>
-              <a:t>  + Mail:		</a:t>
-            </a:r>
-            <a:r>
-              <a:rPr lang="es-CL" sz="2400" b="1" dirty="0">
-                <a:solidFill>
-                  <a:schemeClr val="tx2">
-                    <a:lumMod val="75000"/>
-                    <a:lumOff val="25000"/>
-                  </a:schemeClr>
-                </a:solidFill>
-                <a:latin typeface="Gill Sans MT" panose="020B0502020104020203" pitchFamily="34" charset="77"/>
-              </a:rPr>
-              <a:t>Matías Vidal &lt;</a:t>
-            </a:r>
-            <a:r>
-              <a:rPr lang="en-US" sz="2400" b="1" dirty="0" err="1">
-                <a:solidFill>
-                  <a:schemeClr val="tx2">
-                    <a:lumMod val="75000"/>
-                    <a:lumOff val="25000"/>
-                  </a:schemeClr>
-                </a:solidFill>
-                <a:latin typeface="Gill Sans MT" panose="020B0502020104020203" pitchFamily="34" charset="77"/>
-              </a:rPr>
-              <a:t>mvig@uc.cl</a:t>
-            </a:r>
-            <a:r>
-              <a:rPr lang="en-US" sz="2400" b="1" dirty="0">
-                <a:solidFill>
-                  <a:schemeClr val="tx2">
-                    <a:lumMod val="75000"/>
-                    <a:lumOff val="25000"/>
-                  </a:schemeClr>
-                </a:solidFill>
-                <a:latin typeface="Gill Sans MT" panose="020B0502020104020203" pitchFamily="34" charset="77"/>
-              </a:rPr>
-              <a:t>&gt;</a:t>
-            </a:r>
-            <a:r>
-              <a:rPr lang="es-CL" sz="2400" b="1" dirty="0">
-                <a:solidFill>
-                  <a:schemeClr val="accent2"/>
-                </a:solidFill>
-                <a:latin typeface="Gill Sans MT" panose="020B0502020104020203" pitchFamily="34" charset="77"/>
-              </a:rPr>
-              <a:t>  </a:t>
-            </a:r>
-            <a:r>
-              <a:rPr lang="es-CL" sz="2400" b="1" dirty="0">
-                <a:solidFill>
-                  <a:srgbClr val="FF9300"/>
-                </a:solidFill>
-                <a:latin typeface="Gill Sans MT" panose="020B0502020104020203" pitchFamily="34" charset="77"/>
-              </a:rPr>
-              <a:t>(POR ACÁ LAS CONSULTAS)</a:t>
-            </a:r>
-            <a:endParaRPr lang="es-CL" sz="2400" b="1" dirty="0">
-              <a:solidFill>
-                <a:schemeClr val="accent2"/>
-              </a:solidFill>
-              <a:latin typeface="Gill Sans MT" panose="020B0502020104020203" pitchFamily="34" charset="77"/>
-            </a:endParaRPr>
-          </a:p>
-          <a:p>
-            <a:r>
-              <a:rPr lang="es-CL" sz="2400" b="1" dirty="0">
-                <a:solidFill>
-                  <a:schemeClr val="accent2"/>
-                </a:solidFill>
-                <a:latin typeface="Gill Sans MT" panose="020B0502020104020203" pitchFamily="34" charset="77"/>
-              </a:rPr>
-              <a:t> </a:t>
-            </a:r>
-          </a:p>
-          <a:p>
-            <a:r>
-              <a:rPr lang="es-CL" sz="2400" b="1" dirty="0">
-                <a:solidFill>
-                  <a:schemeClr val="accent2"/>
-                </a:solidFill>
-                <a:latin typeface="Gill Sans MT" panose="020B0502020104020203" pitchFamily="34" charset="77"/>
-              </a:rPr>
-              <a:t> + </a:t>
-            </a:r>
-            <a:r>
-              <a:rPr lang="es-CL" sz="2400" b="1" dirty="0" err="1">
-                <a:solidFill>
-                  <a:schemeClr val="accent2"/>
-                </a:solidFill>
-                <a:latin typeface="Gill Sans MT" panose="020B0502020104020203" pitchFamily="34" charset="77"/>
-              </a:rPr>
-              <a:t>Canvas</a:t>
-            </a:r>
-            <a:r>
-              <a:rPr lang="es-CL" sz="2400" b="1" dirty="0">
-                <a:solidFill>
-                  <a:schemeClr val="accent2"/>
-                </a:solidFill>
-                <a:latin typeface="Gill Sans MT" panose="020B0502020104020203" pitchFamily="34" charset="77"/>
-              </a:rPr>
-              <a:t>:		</a:t>
-            </a:r>
-            <a:r>
-              <a:rPr lang="es-CL" sz="2400" b="1" dirty="0">
-                <a:solidFill>
-                  <a:schemeClr val="accent2"/>
-                </a:solidFill>
-                <a:latin typeface="Gill Sans MT" panose="020B0502020104020203" pitchFamily="34" charset="77"/>
-                <a:hlinkClick r:id="rId4"/>
-              </a:rPr>
-              <a:t>https://cursos.canvas.uc.cl/courses/</a:t>
-            </a:r>
-            <a:r>
-              <a:rPr lang="es-CL" sz="2400" b="1" dirty="0">
-                <a:solidFill>
-                  <a:schemeClr val="accent2"/>
-                </a:solidFill>
-                <a:latin typeface="Gill Sans MT" panose="020B0502020104020203" pitchFamily="34" charset="77"/>
-              </a:rPr>
-              <a:t>97292  </a:t>
-            </a:r>
-          </a:p>
-          <a:p>
-            <a:endParaRPr lang="es-CL" sz="2400" b="1" dirty="0">
-              <a:solidFill>
-                <a:schemeClr val="accent2"/>
-              </a:solidFill>
-              <a:latin typeface="Gill Sans MT" panose="020B0502020104020203" pitchFamily="34" charset="77"/>
-            </a:endParaRPr>
-          </a:p>
-          <a:p>
-            <a:r>
-              <a:rPr lang="es-CL" sz="2400" b="1" dirty="0">
-                <a:solidFill>
-                  <a:schemeClr val="accent2"/>
-                </a:solidFill>
-                <a:latin typeface="Gill Sans MT" panose="020B0502020104020203" pitchFamily="34" charset="77"/>
-              </a:rPr>
-              <a:t> + GitHub: 		</a:t>
-            </a:r>
-            <a:r>
-              <a:rPr lang="es-CL" sz="2400" b="1" dirty="0">
-                <a:solidFill>
-                  <a:schemeClr val="accent2"/>
-                </a:solidFill>
-                <a:latin typeface="Gill Sans MT" panose="020B0502020104020203" pitchFamily="34" charset="77"/>
-                <a:hlinkClick r:id="rId5"/>
-              </a:rPr>
-              <a:t>https://github.com/domingomery/patrones</a:t>
-            </a:r>
-            <a:endParaRPr lang="es-CL" sz="2400" b="1" dirty="0">
-              <a:solidFill>
-                <a:schemeClr val="accent2"/>
-              </a:solidFill>
-              <a:latin typeface="Gill Sans MT" panose="020B0502020104020203" pitchFamily="34" charset="77"/>
-            </a:endParaRPr>
-          </a:p>
-          <a:p>
-            <a:endParaRPr lang="es-CL" sz="2400" b="1" dirty="0">
-              <a:solidFill>
-                <a:schemeClr val="accent2"/>
-              </a:solidFill>
-              <a:latin typeface="Gill Sans MT" panose="020B0502020104020203" pitchFamily="34" charset="77"/>
-            </a:endParaRPr>
-          </a:p>
-          <a:p>
-            <a:r>
-              <a:rPr lang="es-CL" sz="2400" b="1" dirty="0">
-                <a:solidFill>
-                  <a:schemeClr val="accent2"/>
-                </a:solidFill>
-                <a:latin typeface="Gill Sans MT" panose="020B0502020104020203" pitchFamily="34" charset="77"/>
-              </a:rPr>
-              <a:t> + YouTube: 		</a:t>
-            </a:r>
-            <a:r>
-              <a:rPr lang="es-CL" sz="2400" b="1" dirty="0">
-                <a:solidFill>
-                  <a:schemeClr val="accent2"/>
-                </a:solidFill>
-                <a:latin typeface="Gill Sans MT" panose="020B0502020104020203" pitchFamily="34" charset="77"/>
-                <a:hlinkClick r:id="rId6"/>
-              </a:rPr>
-              <a:t>http:/youtube.com/domingomery</a:t>
-            </a:r>
-            <a:r>
-              <a:rPr lang="es-CL" sz="2400" b="1" dirty="0">
-                <a:solidFill>
-                  <a:schemeClr val="accent2"/>
-                </a:solidFill>
-                <a:latin typeface="Gill Sans MT" panose="020B0502020104020203" pitchFamily="34" charset="77"/>
-              </a:rPr>
-              <a:t> (Versión 2025)</a:t>
-            </a:r>
-          </a:p>
-          <a:p>
-            <a:endParaRPr lang="es-CL" b="1" dirty="0">
-              <a:solidFill>
-                <a:schemeClr val="accent2"/>
-              </a:solidFill>
-              <a:latin typeface="Gill Sans MT" panose="020B0502020104020203" pitchFamily="34" charset="77"/>
-            </a:endParaRPr>
-          </a:p>
-        </p:txBody>
-      </p:sp>
-      <p:sp>
-        <p:nvSpPr>
-          <p:cNvPr id="2" name="Date Placeholder 1">
-            <a:extLst>
-              <a:ext uri="{FF2B5EF4-FFF2-40B4-BE49-F238E27FC236}">
-                <a16:creationId xmlns:a16="http://schemas.microsoft.com/office/drawing/2014/main" id="{080A7BB0-99B1-28B9-3935-1077D749B9EB}"/>
-              </a:ext>
-            </a:extLst>
-          </p:cNvPr>
-          <p:cNvSpPr>
-            <a:spLocks noGrp="1"/>
-          </p:cNvSpPr>
-          <p:nvPr>
-            <p:ph type="dt" sz="half" idx="10"/>
-          </p:nvPr>
-        </p:nvSpPr>
-        <p:spPr/>
-        <p:txBody>
-          <a:bodyPr/>
-          <a:lstStyle/>
-          <a:p>
-            <a:r>
-              <a:rPr lang="en-US"/>
-              <a:t>(c) D.Mery - PR00</a:t>
-            </a:r>
-            <a:endParaRPr lang="en-CL"/>
-          </a:p>
-        </p:txBody>
-      </p:sp>
-      <p:sp>
-        <p:nvSpPr>
-          <p:cNvPr id="3" name="Slide Number Placeholder 2">
-            <a:extLst>
-              <a:ext uri="{FF2B5EF4-FFF2-40B4-BE49-F238E27FC236}">
-                <a16:creationId xmlns:a16="http://schemas.microsoft.com/office/drawing/2014/main" id="{5F4649D7-567F-142D-FF5F-E1EA5CDF0AB6}"/>
-              </a:ext>
-            </a:extLst>
-          </p:cNvPr>
-          <p:cNvSpPr>
-            <a:spLocks noGrp="1"/>
-          </p:cNvSpPr>
-          <p:nvPr>
-            <p:ph type="sldNum" sz="quarter" idx="12"/>
-          </p:nvPr>
-        </p:nvSpPr>
-        <p:spPr/>
-        <p:txBody>
-          <a:bodyPr/>
-          <a:lstStyle/>
-          <a:p>
-            <a:fld id="{006AE8E3-C79C-E14F-9140-34B0C7F543F1}" type="slidenum">
-              <a:rPr lang="en-CL" smtClean="0"/>
-              <a:t>13</a:t>
-            </a:fld>
-            <a:endParaRPr lang="en-CL"/>
-          </a:p>
-        </p:txBody>
-      </p:sp>
-    </p:spTree>
-  </p:cSld>
-  <p:clrMapOvr>
-    <a:masterClrMapping/>
-  </p:clrMapOvr>
-</p:sld>
-</file>
-
-<file path=ppt/slides/slide14.xml><?xml version="1.0" encoding="utf-8"?>
-<p:sld xmlns:a="http://schemas.openxmlformats.org/drawingml/2006/main" xmlns:r="http://schemas.openxmlformats.org/officeDocument/2006/relationships" xmlns:p="http://schemas.openxmlformats.org/presentationml/2006/main">
-  <p:cSld>
-    <p:spTree>
-      <p:nvGrpSpPr>
-        <p:cNvPr id="1" name=""/>
-        <p:cNvGrpSpPr/>
-        <p:nvPr/>
-      </p:nvGrpSpPr>
-      <p:grpSpPr>
-        <a:xfrm>
-          <a:off x="0" y="0"/>
-          <a:ext cx="0" cy="0"/>
-          <a:chOff x="0" y="0"/>
-          <a:chExt cx="0" cy="0"/>
-        </a:xfrm>
-      </p:grpSpPr>
-      <p:sp>
-        <p:nvSpPr>
-          <p:cNvPr id="6" name="Text Box 2">
-            <a:extLst>
-              <a:ext uri="{FF2B5EF4-FFF2-40B4-BE49-F238E27FC236}">
-                <a16:creationId xmlns:a16="http://schemas.microsoft.com/office/drawing/2014/main" id="{E14FFB54-DE87-654C-A792-308125E2AD51}"/>
-              </a:ext>
-            </a:extLst>
-          </p:cNvPr>
-          <p:cNvSpPr txBox="1">
-            <a:spLocks noChangeArrowheads="1"/>
-          </p:cNvSpPr>
-          <p:nvPr/>
-        </p:nvSpPr>
-        <p:spPr bwMode="auto">
-          <a:xfrm>
-            <a:off x="1345440" y="936049"/>
-            <a:ext cx="8490263" cy="861774"/>
-          </a:xfrm>
-          <a:prstGeom prst="rect">
-            <a:avLst/>
-          </a:prstGeom>
-          <a:noFill/>
-          <a:ln w="9525">
-            <a:noFill/>
-            <a:miter lim="800000"/>
-            <a:headEnd/>
-            <a:tailEnd/>
-          </a:ln>
-        </p:spPr>
-        <p:txBody>
-          <a:bodyPr wrap="square">
-            <a:prstTxWarp prst="textNoShape">
-              <a:avLst/>
-            </a:prstTxWarp>
-            <a:spAutoFit/>
-          </a:bodyPr>
-          <a:lstStyle/>
-          <a:p>
-            <a:r>
-              <a:rPr lang="es-ES" sz="3200" b="1" dirty="0" err="1">
-                <a:solidFill>
-                  <a:schemeClr val="accent2"/>
-                </a:solidFill>
-                <a:latin typeface="Gill Sans MT" panose="020B0502020104020203" pitchFamily="34" charset="77"/>
-              </a:rPr>
-              <a:t>Canvas</a:t>
-            </a:r>
-            <a:r>
-              <a:rPr lang="es-ES" sz="3200" b="1" dirty="0">
-                <a:solidFill>
-                  <a:schemeClr val="accent2"/>
-                </a:solidFill>
-                <a:latin typeface="Gill Sans MT" panose="020B0502020104020203" pitchFamily="34" charset="77"/>
-              </a:rPr>
-              <a:t> del Curso</a:t>
-            </a:r>
-          </a:p>
-          <a:p>
-            <a:endParaRPr lang="es-CL" b="1" dirty="0">
-              <a:solidFill>
-                <a:schemeClr val="accent2"/>
-              </a:solidFill>
-              <a:latin typeface="Gill Sans MT" panose="020B0502020104020203" pitchFamily="34" charset="77"/>
-            </a:endParaRPr>
-          </a:p>
-        </p:txBody>
-      </p:sp>
-      <p:sp>
-        <p:nvSpPr>
-          <p:cNvPr id="9" name="TextBox 8">
-            <a:extLst>
-              <a:ext uri="{FF2B5EF4-FFF2-40B4-BE49-F238E27FC236}">
-                <a16:creationId xmlns:a16="http://schemas.microsoft.com/office/drawing/2014/main" id="{E6A4C158-311E-D237-3B4E-99D68FCE70BE}"/>
-              </a:ext>
-            </a:extLst>
-          </p:cNvPr>
-          <p:cNvSpPr txBox="1"/>
-          <p:nvPr/>
-        </p:nvSpPr>
-        <p:spPr>
-          <a:xfrm>
-            <a:off x="1562601" y="1797823"/>
-            <a:ext cx="3585148" cy="4524315"/>
-          </a:xfrm>
-          <a:prstGeom prst="rect">
-            <a:avLst/>
-          </a:prstGeom>
-          <a:noFill/>
-        </p:spPr>
-        <p:txBody>
-          <a:bodyPr wrap="square" rtlCol="0">
-            <a:spAutoFit/>
-          </a:bodyPr>
-          <a:lstStyle/>
-          <a:p>
-            <a:r>
-              <a:rPr lang="en-CL" sz="3200" kern="0" dirty="0">
-                <a:solidFill>
-                  <a:srgbClr val="2D3B45"/>
-                </a:solidFill>
-                <a:latin typeface="Gill Sans MT" panose="020B0502020104020203" pitchFamily="34" charset="77"/>
-                <a:ea typeface="Times New Roman" panose="02020603050405020304" pitchFamily="18" charset="0"/>
-                <a:cs typeface="Times New Roman" panose="02020603050405020304" pitchFamily="18" charset="0"/>
-              </a:rPr>
-              <a:t>se usa para: </a:t>
-            </a:r>
-          </a:p>
-          <a:p>
-            <a:pPr marL="285750" indent="-285750">
-              <a:buFont typeface="Arial" panose="020B0604020202020204" pitchFamily="34" charset="0"/>
-              <a:buChar char="•"/>
-            </a:pPr>
-            <a:r>
-              <a:rPr lang="en-CL" sz="3200" kern="0" dirty="0">
-                <a:solidFill>
-                  <a:srgbClr val="2D3B45"/>
-                </a:solidFill>
-                <a:latin typeface="Gill Sans MT" panose="020B0502020104020203" pitchFamily="34" charset="77"/>
-                <a:ea typeface="Times New Roman" panose="02020603050405020304" pitchFamily="18" charset="0"/>
-                <a:cs typeface="Times New Roman" panose="02020603050405020304" pitchFamily="18" charset="0"/>
-              </a:rPr>
-              <a:t>entregas </a:t>
-            </a:r>
-          </a:p>
-          <a:p>
-            <a:pPr marL="285750" indent="-285750">
-              <a:buFont typeface="Arial" panose="020B0604020202020204" pitchFamily="34" charset="0"/>
-              <a:buChar char="•"/>
-            </a:pPr>
-            <a:r>
-              <a:rPr lang="en-CL" sz="3200" kern="0" dirty="0">
-                <a:solidFill>
-                  <a:srgbClr val="2D3B45"/>
-                </a:solidFill>
-                <a:latin typeface="Gill Sans MT" panose="020B0502020104020203" pitchFamily="34" charset="77"/>
-                <a:ea typeface="Times New Roman" panose="02020603050405020304" pitchFamily="18" charset="0"/>
-                <a:cs typeface="Times New Roman" panose="02020603050405020304" pitchFamily="18" charset="0"/>
-              </a:rPr>
-              <a:t>enunciados </a:t>
-            </a:r>
-          </a:p>
-          <a:p>
-            <a:pPr marL="285750" indent="-285750">
-              <a:buFont typeface="Arial" panose="020B0604020202020204" pitchFamily="34" charset="0"/>
-              <a:buChar char="•"/>
-            </a:pPr>
-            <a:r>
-              <a:rPr lang="en-CL" sz="3200" kern="0" dirty="0">
-                <a:solidFill>
-                  <a:srgbClr val="2D3B45"/>
-                </a:solidFill>
-                <a:latin typeface="Gill Sans MT" panose="020B0502020104020203" pitchFamily="34" charset="77"/>
-                <a:ea typeface="Times New Roman" panose="02020603050405020304" pitchFamily="18" charset="0"/>
-                <a:cs typeface="Times New Roman" panose="02020603050405020304" pitchFamily="18" charset="0"/>
-              </a:rPr>
-              <a:t>foros</a:t>
-            </a:r>
-          </a:p>
-          <a:p>
-            <a:pPr marL="285750" indent="-285750">
-              <a:buFont typeface="Arial" panose="020B0604020202020204" pitchFamily="34" charset="0"/>
-              <a:buChar char="•"/>
-            </a:pPr>
-            <a:r>
-              <a:rPr lang="en-CL" sz="3200" kern="0" dirty="0">
-                <a:solidFill>
-                  <a:srgbClr val="2D3B45"/>
-                </a:solidFill>
-                <a:latin typeface="Gill Sans MT" panose="020B0502020104020203" pitchFamily="34" charset="77"/>
-                <a:ea typeface="Times New Roman" panose="02020603050405020304" pitchFamily="18" charset="0"/>
-                <a:cs typeface="Times New Roman" panose="02020603050405020304" pitchFamily="18" charset="0"/>
-              </a:rPr>
-              <a:t>anuncios </a:t>
-            </a:r>
-          </a:p>
-          <a:p>
-            <a:pPr marL="285750" indent="-285750">
-              <a:buFont typeface="Arial" panose="020B0604020202020204" pitchFamily="34" charset="0"/>
-              <a:buChar char="•"/>
-            </a:pPr>
-            <a:r>
-              <a:rPr lang="en-CL" sz="3200" kern="0" dirty="0">
-                <a:solidFill>
-                  <a:srgbClr val="2D3B45"/>
-                </a:solidFill>
-                <a:latin typeface="Gill Sans MT" panose="020B0502020104020203" pitchFamily="34" charset="77"/>
-                <a:ea typeface="Times New Roman" panose="02020603050405020304" pitchFamily="18" charset="0"/>
-                <a:cs typeface="Times New Roman" panose="02020603050405020304" pitchFamily="18" charset="0"/>
-              </a:rPr>
-              <a:t>calendario</a:t>
-            </a:r>
-          </a:p>
-          <a:p>
-            <a:pPr marL="285750" indent="-285750">
-              <a:buFont typeface="Arial" panose="020B0604020202020204" pitchFamily="34" charset="0"/>
-              <a:buChar char="•"/>
-            </a:pPr>
-            <a:r>
-              <a:rPr lang="en-CL" sz="3200" kern="0" dirty="0">
-                <a:solidFill>
-                  <a:srgbClr val="2D3B45"/>
-                </a:solidFill>
-                <a:latin typeface="Gill Sans MT" panose="020B0502020104020203" pitchFamily="34" charset="77"/>
-                <a:ea typeface="Times New Roman" panose="02020603050405020304" pitchFamily="18" charset="0"/>
-                <a:cs typeface="Times New Roman" panose="02020603050405020304" pitchFamily="18" charset="0"/>
-              </a:rPr>
-              <a:t>notas</a:t>
-            </a:r>
-          </a:p>
-          <a:p>
-            <a:endParaRPr lang="en-CL" sz="3200" kern="0" dirty="0">
-              <a:solidFill>
-                <a:srgbClr val="2D3B45"/>
-              </a:solidFill>
-              <a:latin typeface="Gill Sans MT" panose="020B0502020104020203" pitchFamily="34" charset="77"/>
-              <a:ea typeface="Times New Roman" panose="02020603050405020304" pitchFamily="18" charset="0"/>
-              <a:cs typeface="Times New Roman" panose="02020603050405020304" pitchFamily="18" charset="0"/>
-            </a:endParaRPr>
-          </a:p>
-          <a:p>
-            <a:r>
-              <a:rPr lang="en-CL" sz="3200" dirty="0">
-                <a:latin typeface="Gill Sans MT" panose="020B0502020104020203" pitchFamily="34" charset="77"/>
-              </a:rPr>
-              <a:t> </a:t>
-            </a:r>
-          </a:p>
-        </p:txBody>
-      </p:sp>
-      <p:pic>
-        <p:nvPicPr>
-          <p:cNvPr id="3" name="Picture 2">
-            <a:extLst>
-              <a:ext uri="{FF2B5EF4-FFF2-40B4-BE49-F238E27FC236}">
-                <a16:creationId xmlns:a16="http://schemas.microsoft.com/office/drawing/2014/main" id="{A36F9FBB-5B7C-93A5-A3DD-CA3FA64313F4}"/>
-              </a:ext>
-            </a:extLst>
-          </p:cNvPr>
-          <p:cNvPicPr>
-            <a:picLocks noChangeAspect="1"/>
-          </p:cNvPicPr>
-          <p:nvPr/>
-        </p:nvPicPr>
-        <p:blipFill>
-          <a:blip r:embed="rId2"/>
-          <a:srcRect/>
-          <a:stretch/>
-        </p:blipFill>
-        <p:spPr>
-          <a:xfrm>
-            <a:off x="6096000" y="839501"/>
-            <a:ext cx="4643457" cy="4643457"/>
-          </a:xfrm>
-          <a:prstGeom prst="rect">
-            <a:avLst/>
-          </a:prstGeom>
-        </p:spPr>
-      </p:pic>
-      <p:sp>
-        <p:nvSpPr>
-          <p:cNvPr id="2" name="Date Placeholder 1">
-            <a:extLst>
-              <a:ext uri="{FF2B5EF4-FFF2-40B4-BE49-F238E27FC236}">
-                <a16:creationId xmlns:a16="http://schemas.microsoft.com/office/drawing/2014/main" id="{3C239174-F058-4A9C-FE11-4D5F9773F35A}"/>
-              </a:ext>
-            </a:extLst>
-          </p:cNvPr>
-          <p:cNvSpPr>
-            <a:spLocks noGrp="1"/>
-          </p:cNvSpPr>
-          <p:nvPr>
-            <p:ph type="dt" sz="half" idx="10"/>
-          </p:nvPr>
-        </p:nvSpPr>
-        <p:spPr/>
-        <p:txBody>
-          <a:bodyPr/>
-          <a:lstStyle/>
-          <a:p>
-            <a:r>
-              <a:rPr lang="en-US"/>
-              <a:t>(c) D.Mery - PR00</a:t>
-            </a:r>
-            <a:endParaRPr lang="en-CL"/>
-          </a:p>
-        </p:txBody>
-      </p:sp>
-      <p:sp>
-        <p:nvSpPr>
-          <p:cNvPr id="4" name="Slide Number Placeholder 3">
-            <a:extLst>
-              <a:ext uri="{FF2B5EF4-FFF2-40B4-BE49-F238E27FC236}">
-                <a16:creationId xmlns:a16="http://schemas.microsoft.com/office/drawing/2014/main" id="{E1A21044-C0ED-4B37-3603-DCD1E8794BF9}"/>
-              </a:ext>
-            </a:extLst>
-          </p:cNvPr>
-          <p:cNvSpPr>
-            <a:spLocks noGrp="1"/>
-          </p:cNvSpPr>
-          <p:nvPr>
-            <p:ph type="sldNum" sz="quarter" idx="12"/>
-          </p:nvPr>
-        </p:nvSpPr>
-        <p:spPr/>
-        <p:txBody>
-          <a:bodyPr/>
-          <a:lstStyle/>
-          <a:p>
-            <a:fld id="{006AE8E3-C79C-E14F-9140-34B0C7F543F1}" type="slidenum">
-              <a:rPr lang="en-CL" smtClean="0"/>
-              <a:t>14</a:t>
-            </a:fld>
-            <a:endParaRPr lang="en-CL"/>
-          </a:p>
-        </p:txBody>
-      </p:sp>
-    </p:spTree>
-    <p:extLst>
-      <p:ext uri="{BB962C8B-B14F-4D97-AF65-F5344CB8AC3E}">
-        <p14:creationId xmlns:p14="http://schemas.microsoft.com/office/powerpoint/2010/main" val="882702066"/>
-      </p:ext>
-    </p:extLst>
-  </p:cSld>
-  <p:clrMapOvr>
-    <a:masterClrMapping/>
-  </p:clrMapOvr>
-</p:sld>
-</file>
-
-<file path=ppt/slides/slide15.xml><?xml version="1.0" encoding="utf-8"?>
-<p:sld xmlns:a="http://schemas.openxmlformats.org/drawingml/2006/main" xmlns:r="http://schemas.openxmlformats.org/officeDocument/2006/relationships" xmlns:p="http://schemas.openxmlformats.org/presentationml/2006/main">
-  <p:cSld>
-    <p:spTree>
-      <p:nvGrpSpPr>
-        <p:cNvPr id="1" name="">
-          <a:extLst>
-            <a:ext uri="{FF2B5EF4-FFF2-40B4-BE49-F238E27FC236}">
-              <a16:creationId xmlns:a16="http://schemas.microsoft.com/office/drawing/2014/main" id="{6D7108A0-D14D-E1F4-1C1E-7299CB79845E}"/>
-            </a:ext>
-          </a:extLst>
-        </p:cNvPr>
-        <p:cNvGrpSpPr/>
-        <p:nvPr/>
-      </p:nvGrpSpPr>
-      <p:grpSpPr>
-        <a:xfrm>
-          <a:off x="0" y="0"/>
-          <a:ext cx="0" cy="0"/>
-          <a:chOff x="0" y="0"/>
-          <a:chExt cx="0" cy="0"/>
-        </a:xfrm>
-      </p:grpSpPr>
-      <p:sp>
-        <p:nvSpPr>
-          <p:cNvPr id="6" name="Text Box 2">
-            <a:extLst>
-              <a:ext uri="{FF2B5EF4-FFF2-40B4-BE49-F238E27FC236}">
-                <a16:creationId xmlns:a16="http://schemas.microsoft.com/office/drawing/2014/main" id="{7059ABFC-9AB2-159C-0261-21D35E2A9494}"/>
-              </a:ext>
-            </a:extLst>
-          </p:cNvPr>
-          <p:cNvSpPr txBox="1">
-            <a:spLocks noChangeArrowheads="1"/>
-          </p:cNvSpPr>
-          <p:nvPr/>
-        </p:nvSpPr>
-        <p:spPr bwMode="auto">
-          <a:xfrm>
-            <a:off x="1947192" y="639228"/>
-            <a:ext cx="8490263" cy="861774"/>
-          </a:xfrm>
-          <a:prstGeom prst="rect">
-            <a:avLst/>
-          </a:prstGeom>
-          <a:noFill/>
-          <a:ln w="9525">
-            <a:noFill/>
-            <a:miter lim="800000"/>
-            <a:headEnd/>
-            <a:tailEnd/>
-          </a:ln>
-        </p:spPr>
-        <p:txBody>
-          <a:bodyPr wrap="square">
-            <a:prstTxWarp prst="textNoShape">
-              <a:avLst/>
-            </a:prstTxWarp>
-            <a:spAutoFit/>
-          </a:bodyPr>
-          <a:lstStyle/>
-          <a:p>
-            <a:r>
-              <a:rPr lang="es-ES" sz="3200" b="1" dirty="0" err="1">
-                <a:solidFill>
-                  <a:schemeClr val="accent2"/>
-                </a:solidFill>
-                <a:latin typeface="Gill Sans MT" panose="020B0502020104020203" pitchFamily="34" charset="77"/>
-              </a:rPr>
-              <a:t>Canvas</a:t>
-            </a:r>
-            <a:r>
-              <a:rPr lang="es-ES" sz="3200" b="1" dirty="0">
-                <a:solidFill>
-                  <a:schemeClr val="accent2"/>
-                </a:solidFill>
-                <a:latin typeface="Gill Sans MT" panose="020B0502020104020203" pitchFamily="34" charset="77"/>
-              </a:rPr>
-              <a:t> del Curso</a:t>
-            </a:r>
-          </a:p>
-          <a:p>
-            <a:endParaRPr lang="es-CL" b="1" dirty="0">
-              <a:solidFill>
-                <a:schemeClr val="accent2"/>
-              </a:solidFill>
-              <a:latin typeface="Gill Sans MT" panose="020B0502020104020203" pitchFamily="34" charset="77"/>
-            </a:endParaRPr>
-          </a:p>
-        </p:txBody>
-      </p:sp>
-      <p:pic>
-        <p:nvPicPr>
-          <p:cNvPr id="4" name="Picture 3" descr="A screenshot of a computer&#10;&#10;AI-generated content may be incorrect.">
-            <a:extLst>
-              <a:ext uri="{FF2B5EF4-FFF2-40B4-BE49-F238E27FC236}">
-                <a16:creationId xmlns:a16="http://schemas.microsoft.com/office/drawing/2014/main" id="{49FE1D30-0919-9A56-3C6F-1DABDBCDC8EB}"/>
-              </a:ext>
-            </a:extLst>
-          </p:cNvPr>
-          <p:cNvPicPr>
-            <a:picLocks noChangeAspect="1"/>
-          </p:cNvPicPr>
-          <p:nvPr/>
-        </p:nvPicPr>
-        <p:blipFill>
-          <a:blip r:embed="rId3"/>
-          <a:stretch>
-            <a:fillRect/>
-          </a:stretch>
-        </p:blipFill>
-        <p:spPr>
-          <a:xfrm>
-            <a:off x="1317374" y="1501000"/>
-            <a:ext cx="8528284" cy="4911229"/>
-          </a:xfrm>
-          <a:prstGeom prst="rect">
-            <a:avLst/>
-          </a:prstGeom>
-        </p:spPr>
-      </p:pic>
-      <p:pic>
-        <p:nvPicPr>
-          <p:cNvPr id="2" name="Picture 1">
-            <a:extLst>
-              <a:ext uri="{FF2B5EF4-FFF2-40B4-BE49-F238E27FC236}">
-                <a16:creationId xmlns:a16="http://schemas.microsoft.com/office/drawing/2014/main" id="{501B2EDB-66CA-7C1A-DBF8-EE1F1A597FC6}"/>
-              </a:ext>
-            </a:extLst>
-          </p:cNvPr>
-          <p:cNvPicPr>
-            <a:picLocks noChangeAspect="1"/>
-          </p:cNvPicPr>
-          <p:nvPr/>
-        </p:nvPicPr>
-        <p:blipFill>
-          <a:blip r:embed="rId4"/>
-          <a:srcRect/>
-          <a:stretch/>
-        </p:blipFill>
-        <p:spPr>
-          <a:xfrm>
-            <a:off x="8950058" y="206252"/>
-            <a:ext cx="2589499" cy="2589499"/>
-          </a:xfrm>
-          <a:prstGeom prst="rect">
-            <a:avLst/>
-          </a:prstGeom>
-        </p:spPr>
-      </p:pic>
-      <p:sp>
-        <p:nvSpPr>
-          <p:cNvPr id="3" name="Date Placeholder 2">
-            <a:extLst>
-              <a:ext uri="{FF2B5EF4-FFF2-40B4-BE49-F238E27FC236}">
-                <a16:creationId xmlns:a16="http://schemas.microsoft.com/office/drawing/2014/main" id="{AE3D851C-A04E-7302-1498-D070DD0FFCD5}"/>
-              </a:ext>
-            </a:extLst>
-          </p:cNvPr>
-          <p:cNvSpPr>
-            <a:spLocks noGrp="1"/>
-          </p:cNvSpPr>
-          <p:nvPr>
-            <p:ph type="dt" sz="half" idx="10"/>
-          </p:nvPr>
-        </p:nvSpPr>
-        <p:spPr/>
-        <p:txBody>
-          <a:bodyPr/>
-          <a:lstStyle/>
-          <a:p>
-            <a:r>
-              <a:rPr lang="en-US"/>
-              <a:t>(c) D.Mery - PR00</a:t>
-            </a:r>
-            <a:endParaRPr lang="en-CL"/>
-          </a:p>
-        </p:txBody>
-      </p:sp>
-      <p:sp>
-        <p:nvSpPr>
-          <p:cNvPr id="5" name="Slide Number Placeholder 4">
-            <a:extLst>
-              <a:ext uri="{FF2B5EF4-FFF2-40B4-BE49-F238E27FC236}">
-                <a16:creationId xmlns:a16="http://schemas.microsoft.com/office/drawing/2014/main" id="{B305D8F7-DF0B-4029-26B8-CB716CF63DA5}"/>
-              </a:ext>
-            </a:extLst>
-          </p:cNvPr>
-          <p:cNvSpPr>
-            <a:spLocks noGrp="1"/>
-          </p:cNvSpPr>
-          <p:nvPr>
-            <p:ph type="sldNum" sz="quarter" idx="12"/>
-          </p:nvPr>
-        </p:nvSpPr>
-        <p:spPr/>
-        <p:txBody>
-          <a:bodyPr/>
-          <a:lstStyle/>
-          <a:p>
-            <a:fld id="{006AE8E3-C79C-E14F-9140-34B0C7F543F1}" type="slidenum">
-              <a:rPr lang="en-CL" smtClean="0"/>
-              <a:t>15</a:t>
-            </a:fld>
-            <a:endParaRPr lang="en-CL"/>
-          </a:p>
-        </p:txBody>
-      </p:sp>
-    </p:spTree>
-    <p:extLst>
-      <p:ext uri="{BB962C8B-B14F-4D97-AF65-F5344CB8AC3E}">
-        <p14:creationId xmlns:p14="http://schemas.microsoft.com/office/powerpoint/2010/main" val="3623083727"/>
-      </p:ext>
-    </p:extLst>
-  </p:cSld>
-  <p:clrMapOvr>
-    <a:masterClrMapping/>
-  </p:clrMapOvr>
-  <mc:AlternateContent xmlns:mc="http://schemas.openxmlformats.org/markup-compatibility/2006" xmlns:p159="http://schemas.microsoft.com/office/powerpoint/2015/09/main">
-    <mc:Choice Requires="p159">
-      <p:transition xmlns:p14="http://schemas.microsoft.com/office/powerpoint/2010/main" spd="slow" p14:dur="2000">
-        <p159:morph option="byObject"/>
-      </p:transition>
-    </mc:Choice>
-    <mc:Fallback xmlns="">
-      <p:transition spd="slow">
-        <p:fade/>
-      </p:transition>
-    </mc:Fallback>
-  </mc:AlternateContent>
-</p:sld>
-</file>
-
-<file path=ppt/slides/slide16.xml><?xml version="1.0" encoding="utf-8"?>
-<p:sld xmlns:a="http://schemas.openxmlformats.org/drawingml/2006/main" xmlns:r="http://schemas.openxmlformats.org/officeDocument/2006/relationships" xmlns:p="http://schemas.openxmlformats.org/presentationml/2006/main">
-  <p:cSld>
-    <p:spTree>
-      <p:nvGrpSpPr>
-        <p:cNvPr id="1" name="">
-          <a:extLst>
-            <a:ext uri="{FF2B5EF4-FFF2-40B4-BE49-F238E27FC236}">
-              <a16:creationId xmlns:a16="http://schemas.microsoft.com/office/drawing/2014/main" id="{2AD2F0D0-9E23-CC9E-5665-D8072158A526}"/>
-            </a:ext>
-          </a:extLst>
-        </p:cNvPr>
-        <p:cNvGrpSpPr/>
-        <p:nvPr/>
-      </p:nvGrpSpPr>
-      <p:grpSpPr>
-        <a:xfrm>
-          <a:off x="0" y="0"/>
-          <a:ext cx="0" cy="0"/>
-          <a:chOff x="0" y="0"/>
-          <a:chExt cx="0" cy="0"/>
-        </a:xfrm>
-      </p:grpSpPr>
-      <p:sp>
-        <p:nvSpPr>
-          <p:cNvPr id="6" name="Text Box 2">
-            <a:extLst>
-              <a:ext uri="{FF2B5EF4-FFF2-40B4-BE49-F238E27FC236}">
-                <a16:creationId xmlns:a16="http://schemas.microsoft.com/office/drawing/2014/main" id="{AC0A359D-C428-AEF9-E281-A2ECC3DACC43}"/>
-              </a:ext>
-            </a:extLst>
-          </p:cNvPr>
-          <p:cNvSpPr txBox="1">
-            <a:spLocks noChangeArrowheads="1"/>
-          </p:cNvSpPr>
-          <p:nvPr/>
-        </p:nvSpPr>
-        <p:spPr bwMode="auto">
-          <a:xfrm>
-            <a:off x="1947192" y="639228"/>
-            <a:ext cx="8490263" cy="861774"/>
-          </a:xfrm>
-          <a:prstGeom prst="rect">
-            <a:avLst/>
-          </a:prstGeom>
-          <a:noFill/>
-          <a:ln w="9525">
-            <a:noFill/>
-            <a:miter lim="800000"/>
-            <a:headEnd/>
-            <a:tailEnd/>
-          </a:ln>
-        </p:spPr>
-        <p:txBody>
-          <a:bodyPr wrap="square">
-            <a:prstTxWarp prst="textNoShape">
-              <a:avLst/>
-            </a:prstTxWarp>
-            <a:spAutoFit/>
-          </a:bodyPr>
-          <a:lstStyle/>
-          <a:p>
-            <a:r>
-              <a:rPr lang="es-ES" sz="3200" b="1" dirty="0" err="1">
-                <a:solidFill>
-                  <a:schemeClr val="accent2"/>
-                </a:solidFill>
-                <a:latin typeface="Gill Sans MT" panose="020B0502020104020203" pitchFamily="34" charset="77"/>
-              </a:rPr>
-              <a:t>Canvas</a:t>
-            </a:r>
-            <a:r>
-              <a:rPr lang="es-ES" sz="3200" b="1" dirty="0">
-                <a:solidFill>
-                  <a:schemeClr val="accent2"/>
-                </a:solidFill>
-                <a:latin typeface="Gill Sans MT" panose="020B0502020104020203" pitchFamily="34" charset="77"/>
-              </a:rPr>
-              <a:t> del Curso - Calendario</a:t>
-            </a:r>
-          </a:p>
-          <a:p>
-            <a:endParaRPr lang="es-CL" b="1" dirty="0">
-              <a:solidFill>
-                <a:schemeClr val="accent2"/>
-              </a:solidFill>
-              <a:latin typeface="Gill Sans MT" panose="020B0502020104020203" pitchFamily="34" charset="77"/>
-            </a:endParaRPr>
-          </a:p>
-        </p:txBody>
-      </p:sp>
-      <p:pic>
-        <p:nvPicPr>
-          <p:cNvPr id="8" name="Picture 7">
-            <a:extLst>
-              <a:ext uri="{FF2B5EF4-FFF2-40B4-BE49-F238E27FC236}">
-                <a16:creationId xmlns:a16="http://schemas.microsoft.com/office/drawing/2014/main" id="{5DE1B933-CA1E-B2C0-86BD-C28DD88CE5E8}"/>
-              </a:ext>
-            </a:extLst>
-          </p:cNvPr>
-          <p:cNvPicPr>
-            <a:picLocks noChangeAspect="1"/>
-          </p:cNvPicPr>
-          <p:nvPr/>
-        </p:nvPicPr>
-        <p:blipFill>
-          <a:blip r:embed="rId2"/>
-          <a:stretch>
-            <a:fillRect/>
-          </a:stretch>
-        </p:blipFill>
-        <p:spPr>
-          <a:xfrm>
-            <a:off x="1754545" y="1396145"/>
-            <a:ext cx="6367479" cy="5216729"/>
-          </a:xfrm>
-          <a:prstGeom prst="rect">
-            <a:avLst/>
-          </a:prstGeom>
-        </p:spPr>
-      </p:pic>
-      <p:pic>
-        <p:nvPicPr>
-          <p:cNvPr id="9" name="Picture 8">
-            <a:extLst>
-              <a:ext uri="{FF2B5EF4-FFF2-40B4-BE49-F238E27FC236}">
-                <a16:creationId xmlns:a16="http://schemas.microsoft.com/office/drawing/2014/main" id="{D8E4E4F9-A655-2453-00D3-DB664622217A}"/>
-              </a:ext>
-            </a:extLst>
-          </p:cNvPr>
-          <p:cNvPicPr>
-            <a:picLocks noChangeAspect="1"/>
-          </p:cNvPicPr>
-          <p:nvPr/>
-        </p:nvPicPr>
-        <p:blipFill>
-          <a:blip r:embed="rId3"/>
-          <a:srcRect/>
-          <a:stretch/>
-        </p:blipFill>
-        <p:spPr>
-          <a:xfrm>
-            <a:off x="8950058" y="206252"/>
-            <a:ext cx="2589499" cy="2589499"/>
-          </a:xfrm>
-          <a:prstGeom prst="rect">
-            <a:avLst/>
-          </a:prstGeom>
-        </p:spPr>
-      </p:pic>
-      <p:sp>
-        <p:nvSpPr>
-          <p:cNvPr id="2" name="Date Placeholder 1">
-            <a:extLst>
-              <a:ext uri="{FF2B5EF4-FFF2-40B4-BE49-F238E27FC236}">
-                <a16:creationId xmlns:a16="http://schemas.microsoft.com/office/drawing/2014/main" id="{A36854D7-3322-D3EA-942C-267B1DC6FFF8}"/>
-              </a:ext>
-            </a:extLst>
-          </p:cNvPr>
-          <p:cNvSpPr>
-            <a:spLocks noGrp="1"/>
-          </p:cNvSpPr>
-          <p:nvPr>
-            <p:ph type="dt" sz="half" idx="10"/>
-          </p:nvPr>
-        </p:nvSpPr>
-        <p:spPr/>
-        <p:txBody>
-          <a:bodyPr/>
-          <a:lstStyle/>
-          <a:p>
-            <a:r>
-              <a:rPr lang="en-US"/>
-              <a:t>(c) D.Mery - PR00</a:t>
-            </a:r>
-            <a:endParaRPr lang="en-CL"/>
-          </a:p>
-        </p:txBody>
-      </p:sp>
-      <p:sp>
-        <p:nvSpPr>
-          <p:cNvPr id="3" name="Slide Number Placeholder 2">
-            <a:extLst>
-              <a:ext uri="{FF2B5EF4-FFF2-40B4-BE49-F238E27FC236}">
-                <a16:creationId xmlns:a16="http://schemas.microsoft.com/office/drawing/2014/main" id="{72472466-8C95-A6B2-0C26-05D0243B0D07}"/>
-              </a:ext>
-            </a:extLst>
-          </p:cNvPr>
-          <p:cNvSpPr>
-            <a:spLocks noGrp="1"/>
-          </p:cNvSpPr>
-          <p:nvPr>
-            <p:ph type="sldNum" sz="quarter" idx="12"/>
-          </p:nvPr>
-        </p:nvSpPr>
-        <p:spPr/>
-        <p:txBody>
-          <a:bodyPr/>
-          <a:lstStyle/>
-          <a:p>
-            <a:fld id="{006AE8E3-C79C-E14F-9140-34B0C7F543F1}" type="slidenum">
-              <a:rPr lang="en-CL" smtClean="0"/>
-              <a:t>16</a:t>
-            </a:fld>
-            <a:endParaRPr lang="en-CL"/>
-          </a:p>
-        </p:txBody>
-      </p:sp>
-    </p:spTree>
-    <p:extLst>
-      <p:ext uri="{BB962C8B-B14F-4D97-AF65-F5344CB8AC3E}">
-        <p14:creationId xmlns:p14="http://schemas.microsoft.com/office/powerpoint/2010/main" val="2776460280"/>
-      </p:ext>
-    </p:extLst>
-  </p:cSld>
-  <p:clrMapOvr>
-    <a:masterClrMapping/>
-  </p:clrMapOvr>
-</p:sld>
-</file>
-
-<file path=ppt/slides/slide17.xml><?xml version="1.0" encoding="utf-8"?>
-<p:sld xmlns:a="http://schemas.openxmlformats.org/drawingml/2006/main" xmlns:r="http://schemas.openxmlformats.org/officeDocument/2006/relationships" xmlns:p="http://schemas.openxmlformats.org/presentationml/2006/main">
-  <p:cSld>
-    <p:spTree>
-      <p:nvGrpSpPr>
-        <p:cNvPr id="1" name="">
-          <a:extLst>
-            <a:ext uri="{FF2B5EF4-FFF2-40B4-BE49-F238E27FC236}">
-              <a16:creationId xmlns:a16="http://schemas.microsoft.com/office/drawing/2014/main" id="{87603A26-0488-051B-0101-A1B79A80C882}"/>
-            </a:ext>
-          </a:extLst>
-        </p:cNvPr>
-        <p:cNvGrpSpPr/>
-        <p:nvPr/>
-      </p:nvGrpSpPr>
-      <p:grpSpPr>
-        <a:xfrm>
-          <a:off x="0" y="0"/>
-          <a:ext cx="0" cy="0"/>
-          <a:chOff x="0" y="0"/>
-          <a:chExt cx="0" cy="0"/>
-        </a:xfrm>
-      </p:grpSpPr>
-      <p:sp>
-        <p:nvSpPr>
-          <p:cNvPr id="6" name="Text Box 2">
-            <a:extLst>
-              <a:ext uri="{FF2B5EF4-FFF2-40B4-BE49-F238E27FC236}">
-                <a16:creationId xmlns:a16="http://schemas.microsoft.com/office/drawing/2014/main" id="{7A6B67C6-071F-1AB2-9B4F-E780DF398A93}"/>
-              </a:ext>
-            </a:extLst>
-          </p:cNvPr>
-          <p:cNvSpPr txBox="1">
-            <a:spLocks noChangeArrowheads="1"/>
-          </p:cNvSpPr>
-          <p:nvPr/>
-        </p:nvSpPr>
-        <p:spPr bwMode="auto">
-          <a:xfrm>
-            <a:off x="1947192" y="474338"/>
-            <a:ext cx="8490263" cy="861774"/>
-          </a:xfrm>
-          <a:prstGeom prst="rect">
-            <a:avLst/>
-          </a:prstGeom>
-          <a:noFill/>
-          <a:ln w="9525">
-            <a:noFill/>
-            <a:miter lim="800000"/>
-            <a:headEnd/>
-            <a:tailEnd/>
-          </a:ln>
-        </p:spPr>
-        <p:txBody>
-          <a:bodyPr wrap="square">
-            <a:prstTxWarp prst="textNoShape">
-              <a:avLst/>
-            </a:prstTxWarp>
-            <a:spAutoFit/>
-          </a:bodyPr>
-          <a:lstStyle/>
-          <a:p>
-            <a:r>
-              <a:rPr lang="es-ES" sz="3200" b="1" dirty="0">
-                <a:solidFill>
-                  <a:schemeClr val="bg1"/>
-                </a:solidFill>
-                <a:latin typeface="Trebuchet MS" charset="0"/>
-              </a:rPr>
-              <a:t>Calendario del Curso</a:t>
-            </a:r>
-          </a:p>
-          <a:p>
-            <a:endParaRPr lang="es-CL" b="1" dirty="0">
-              <a:solidFill>
-                <a:schemeClr val="bg1"/>
-              </a:solidFill>
-              <a:latin typeface="Trebuchet MS" charset="0"/>
-            </a:endParaRPr>
-          </a:p>
-        </p:txBody>
-      </p:sp>
-      <p:pic>
-        <p:nvPicPr>
-          <p:cNvPr id="3" name="Picture 2" descr="A screenshot of a phone&#10;&#10;AI-generated content may be incorrect.">
-            <a:extLst>
-              <a:ext uri="{FF2B5EF4-FFF2-40B4-BE49-F238E27FC236}">
-                <a16:creationId xmlns:a16="http://schemas.microsoft.com/office/drawing/2014/main" id="{3369DD5A-4684-1A39-D1CF-41FF7A3E336E}"/>
-              </a:ext>
-            </a:extLst>
-          </p:cNvPr>
-          <p:cNvPicPr>
-            <a:picLocks noChangeAspect="1"/>
-          </p:cNvPicPr>
-          <p:nvPr/>
-        </p:nvPicPr>
-        <p:blipFill>
-          <a:blip r:embed="rId3"/>
-          <a:stretch>
-            <a:fillRect/>
-          </a:stretch>
-        </p:blipFill>
-        <p:spPr>
-          <a:xfrm>
-            <a:off x="1353185" y="1188007"/>
-            <a:ext cx="3262210" cy="2954662"/>
-          </a:xfrm>
-          <a:prstGeom prst="rect">
-            <a:avLst/>
-          </a:prstGeom>
-        </p:spPr>
-      </p:pic>
-      <p:pic>
-        <p:nvPicPr>
-          <p:cNvPr id="5" name="Picture 4" descr="A screenshot of a phone&#10;&#10;AI-generated content may be incorrect.">
-            <a:extLst>
-              <a:ext uri="{FF2B5EF4-FFF2-40B4-BE49-F238E27FC236}">
-                <a16:creationId xmlns:a16="http://schemas.microsoft.com/office/drawing/2014/main" id="{A5B428FC-9C4B-BC57-7D17-8CB9C21855D1}"/>
-              </a:ext>
-            </a:extLst>
-          </p:cNvPr>
-          <p:cNvPicPr>
-            <a:picLocks noChangeAspect="1"/>
-          </p:cNvPicPr>
-          <p:nvPr/>
-        </p:nvPicPr>
-        <p:blipFill>
-          <a:blip r:embed="rId4"/>
-          <a:stretch>
-            <a:fillRect/>
-          </a:stretch>
-        </p:blipFill>
-        <p:spPr>
-          <a:xfrm>
-            <a:off x="6631770" y="0"/>
-            <a:ext cx="4030857" cy="6858000"/>
-          </a:xfrm>
-          <a:prstGeom prst="rect">
-            <a:avLst/>
-          </a:prstGeom>
-        </p:spPr>
-      </p:pic>
-      <p:pic>
-        <p:nvPicPr>
-          <p:cNvPr id="10" name="Picture 9" descr="A screenshot of a phone&#10;&#10;AI-generated content may be incorrect.">
-            <a:extLst>
-              <a:ext uri="{FF2B5EF4-FFF2-40B4-BE49-F238E27FC236}">
-                <a16:creationId xmlns:a16="http://schemas.microsoft.com/office/drawing/2014/main" id="{6079B8E0-C203-247F-6A9F-17636859F335}"/>
-              </a:ext>
-            </a:extLst>
-          </p:cNvPr>
-          <p:cNvPicPr>
-            <a:picLocks noChangeAspect="1"/>
-          </p:cNvPicPr>
-          <p:nvPr/>
-        </p:nvPicPr>
-        <p:blipFill>
-          <a:blip r:embed="rId5"/>
-          <a:stretch>
-            <a:fillRect/>
-          </a:stretch>
-        </p:blipFill>
-        <p:spPr>
-          <a:xfrm>
-            <a:off x="1353185" y="4192666"/>
-            <a:ext cx="4207046" cy="2190996"/>
-          </a:xfrm>
-          <a:prstGeom prst="rect">
-            <a:avLst/>
-          </a:prstGeom>
-        </p:spPr>
-      </p:pic>
-      <p:sp>
-        <p:nvSpPr>
-          <p:cNvPr id="12" name="Text Box 2">
-            <a:extLst>
-              <a:ext uri="{FF2B5EF4-FFF2-40B4-BE49-F238E27FC236}">
-                <a16:creationId xmlns:a16="http://schemas.microsoft.com/office/drawing/2014/main" id="{5781E40D-BBED-A986-7B26-A010492763F7}"/>
-              </a:ext>
-            </a:extLst>
-          </p:cNvPr>
-          <p:cNvSpPr txBox="1">
-            <a:spLocks noChangeArrowheads="1"/>
-          </p:cNvSpPr>
-          <p:nvPr/>
-        </p:nvSpPr>
-        <p:spPr bwMode="auto">
-          <a:xfrm>
-            <a:off x="638345" y="474338"/>
-            <a:ext cx="8490263" cy="861774"/>
-          </a:xfrm>
-          <a:prstGeom prst="rect">
-            <a:avLst/>
-          </a:prstGeom>
-          <a:noFill/>
-          <a:ln w="9525">
-            <a:noFill/>
-            <a:miter lim="800000"/>
-            <a:headEnd/>
-            <a:tailEnd/>
-          </a:ln>
-        </p:spPr>
-        <p:txBody>
-          <a:bodyPr wrap="square">
-            <a:prstTxWarp prst="textNoShape">
-              <a:avLst/>
-            </a:prstTxWarp>
-            <a:spAutoFit/>
-          </a:bodyPr>
-          <a:lstStyle/>
-          <a:p>
-            <a:r>
-              <a:rPr lang="es-ES" sz="3200" b="1" dirty="0">
-                <a:solidFill>
-                  <a:schemeClr val="accent2"/>
-                </a:solidFill>
-                <a:latin typeface="Gill Sans MT" panose="020B0502020104020203" pitchFamily="34" charset="77"/>
-              </a:rPr>
-              <a:t>Fechas Importantes</a:t>
-            </a:r>
-          </a:p>
-          <a:p>
-            <a:endParaRPr lang="es-CL" b="1" dirty="0">
-              <a:solidFill>
-                <a:schemeClr val="accent2"/>
-              </a:solidFill>
-              <a:latin typeface="Gill Sans MT" panose="020B0502020104020203" pitchFamily="34" charset="77"/>
-            </a:endParaRPr>
-          </a:p>
-        </p:txBody>
-      </p:sp>
-      <p:sp>
-        <p:nvSpPr>
-          <p:cNvPr id="2" name="Date Placeholder 1">
-            <a:extLst>
-              <a:ext uri="{FF2B5EF4-FFF2-40B4-BE49-F238E27FC236}">
-                <a16:creationId xmlns:a16="http://schemas.microsoft.com/office/drawing/2014/main" id="{1B059FFE-B38B-2653-698C-CD35591367EF}"/>
-              </a:ext>
-            </a:extLst>
-          </p:cNvPr>
-          <p:cNvSpPr>
-            <a:spLocks noGrp="1"/>
-          </p:cNvSpPr>
-          <p:nvPr>
-            <p:ph type="dt" sz="half" idx="10"/>
-          </p:nvPr>
-        </p:nvSpPr>
-        <p:spPr/>
-        <p:txBody>
-          <a:bodyPr/>
-          <a:lstStyle/>
-          <a:p>
-            <a:r>
-              <a:rPr lang="en-US"/>
-              <a:t>(c) D.Mery - PR00</a:t>
-            </a:r>
-            <a:endParaRPr lang="en-CL"/>
-          </a:p>
-        </p:txBody>
-      </p:sp>
-      <p:sp>
-        <p:nvSpPr>
-          <p:cNvPr id="4" name="Slide Number Placeholder 3">
-            <a:extLst>
-              <a:ext uri="{FF2B5EF4-FFF2-40B4-BE49-F238E27FC236}">
-                <a16:creationId xmlns:a16="http://schemas.microsoft.com/office/drawing/2014/main" id="{652CEAC5-24FE-BA58-8B8F-56D611E857D2}"/>
-              </a:ext>
-            </a:extLst>
-          </p:cNvPr>
-          <p:cNvSpPr>
-            <a:spLocks noGrp="1"/>
-          </p:cNvSpPr>
-          <p:nvPr>
-            <p:ph type="sldNum" sz="quarter" idx="12"/>
-          </p:nvPr>
-        </p:nvSpPr>
-        <p:spPr/>
-        <p:txBody>
-          <a:bodyPr/>
-          <a:lstStyle/>
-          <a:p>
-            <a:fld id="{006AE8E3-C79C-E14F-9140-34B0C7F543F1}" type="slidenum">
-              <a:rPr lang="en-CL" smtClean="0"/>
-              <a:t>17</a:t>
-            </a:fld>
-            <a:endParaRPr lang="en-CL"/>
-          </a:p>
-        </p:txBody>
-      </p:sp>
-    </p:spTree>
-    <p:extLst>
-      <p:ext uri="{BB962C8B-B14F-4D97-AF65-F5344CB8AC3E}">
-        <p14:creationId xmlns:p14="http://schemas.microsoft.com/office/powerpoint/2010/main" val="222510193"/>
-      </p:ext>
-    </p:extLst>
-  </p:cSld>
-  <p:clrMapOvr>
-    <a:masterClrMapping/>
-  </p:clrMapOvr>
-  <mc:AlternateContent xmlns:mc="http://schemas.openxmlformats.org/markup-compatibility/2006" xmlns:p159="http://schemas.microsoft.com/office/powerpoint/2015/09/main">
-    <mc:Choice Requires="p159">
-      <p:transition xmlns:p14="http://schemas.microsoft.com/office/powerpoint/2010/main" spd="slow" p14:dur="2000">
-        <p159:morph option="byObject"/>
-      </p:transition>
-    </mc:Choice>
-    <mc:Fallback xmlns="">
-      <p:transition spd="slow">
-        <p:fade/>
-      </p:transition>
-    </mc:Fallback>
-  </mc:AlternateContent>
-</p:sld>
-</file>
-
-<file path=ppt/slides/slide18.xml><?xml version="1.0" encoding="utf-8"?>
-<p:sld xmlns:a="http://schemas.openxmlformats.org/drawingml/2006/main" xmlns:r="http://schemas.openxmlformats.org/officeDocument/2006/relationships" xmlns:p="http://schemas.openxmlformats.org/presentationml/2006/main">
-  <p:cSld>
-    <p:spTree>
-      <p:nvGrpSpPr>
-        <p:cNvPr id="1" name=""/>
-        <p:cNvGrpSpPr/>
-        <p:nvPr/>
-      </p:nvGrpSpPr>
-      <p:grpSpPr>
-        <a:xfrm>
-          <a:off x="0" y="0"/>
-          <a:ext cx="0" cy="0"/>
-          <a:chOff x="0" y="0"/>
-          <a:chExt cx="0" cy="0"/>
-        </a:xfrm>
-      </p:grpSpPr>
-      <p:pic>
-        <p:nvPicPr>
-          <p:cNvPr id="5" name="Picture 4" descr="A qr code with a white background&#10;&#10;AI-generated content may be incorrect.">
-            <a:extLst>
-              <a:ext uri="{FF2B5EF4-FFF2-40B4-BE49-F238E27FC236}">
-                <a16:creationId xmlns:a16="http://schemas.microsoft.com/office/drawing/2014/main" id="{998B3FFC-740B-32CF-3F59-C3D1FA282568}"/>
-              </a:ext>
-            </a:extLst>
-          </p:cNvPr>
-          <p:cNvPicPr>
-            <a:picLocks noChangeAspect="1"/>
-          </p:cNvPicPr>
-          <p:nvPr/>
-        </p:nvPicPr>
-        <p:blipFill>
-          <a:blip r:embed="rId2"/>
-          <a:stretch>
-            <a:fillRect/>
-          </a:stretch>
-        </p:blipFill>
-        <p:spPr>
-          <a:xfrm>
-            <a:off x="-430164" y="0"/>
-            <a:ext cx="6858000" cy="6858000"/>
-          </a:xfrm>
-          <a:prstGeom prst="rect">
-            <a:avLst/>
-          </a:prstGeom>
-        </p:spPr>
-      </p:pic>
-      <p:sp>
-        <p:nvSpPr>
-          <p:cNvPr id="6" name="TextBox 5">
-            <a:extLst>
-              <a:ext uri="{FF2B5EF4-FFF2-40B4-BE49-F238E27FC236}">
-                <a16:creationId xmlns:a16="http://schemas.microsoft.com/office/drawing/2014/main" id="{EB1B4D3B-E17D-772A-1A09-36115E0C5CFE}"/>
-              </a:ext>
-            </a:extLst>
-          </p:cNvPr>
-          <p:cNvSpPr txBox="1"/>
-          <p:nvPr/>
-        </p:nvSpPr>
-        <p:spPr>
-          <a:xfrm>
-            <a:off x="4817806" y="5742039"/>
-            <a:ext cx="6811480" cy="461665"/>
-          </a:xfrm>
-          <a:prstGeom prst="rect">
-            <a:avLst/>
-          </a:prstGeom>
-          <a:solidFill>
-            <a:schemeClr val="bg1"/>
-          </a:solidFill>
-        </p:spPr>
-        <p:txBody>
-          <a:bodyPr wrap="none" rtlCol="0">
-            <a:spAutoFit/>
-          </a:bodyPr>
-          <a:lstStyle/>
-          <a:p>
-            <a:r>
-              <a:rPr lang="en-US" sz="2400" dirty="0">
-                <a:latin typeface="Consolas" panose="020B0609020204030204" pitchFamily="49" charset="0"/>
-                <a:cs typeface="Consolas" panose="020B0609020204030204" pitchFamily="49" charset="0"/>
-              </a:rPr>
-              <a:t>https://</a:t>
-            </a:r>
-            <a:r>
-              <a:rPr lang="en-US" sz="2400" dirty="0" err="1">
-                <a:latin typeface="Consolas" panose="020B0609020204030204" pitchFamily="49" charset="0"/>
-                <a:cs typeface="Consolas" panose="020B0609020204030204" pitchFamily="49" charset="0"/>
-              </a:rPr>
-              <a:t>github.com</a:t>
-            </a:r>
-            <a:r>
-              <a:rPr lang="en-US" sz="2400">
-                <a:latin typeface="Consolas" panose="020B0609020204030204" pitchFamily="49" charset="0"/>
-                <a:cs typeface="Consolas" panose="020B0609020204030204" pitchFamily="49" charset="0"/>
-              </a:rPr>
-              <a:t>/</a:t>
-            </a:r>
-            <a:r>
-              <a:rPr lang="en-US" sz="2400" err="1">
-                <a:latin typeface="Consolas" panose="020B0609020204030204" pitchFamily="49" charset="0"/>
-                <a:cs typeface="Consolas" panose="020B0609020204030204" pitchFamily="49" charset="0"/>
-              </a:rPr>
-              <a:t>domingomery</a:t>
-            </a:r>
-            <a:r>
-              <a:rPr lang="en-US" sz="2400">
-                <a:latin typeface="Consolas" panose="020B0609020204030204" pitchFamily="49" charset="0"/>
-                <a:cs typeface="Consolas" panose="020B0609020204030204" pitchFamily="49" charset="0"/>
-              </a:rPr>
-              <a:t>/</a:t>
-            </a:r>
-            <a:r>
-              <a:rPr lang="en-US" sz="2400" err="1">
-                <a:latin typeface="Consolas" panose="020B0609020204030204" pitchFamily="49" charset="0"/>
-                <a:cs typeface="Consolas" panose="020B0609020204030204" pitchFamily="49" charset="0"/>
-              </a:rPr>
-              <a:t>patrones</a:t>
-            </a:r>
-            <a:endParaRPr lang="en-CL" sz="2400">
-              <a:latin typeface="Consolas" panose="020B0609020204030204" pitchFamily="49" charset="0"/>
-              <a:cs typeface="Consolas" panose="020B0609020204030204" pitchFamily="49" charset="0"/>
-            </a:endParaRPr>
-          </a:p>
-        </p:txBody>
-      </p:sp>
-      <p:sp>
-        <p:nvSpPr>
-          <p:cNvPr id="7" name="TextBox 6">
-            <a:extLst>
-              <a:ext uri="{FF2B5EF4-FFF2-40B4-BE49-F238E27FC236}">
-                <a16:creationId xmlns:a16="http://schemas.microsoft.com/office/drawing/2014/main" id="{1AA5EF0F-C645-0BEA-B6B4-684D9265714B}"/>
-              </a:ext>
-            </a:extLst>
-          </p:cNvPr>
-          <p:cNvSpPr txBox="1"/>
-          <p:nvPr/>
-        </p:nvSpPr>
-        <p:spPr>
-          <a:xfrm>
-            <a:off x="6213987" y="654296"/>
-            <a:ext cx="4724820" cy="1446550"/>
-          </a:xfrm>
-          <a:prstGeom prst="rect">
-            <a:avLst/>
-          </a:prstGeom>
-          <a:noFill/>
-        </p:spPr>
-        <p:txBody>
-          <a:bodyPr wrap="none" rtlCol="0">
-            <a:spAutoFit/>
-          </a:bodyPr>
-          <a:lstStyle/>
-          <a:p>
-            <a:r>
-              <a:rPr lang="en-CL" sz="3200" b="1" dirty="0">
-                <a:solidFill>
-                  <a:schemeClr val="accent2"/>
-                </a:solidFill>
-                <a:latin typeface="Gill Sans MT" panose="020B0502020104020203" pitchFamily="34" charset="77"/>
-                <a:cs typeface="Consolas" panose="020B0609020204030204" pitchFamily="49" charset="0"/>
-              </a:rPr>
-              <a:t>Material del Curso</a:t>
-            </a:r>
-          </a:p>
-          <a:p>
-            <a:endParaRPr lang="en-CL" sz="3200" b="1" dirty="0">
-              <a:solidFill>
-                <a:schemeClr val="accent2"/>
-              </a:solidFill>
-              <a:latin typeface="Gill Sans MT" panose="020B0502020104020203" pitchFamily="34" charset="77"/>
-              <a:cs typeface="Consolas" panose="020B0609020204030204" pitchFamily="49" charset="0"/>
-            </a:endParaRPr>
-          </a:p>
-          <a:p>
-            <a:r>
-              <a:rPr lang="en-CL" sz="2400" dirty="0">
-                <a:latin typeface="Gill Sans MT" panose="020B0502020104020203" pitchFamily="34" charset="77"/>
-                <a:cs typeface="Consolas" panose="020B0609020204030204" pitchFamily="49" charset="0"/>
-              </a:rPr>
-              <a:t>Aquí está todo el material del curso.</a:t>
-            </a:r>
-          </a:p>
-        </p:txBody>
-      </p:sp>
-      <p:sp>
-        <p:nvSpPr>
-          <p:cNvPr id="2" name="Date Placeholder 1">
-            <a:extLst>
-              <a:ext uri="{FF2B5EF4-FFF2-40B4-BE49-F238E27FC236}">
-                <a16:creationId xmlns:a16="http://schemas.microsoft.com/office/drawing/2014/main" id="{BA3CEE1A-E968-000B-FBF5-3B586A48AF82}"/>
-              </a:ext>
-            </a:extLst>
-          </p:cNvPr>
-          <p:cNvSpPr>
-            <a:spLocks noGrp="1"/>
-          </p:cNvSpPr>
-          <p:nvPr>
-            <p:ph type="dt" sz="half" idx="10"/>
-          </p:nvPr>
-        </p:nvSpPr>
-        <p:spPr/>
-        <p:txBody>
-          <a:bodyPr/>
-          <a:lstStyle/>
-          <a:p>
-            <a:r>
-              <a:rPr lang="en-US"/>
-              <a:t>(c) D.Mery - PR00</a:t>
-            </a:r>
-            <a:endParaRPr lang="en-CL"/>
-          </a:p>
-        </p:txBody>
-      </p:sp>
-      <p:sp>
-        <p:nvSpPr>
-          <p:cNvPr id="3" name="Slide Number Placeholder 2">
-            <a:extLst>
-              <a:ext uri="{FF2B5EF4-FFF2-40B4-BE49-F238E27FC236}">
-                <a16:creationId xmlns:a16="http://schemas.microsoft.com/office/drawing/2014/main" id="{F6B88860-1923-2D97-CB87-95833419AEF7}"/>
-              </a:ext>
-            </a:extLst>
-          </p:cNvPr>
-          <p:cNvSpPr>
-            <a:spLocks noGrp="1"/>
-          </p:cNvSpPr>
-          <p:nvPr>
-            <p:ph type="sldNum" sz="quarter" idx="12"/>
-          </p:nvPr>
-        </p:nvSpPr>
-        <p:spPr/>
-        <p:txBody>
-          <a:bodyPr/>
-          <a:lstStyle/>
-          <a:p>
-            <a:fld id="{006AE8E3-C79C-E14F-9140-34B0C7F543F1}" type="slidenum">
-              <a:rPr lang="en-CL" smtClean="0"/>
-              <a:t>18</a:t>
-            </a:fld>
-            <a:endParaRPr lang="en-CL"/>
-          </a:p>
-        </p:txBody>
-      </p:sp>
-    </p:spTree>
-    <p:extLst>
-      <p:ext uri="{BB962C8B-B14F-4D97-AF65-F5344CB8AC3E}">
-        <p14:creationId xmlns:p14="http://schemas.microsoft.com/office/powerpoint/2010/main" val="2869770688"/>
-      </p:ext>
-    </p:extLst>
-  </p:cSld>
-  <p:clrMapOvr>
-    <a:masterClrMapping/>
-  </p:clrMapOvr>
-</p:sld>
-</file>
-
-<file path=ppt/slides/slide19.xml><?xml version="1.0" encoding="utf-8"?>
-<p:sld xmlns:a="http://schemas.openxmlformats.org/drawingml/2006/main" xmlns:r="http://schemas.openxmlformats.org/officeDocument/2006/relationships" xmlns:p="http://schemas.openxmlformats.org/presentationml/2006/main">
-  <p:cSld>
-    <p:spTree>
-      <p:nvGrpSpPr>
-        <p:cNvPr id="1" name="">
-          <a:extLst>
-            <a:ext uri="{FF2B5EF4-FFF2-40B4-BE49-F238E27FC236}">
-              <a16:creationId xmlns:a16="http://schemas.microsoft.com/office/drawing/2014/main" id="{534FED3F-6F82-F353-B534-DAB61C4F1E00}"/>
-            </a:ext>
-          </a:extLst>
-        </p:cNvPr>
-        <p:cNvGrpSpPr/>
-        <p:nvPr/>
-      </p:nvGrpSpPr>
-      <p:grpSpPr>
-        <a:xfrm>
-          <a:off x="0" y="0"/>
-          <a:ext cx="0" cy="0"/>
-          <a:chOff x="0" y="0"/>
-          <a:chExt cx="0" cy="0"/>
-        </a:xfrm>
-      </p:grpSpPr>
-      <p:sp>
-        <p:nvSpPr>
-          <p:cNvPr id="6" name="Text Box 2">
-            <a:extLst>
-              <a:ext uri="{FF2B5EF4-FFF2-40B4-BE49-F238E27FC236}">
-                <a16:creationId xmlns:a16="http://schemas.microsoft.com/office/drawing/2014/main" id="{EDD728B5-763A-D7C2-72DD-21E87C9FEF7C}"/>
-              </a:ext>
-            </a:extLst>
-          </p:cNvPr>
-          <p:cNvSpPr txBox="1">
-            <a:spLocks noChangeArrowheads="1"/>
-          </p:cNvSpPr>
-          <p:nvPr/>
-        </p:nvSpPr>
-        <p:spPr bwMode="auto">
-          <a:xfrm>
-            <a:off x="772747" y="639228"/>
-            <a:ext cx="8490263" cy="861774"/>
-          </a:xfrm>
-          <a:prstGeom prst="rect">
-            <a:avLst/>
-          </a:prstGeom>
-          <a:noFill/>
-          <a:ln w="9525">
-            <a:noFill/>
-            <a:miter lim="800000"/>
-            <a:headEnd/>
-            <a:tailEnd/>
-          </a:ln>
-        </p:spPr>
-        <p:txBody>
-          <a:bodyPr wrap="square">
-            <a:prstTxWarp prst="textNoShape">
-              <a:avLst/>
-            </a:prstTxWarp>
-            <a:spAutoFit/>
-          </a:bodyPr>
-          <a:lstStyle/>
-          <a:p>
-            <a:r>
-              <a:rPr lang="es-ES" sz="3200" b="1" dirty="0">
-                <a:solidFill>
-                  <a:schemeClr val="accent2"/>
-                </a:solidFill>
-                <a:latin typeface="Gill Sans MT" panose="020B0502020104020203" pitchFamily="34" charset="77"/>
-              </a:rPr>
-              <a:t>YouTube del Curso (2025)</a:t>
-            </a:r>
-          </a:p>
-          <a:p>
-            <a:endParaRPr lang="es-CL" b="1" dirty="0">
-              <a:solidFill>
-                <a:schemeClr val="accent2"/>
-              </a:solidFill>
-              <a:latin typeface="Gill Sans MT" panose="020B0502020104020203" pitchFamily="34" charset="77"/>
-            </a:endParaRPr>
-          </a:p>
-        </p:txBody>
-      </p:sp>
-      <p:sp>
-        <p:nvSpPr>
-          <p:cNvPr id="5" name="TextBox 4">
-            <a:extLst>
-              <a:ext uri="{FF2B5EF4-FFF2-40B4-BE49-F238E27FC236}">
-                <a16:creationId xmlns:a16="http://schemas.microsoft.com/office/drawing/2014/main" id="{8D85A4D6-BAD9-B5D1-2A2F-D53F25A4A41E}"/>
-              </a:ext>
-            </a:extLst>
-          </p:cNvPr>
-          <p:cNvSpPr txBox="1"/>
-          <p:nvPr/>
-        </p:nvSpPr>
-        <p:spPr>
-          <a:xfrm>
-            <a:off x="7651234" y="5616116"/>
-            <a:ext cx="4092787" cy="461665"/>
-          </a:xfrm>
-          <a:prstGeom prst="rect">
-            <a:avLst/>
-          </a:prstGeom>
-          <a:noFill/>
-        </p:spPr>
-        <p:txBody>
-          <a:bodyPr wrap="none" rtlCol="0">
-            <a:spAutoFit/>
-          </a:bodyPr>
-          <a:lstStyle/>
-          <a:p>
-            <a:r>
-              <a:rPr lang="en-US" sz="2400" dirty="0">
-                <a:latin typeface="Consolas" panose="020B0609020204030204" pitchFamily="49" charset="0"/>
-                <a:cs typeface="Consolas" panose="020B0609020204030204" pitchFamily="49" charset="0"/>
-                <a:hlinkClick r:id="rId2"/>
-              </a:rPr>
-              <a:t>https://bit.ly/4syPtMU</a:t>
-            </a:r>
-            <a:r>
-              <a:rPr lang="en-US" sz="2400" dirty="0">
-                <a:latin typeface="Consolas" panose="020B0609020204030204" pitchFamily="49" charset="0"/>
-                <a:cs typeface="Consolas" panose="020B0609020204030204" pitchFamily="49" charset="0"/>
-              </a:rPr>
-              <a:t> </a:t>
-            </a:r>
-            <a:endParaRPr lang="en-CL" sz="2400" dirty="0">
-              <a:latin typeface="Consolas" panose="020B0609020204030204" pitchFamily="49" charset="0"/>
-              <a:cs typeface="Consolas" panose="020B0609020204030204" pitchFamily="49" charset="0"/>
-            </a:endParaRPr>
-          </a:p>
-        </p:txBody>
-      </p:sp>
-      <p:pic>
-        <p:nvPicPr>
-          <p:cNvPr id="3" name="Picture 2">
-            <a:extLst>
-              <a:ext uri="{FF2B5EF4-FFF2-40B4-BE49-F238E27FC236}">
-                <a16:creationId xmlns:a16="http://schemas.microsoft.com/office/drawing/2014/main" id="{69024FF5-1413-9D80-BE94-9792CFEB6750}"/>
-              </a:ext>
-            </a:extLst>
-          </p:cNvPr>
-          <p:cNvPicPr>
-            <a:picLocks noChangeAspect="1"/>
-          </p:cNvPicPr>
-          <p:nvPr/>
-        </p:nvPicPr>
-        <p:blipFill>
-          <a:blip r:embed="rId3"/>
-          <a:srcRect/>
-          <a:stretch/>
-        </p:blipFill>
-        <p:spPr>
-          <a:xfrm>
-            <a:off x="9544369" y="220818"/>
-            <a:ext cx="2199652" cy="2199652"/>
-          </a:xfrm>
-          <a:prstGeom prst="rect">
-            <a:avLst/>
-          </a:prstGeom>
-        </p:spPr>
-      </p:pic>
-      <p:pic>
-        <p:nvPicPr>
-          <p:cNvPr id="9" name="Picture 8" descr="A screenshot of a computer&#10;&#10;AI-generated content may be incorrect.">
-            <a:extLst>
-              <a:ext uri="{FF2B5EF4-FFF2-40B4-BE49-F238E27FC236}">
-                <a16:creationId xmlns:a16="http://schemas.microsoft.com/office/drawing/2014/main" id="{8C1ABE81-95C9-1D1C-EBF5-D499F27F68D6}"/>
-              </a:ext>
-            </a:extLst>
-          </p:cNvPr>
-          <p:cNvPicPr>
-            <a:picLocks noChangeAspect="1"/>
-          </p:cNvPicPr>
-          <p:nvPr/>
-        </p:nvPicPr>
-        <p:blipFill>
-          <a:blip r:embed="rId4"/>
-          <a:stretch>
-            <a:fillRect/>
-          </a:stretch>
-        </p:blipFill>
-        <p:spPr>
-          <a:xfrm>
-            <a:off x="772747" y="1501002"/>
-            <a:ext cx="6291442" cy="4576779"/>
-          </a:xfrm>
-          <a:prstGeom prst="rect">
-            <a:avLst/>
-          </a:prstGeom>
-        </p:spPr>
-      </p:pic>
-      <p:sp>
-        <p:nvSpPr>
-          <p:cNvPr id="2" name="Date Placeholder 1">
-            <a:extLst>
-              <a:ext uri="{FF2B5EF4-FFF2-40B4-BE49-F238E27FC236}">
-                <a16:creationId xmlns:a16="http://schemas.microsoft.com/office/drawing/2014/main" id="{2924B9C7-EF88-0EBC-40F7-DF6226E6AF68}"/>
-              </a:ext>
-            </a:extLst>
-          </p:cNvPr>
-          <p:cNvSpPr>
-            <a:spLocks noGrp="1"/>
-          </p:cNvSpPr>
-          <p:nvPr>
-            <p:ph type="dt" sz="half" idx="10"/>
-          </p:nvPr>
-        </p:nvSpPr>
-        <p:spPr/>
-        <p:txBody>
-          <a:bodyPr/>
-          <a:lstStyle/>
-          <a:p>
-            <a:r>
-              <a:rPr lang="en-US"/>
-              <a:t>(c) D.Mery - PR00</a:t>
-            </a:r>
-            <a:endParaRPr lang="en-CL"/>
-          </a:p>
-        </p:txBody>
-      </p:sp>
-      <p:sp>
-        <p:nvSpPr>
-          <p:cNvPr id="4" name="Slide Number Placeholder 3">
-            <a:extLst>
-              <a:ext uri="{FF2B5EF4-FFF2-40B4-BE49-F238E27FC236}">
-                <a16:creationId xmlns:a16="http://schemas.microsoft.com/office/drawing/2014/main" id="{66A5551B-3905-D66A-AA2D-977E2A4ECABE}"/>
-              </a:ext>
-            </a:extLst>
-          </p:cNvPr>
-          <p:cNvSpPr>
-            <a:spLocks noGrp="1"/>
-          </p:cNvSpPr>
-          <p:nvPr>
-            <p:ph type="sldNum" sz="quarter" idx="12"/>
-          </p:nvPr>
-        </p:nvSpPr>
-        <p:spPr/>
-        <p:txBody>
-          <a:bodyPr/>
-          <a:lstStyle/>
-          <a:p>
-            <a:fld id="{006AE8E3-C79C-E14F-9140-34B0C7F543F1}" type="slidenum">
-              <a:rPr lang="en-CL" smtClean="0"/>
-              <a:t>19</a:t>
-            </a:fld>
-            <a:endParaRPr lang="en-CL"/>
-          </a:p>
-        </p:txBody>
-      </p:sp>
-    </p:spTree>
-    <p:extLst>
-      <p:ext uri="{BB962C8B-B14F-4D97-AF65-F5344CB8AC3E}">
-        <p14:creationId xmlns:p14="http://schemas.microsoft.com/office/powerpoint/2010/main" val="2051774844"/>
-      </p:ext>
-    </p:extLst>
-  </p:cSld>
-  <p:clrMapOvr>
-    <a:masterClrMapping/>
-  </p:clrMapOvr>
-  <mc:AlternateContent xmlns:mc="http://schemas.openxmlformats.org/markup-compatibility/2006" xmlns:p159="http://schemas.microsoft.com/office/powerpoint/2015/09/main">
-    <mc:Choice Requires="p159">
-      <p:transition xmlns:p14="http://schemas.microsoft.com/office/powerpoint/2010/main" spd="slow" p14:dur="2000">
-        <p159:morph option="byObject"/>
-      </p:transition>
-    </mc:Choice>
-    <mc:Fallback xmlns="">
-      <p:transition spd="slow">
-        <p:fade/>
-      </p:transition>
-    </mc:Fallback>
-  </mc:AlternateContent>
-</p:sld>
-</file>
-
 <file path=ppt/slides/slide2.xml><?xml version="1.0" encoding="utf-8"?>
 <p:sld xmlns:a="http://schemas.openxmlformats.org/drawingml/2006/main" xmlns:r="http://schemas.openxmlformats.org/officeDocument/2006/relationships" xmlns:p="http://schemas.openxmlformats.org/presentationml/2006/main">
   <p:cSld>
@@ -9736,2274 +5849,6 @@
     </p:tnLst>
     <p:bldLst>
       <p:bldP spid="2" grpId="0"/>
-    </p:bldLst>
-  </p:timing>
-</p:sld>
-</file>
-
-<file path=ppt/slides/slide20.xml><?xml version="1.0" encoding="utf-8"?>
-<p:sld xmlns:a="http://schemas.openxmlformats.org/drawingml/2006/main" xmlns:r="http://schemas.openxmlformats.org/officeDocument/2006/relationships" xmlns:p="http://schemas.openxmlformats.org/presentationml/2006/main">
-  <p:cSld>
-    <p:spTree>
-      <p:nvGrpSpPr>
-        <p:cNvPr id="1" name=""/>
-        <p:cNvGrpSpPr/>
-        <p:nvPr/>
-      </p:nvGrpSpPr>
-      <p:grpSpPr>
-        <a:xfrm>
-          <a:off x="0" y="0"/>
-          <a:ext cx="0" cy="0"/>
-          <a:chOff x="0" y="0"/>
-          <a:chExt cx="0" cy="0"/>
-        </a:xfrm>
-      </p:grpSpPr>
-      <p:sp>
-        <p:nvSpPr>
-          <p:cNvPr id="24578" name="Text Box 2"/>
-          <p:cNvSpPr txBox="1">
-            <a:spLocks noChangeArrowheads="1"/>
-          </p:cNvSpPr>
-          <p:nvPr/>
-        </p:nvSpPr>
-        <p:spPr bwMode="auto">
-          <a:xfrm>
-            <a:off x="1971676" y="313137"/>
-            <a:ext cx="8490263" cy="861774"/>
-          </a:xfrm>
-          <a:prstGeom prst="rect">
-            <a:avLst/>
-          </a:prstGeom>
-          <a:noFill/>
-          <a:ln w="9525">
-            <a:noFill/>
-            <a:miter lim="800000"/>
-            <a:headEnd/>
-            <a:tailEnd/>
-          </a:ln>
-        </p:spPr>
-        <p:txBody>
-          <a:bodyPr wrap="square">
-            <a:prstTxWarp prst="textNoShape">
-              <a:avLst/>
-            </a:prstTxWarp>
-            <a:spAutoFit/>
-          </a:bodyPr>
-          <a:lstStyle/>
-          <a:p>
-            <a:r>
-              <a:rPr lang="es-ES" sz="3200" b="1" dirty="0">
-                <a:solidFill>
-                  <a:schemeClr val="accent2"/>
-                </a:solidFill>
-                <a:latin typeface="Gill Sans MT" panose="020B0502020104020203" pitchFamily="34" charset="77"/>
-              </a:rPr>
-              <a:t>Trabajo en Clases</a:t>
-            </a:r>
-          </a:p>
-          <a:p>
-            <a:endParaRPr lang="es-CL" b="1" dirty="0">
-              <a:solidFill>
-                <a:schemeClr val="accent2"/>
-              </a:solidFill>
-              <a:latin typeface="Gill Sans MT" panose="020B0502020104020203" pitchFamily="34" charset="77"/>
-            </a:endParaRPr>
-          </a:p>
-        </p:txBody>
-      </p:sp>
-      <p:sp>
-        <p:nvSpPr>
-          <p:cNvPr id="2" name="Date Placeholder 1">
-            <a:extLst>
-              <a:ext uri="{FF2B5EF4-FFF2-40B4-BE49-F238E27FC236}">
-                <a16:creationId xmlns:a16="http://schemas.microsoft.com/office/drawing/2014/main" id="{D3617796-6F32-039B-9EAD-84D99A186663}"/>
-              </a:ext>
-            </a:extLst>
-          </p:cNvPr>
-          <p:cNvSpPr>
-            <a:spLocks noGrp="1"/>
-          </p:cNvSpPr>
-          <p:nvPr>
-            <p:ph type="dt" sz="half" idx="10"/>
-          </p:nvPr>
-        </p:nvSpPr>
-        <p:spPr/>
-        <p:txBody>
-          <a:bodyPr/>
-          <a:lstStyle/>
-          <a:p>
-            <a:r>
-              <a:rPr lang="en-US"/>
-              <a:t>(c) D.Mery - PR00</a:t>
-            </a:r>
-            <a:endParaRPr lang="en-CL"/>
-          </a:p>
-        </p:txBody>
-      </p:sp>
-      <p:sp>
-        <p:nvSpPr>
-          <p:cNvPr id="3" name="Slide Number Placeholder 2">
-            <a:extLst>
-              <a:ext uri="{FF2B5EF4-FFF2-40B4-BE49-F238E27FC236}">
-                <a16:creationId xmlns:a16="http://schemas.microsoft.com/office/drawing/2014/main" id="{7E1D71C6-A26C-E7D3-0226-2DFD9F99D809}"/>
-              </a:ext>
-            </a:extLst>
-          </p:cNvPr>
-          <p:cNvSpPr>
-            <a:spLocks noGrp="1"/>
-          </p:cNvSpPr>
-          <p:nvPr>
-            <p:ph type="sldNum" sz="quarter" idx="12"/>
-          </p:nvPr>
-        </p:nvSpPr>
-        <p:spPr/>
-        <p:txBody>
-          <a:bodyPr/>
-          <a:lstStyle/>
-          <a:p>
-            <a:fld id="{006AE8E3-C79C-E14F-9140-34B0C7F543F1}" type="slidenum">
-              <a:rPr lang="en-CL" smtClean="0"/>
-              <a:t>20</a:t>
-            </a:fld>
-            <a:endParaRPr lang="en-CL"/>
-          </a:p>
-        </p:txBody>
-      </p:sp>
-    </p:spTree>
-    <p:extLst>
-      <p:ext uri="{BB962C8B-B14F-4D97-AF65-F5344CB8AC3E}">
-        <p14:creationId xmlns:p14="http://schemas.microsoft.com/office/powerpoint/2010/main" val="1160867583"/>
-      </p:ext>
-    </p:extLst>
-  </p:cSld>
-  <p:clrMapOvr>
-    <a:masterClrMapping/>
-  </p:clrMapOvr>
-</p:sld>
-</file>
-
-<file path=ppt/slides/slide21.xml><?xml version="1.0" encoding="utf-8"?>
-<p:sld xmlns:a="http://schemas.openxmlformats.org/drawingml/2006/main" xmlns:r="http://schemas.openxmlformats.org/officeDocument/2006/relationships" xmlns:p="http://schemas.openxmlformats.org/presentationml/2006/main">
-  <p:cSld>
-    <p:spTree>
-      <p:nvGrpSpPr>
-        <p:cNvPr id="1" name=""/>
-        <p:cNvGrpSpPr/>
-        <p:nvPr/>
-      </p:nvGrpSpPr>
-      <p:grpSpPr>
-        <a:xfrm>
-          <a:off x="0" y="0"/>
-          <a:ext cx="0" cy="0"/>
-          <a:chOff x="0" y="0"/>
-          <a:chExt cx="0" cy="0"/>
-        </a:xfrm>
-      </p:grpSpPr>
-      <p:sp>
-        <p:nvSpPr>
-          <p:cNvPr id="24578" name="Text Box 2"/>
-          <p:cNvSpPr txBox="1">
-            <a:spLocks noChangeArrowheads="1"/>
-          </p:cNvSpPr>
-          <p:nvPr/>
-        </p:nvSpPr>
-        <p:spPr bwMode="auto">
-          <a:xfrm>
-            <a:off x="1971676" y="313137"/>
-            <a:ext cx="8490263" cy="861774"/>
-          </a:xfrm>
-          <a:prstGeom prst="rect">
-            <a:avLst/>
-          </a:prstGeom>
-          <a:noFill/>
-          <a:ln w="9525">
-            <a:noFill/>
-            <a:miter lim="800000"/>
-            <a:headEnd/>
-            <a:tailEnd/>
-          </a:ln>
-        </p:spPr>
-        <p:txBody>
-          <a:bodyPr wrap="square">
-            <a:prstTxWarp prst="textNoShape">
-              <a:avLst/>
-            </a:prstTxWarp>
-            <a:spAutoFit/>
-          </a:bodyPr>
-          <a:lstStyle/>
-          <a:p>
-            <a:r>
-              <a:rPr lang="es-ES" sz="3200" b="1" dirty="0">
-                <a:solidFill>
-                  <a:schemeClr val="accent2"/>
-                </a:solidFill>
-                <a:latin typeface="Gill Sans MT" panose="020B0502020104020203" pitchFamily="34" charset="77"/>
-              </a:rPr>
-              <a:t>Trabajo en Clases</a:t>
-            </a:r>
-          </a:p>
-          <a:p>
-            <a:endParaRPr lang="es-CL" b="1" dirty="0">
-              <a:solidFill>
-                <a:schemeClr val="accent2"/>
-              </a:solidFill>
-              <a:latin typeface="Gill Sans MT" panose="020B0502020104020203" pitchFamily="34" charset="77"/>
-            </a:endParaRPr>
-          </a:p>
-        </p:txBody>
-      </p:sp>
-      <p:sp>
-        <p:nvSpPr>
-          <p:cNvPr id="3" name="TextBox 2">
-            <a:extLst>
-              <a:ext uri="{FF2B5EF4-FFF2-40B4-BE49-F238E27FC236}">
-                <a16:creationId xmlns:a16="http://schemas.microsoft.com/office/drawing/2014/main" id="{55D4560E-C34D-C05E-868E-AC7593F4B5C1}"/>
-              </a:ext>
-            </a:extLst>
-          </p:cNvPr>
-          <p:cNvSpPr txBox="1"/>
-          <p:nvPr/>
-        </p:nvSpPr>
-        <p:spPr>
-          <a:xfrm>
-            <a:off x="2074912" y="1152536"/>
-            <a:ext cx="8135885" cy="4832092"/>
-          </a:xfrm>
-          <a:prstGeom prst="rect">
-            <a:avLst/>
-          </a:prstGeom>
-          <a:noFill/>
-        </p:spPr>
-        <p:txBody>
-          <a:bodyPr wrap="square">
-            <a:spAutoFit/>
-          </a:bodyPr>
-          <a:lstStyle/>
-          <a:p>
-            <a:r>
-              <a:rPr lang="es-ES_tradnl" sz="2800" dirty="0">
-                <a:solidFill>
-                  <a:schemeClr val="accent2"/>
-                </a:solidFill>
-                <a:latin typeface="Gill Sans MT" panose="020B0502020104020203" pitchFamily="34" charset="77"/>
-              </a:rPr>
-              <a:t>Son 12 Ejercicios en Clase</a:t>
-            </a:r>
-          </a:p>
-          <a:p>
-            <a:pPr algn="l"/>
-            <a:endParaRPr lang="en-US" sz="2800" dirty="0">
-              <a:solidFill>
-                <a:srgbClr val="2D3B45"/>
-              </a:solidFill>
-              <a:latin typeface="Gill Sans MT" panose="020B0502020104020203" pitchFamily="34" charset="77"/>
-            </a:endParaRPr>
-          </a:p>
-          <a:p>
-            <a:pPr algn="l"/>
-            <a:r>
-              <a:rPr lang="en-US" sz="2800" dirty="0">
-                <a:solidFill>
-                  <a:srgbClr val="2D3B45"/>
-                </a:solidFill>
-                <a:latin typeface="Gill Sans MT" panose="020B0502020104020203" pitchFamily="34" charset="77"/>
-              </a:rPr>
-              <a:t>Esta </a:t>
-            </a:r>
-            <a:r>
-              <a:rPr lang="en-US" sz="2800" dirty="0" err="1">
-                <a:solidFill>
-                  <a:srgbClr val="2D3B45"/>
-                </a:solidFill>
-                <a:latin typeface="Gill Sans MT" panose="020B0502020104020203" pitchFamily="34" charset="77"/>
-              </a:rPr>
-              <a:t>actividad</a:t>
-            </a:r>
-            <a:r>
-              <a:rPr lang="en-US" sz="2800" dirty="0">
-                <a:solidFill>
-                  <a:srgbClr val="2D3B45"/>
-                </a:solidFill>
-                <a:latin typeface="Gill Sans MT" panose="020B0502020104020203" pitchFamily="34" charset="77"/>
-              </a:rPr>
-              <a:t>, es un </a:t>
-            </a:r>
-            <a:r>
-              <a:rPr lang="en-US" sz="2800" dirty="0" err="1">
-                <a:solidFill>
-                  <a:srgbClr val="2D3B45"/>
-                </a:solidFill>
-                <a:latin typeface="Gill Sans MT" panose="020B0502020104020203" pitchFamily="34" charset="77"/>
-              </a:rPr>
-              <a:t>trabajo</a:t>
-            </a:r>
-            <a:r>
-              <a:rPr lang="en-US" sz="2800" dirty="0">
-                <a:solidFill>
-                  <a:srgbClr val="2D3B45"/>
-                </a:solidFill>
-                <a:latin typeface="Gill Sans MT" panose="020B0502020104020203" pitchFamily="34" charset="77"/>
-              </a:rPr>
-              <a:t> </a:t>
-            </a:r>
-            <a:r>
-              <a:rPr lang="en-US" sz="2800" dirty="0" err="1">
-                <a:solidFill>
-                  <a:srgbClr val="2D3B45"/>
-                </a:solidFill>
-                <a:latin typeface="Gill Sans MT" panose="020B0502020104020203" pitchFamily="34" charset="77"/>
-              </a:rPr>
-              <a:t>en</a:t>
-            </a:r>
-            <a:r>
-              <a:rPr lang="en-US" sz="2800" dirty="0">
-                <a:solidFill>
-                  <a:srgbClr val="2D3B45"/>
-                </a:solidFill>
-                <a:latin typeface="Gill Sans MT" panose="020B0502020104020203" pitchFamily="34" charset="77"/>
-              </a:rPr>
-              <a:t> </a:t>
-            </a:r>
-            <a:r>
-              <a:rPr lang="en-US" sz="2800" dirty="0" err="1">
-                <a:solidFill>
-                  <a:srgbClr val="2D3B45"/>
-                </a:solidFill>
-                <a:latin typeface="Gill Sans MT" panose="020B0502020104020203" pitchFamily="34" charset="77"/>
-              </a:rPr>
-              <a:t>clases</a:t>
-            </a:r>
-            <a:r>
-              <a:rPr lang="en-US" sz="2800" dirty="0">
-                <a:solidFill>
-                  <a:srgbClr val="2D3B45"/>
-                </a:solidFill>
-                <a:latin typeface="Gill Sans MT" panose="020B0502020104020203" pitchFamily="34" charset="77"/>
-              </a:rPr>
-              <a:t>. La idea es que </a:t>
-            </a:r>
-            <a:r>
-              <a:rPr lang="en-US" sz="2800" dirty="0" err="1">
-                <a:solidFill>
-                  <a:srgbClr val="2D3B45"/>
-                </a:solidFill>
-                <a:latin typeface="Gill Sans MT" panose="020B0502020104020203" pitchFamily="34" charset="77"/>
-              </a:rPr>
-              <a:t>vayas</a:t>
-            </a:r>
-            <a:r>
-              <a:rPr lang="en-US" sz="2800" dirty="0">
-                <a:solidFill>
-                  <a:srgbClr val="2D3B45"/>
-                </a:solidFill>
-                <a:latin typeface="Gill Sans MT" panose="020B0502020104020203" pitchFamily="34" charset="77"/>
-              </a:rPr>
-              <a:t> a la </a:t>
-            </a:r>
-            <a:r>
-              <a:rPr lang="en-US" sz="2800" dirty="0" err="1">
-                <a:solidFill>
-                  <a:srgbClr val="2D3B45"/>
-                </a:solidFill>
-                <a:latin typeface="Gill Sans MT" panose="020B0502020104020203" pitchFamily="34" charset="77"/>
-              </a:rPr>
-              <a:t>clase</a:t>
-            </a:r>
-            <a:r>
-              <a:rPr lang="en-US" sz="2800" dirty="0">
-                <a:solidFill>
-                  <a:srgbClr val="2D3B45"/>
-                </a:solidFill>
-                <a:latin typeface="Gill Sans MT" panose="020B0502020104020203" pitchFamily="34" charset="77"/>
-              </a:rPr>
-              <a:t> del día </a:t>
-            </a:r>
-            <a:r>
-              <a:rPr lang="en-US" sz="2800" dirty="0" err="1">
-                <a:solidFill>
-                  <a:srgbClr val="2D3B45"/>
-                </a:solidFill>
-                <a:latin typeface="Gill Sans MT" panose="020B0502020104020203" pitchFamily="34" charset="77"/>
-              </a:rPr>
-              <a:t>correspondiente</a:t>
-            </a:r>
-            <a:r>
-              <a:rPr lang="en-US" sz="2800" dirty="0">
-                <a:solidFill>
-                  <a:srgbClr val="2D3B45"/>
-                </a:solidFill>
-                <a:latin typeface="Gill Sans MT" panose="020B0502020104020203" pitchFamily="34" charset="77"/>
-              </a:rPr>
-              <a:t> (que coincide con </a:t>
-            </a:r>
-            <a:r>
-              <a:rPr lang="en-US" sz="2800" dirty="0" err="1">
-                <a:solidFill>
-                  <a:srgbClr val="2D3B45"/>
-                </a:solidFill>
-                <a:latin typeface="Gill Sans MT" panose="020B0502020104020203" pitchFamily="34" charset="77"/>
-              </a:rPr>
-              <a:t>el</a:t>
-            </a:r>
-            <a:r>
-              <a:rPr lang="en-US" sz="2800" dirty="0">
-                <a:solidFill>
-                  <a:srgbClr val="2D3B45"/>
-                </a:solidFill>
-                <a:latin typeface="Gill Sans MT" panose="020B0502020104020203" pitchFamily="34" charset="77"/>
-              </a:rPr>
-              <a:t> día de la </a:t>
-            </a:r>
-            <a:r>
-              <a:rPr lang="en-US" sz="2800" dirty="0" err="1">
-                <a:solidFill>
-                  <a:srgbClr val="2D3B45"/>
-                </a:solidFill>
-                <a:latin typeface="Gill Sans MT" panose="020B0502020104020203" pitchFamily="34" charset="77"/>
-              </a:rPr>
-              <a:t>entrega</a:t>
-            </a:r>
-            <a:r>
-              <a:rPr lang="en-US" sz="2800" dirty="0">
-                <a:solidFill>
-                  <a:srgbClr val="2D3B45"/>
-                </a:solidFill>
-                <a:latin typeface="Gill Sans MT" panose="020B0502020104020203" pitchFamily="34" charset="77"/>
-              </a:rPr>
-              <a:t> de </a:t>
-            </a:r>
-            <a:r>
-              <a:rPr lang="en-US" sz="2800" dirty="0" err="1">
-                <a:solidFill>
-                  <a:srgbClr val="2D3B45"/>
-                </a:solidFill>
-                <a:latin typeface="Gill Sans MT" panose="020B0502020104020203" pitchFamily="34" charset="77"/>
-              </a:rPr>
-              <a:t>esta</a:t>
-            </a:r>
-            <a:r>
-              <a:rPr lang="en-US" sz="2800" dirty="0">
-                <a:solidFill>
-                  <a:srgbClr val="2D3B45"/>
-                </a:solidFill>
-                <a:latin typeface="Gill Sans MT" panose="020B0502020104020203" pitchFamily="34" charset="77"/>
-              </a:rPr>
-              <a:t> </a:t>
-            </a:r>
-            <a:r>
-              <a:rPr lang="en-US" sz="2800" dirty="0" err="1">
-                <a:solidFill>
-                  <a:srgbClr val="2D3B45"/>
-                </a:solidFill>
-                <a:latin typeface="Gill Sans MT" panose="020B0502020104020203" pitchFamily="34" charset="77"/>
-              </a:rPr>
-              <a:t>actividad</a:t>
-            </a:r>
-            <a:r>
-              <a:rPr lang="en-US" sz="2800" dirty="0">
-                <a:solidFill>
-                  <a:srgbClr val="2D3B45"/>
-                </a:solidFill>
-                <a:latin typeface="Gill Sans MT" panose="020B0502020104020203" pitchFamily="34" charset="77"/>
-              </a:rPr>
-              <a:t>) y que uses la </a:t>
-            </a:r>
-            <a:r>
-              <a:rPr lang="en-US" sz="2800" dirty="0" err="1">
-                <a:solidFill>
-                  <a:srgbClr val="2D3B45"/>
-                </a:solidFill>
-                <a:latin typeface="Gill Sans MT" panose="020B0502020104020203" pitchFamily="34" charset="77"/>
-              </a:rPr>
-              <a:t>instancia</a:t>
-            </a:r>
-            <a:r>
-              <a:rPr lang="en-US" sz="2800" dirty="0">
-                <a:solidFill>
-                  <a:srgbClr val="2D3B45"/>
-                </a:solidFill>
-                <a:latin typeface="Gill Sans MT" panose="020B0502020104020203" pitchFamily="34" charset="77"/>
-              </a:rPr>
-              <a:t> de </a:t>
-            </a:r>
-            <a:r>
-              <a:rPr lang="en-US" sz="2800" dirty="0" err="1">
-                <a:solidFill>
-                  <a:srgbClr val="2D3B45"/>
-                </a:solidFill>
-                <a:latin typeface="Gill Sans MT" panose="020B0502020104020203" pitchFamily="34" charset="77"/>
-              </a:rPr>
-              <a:t>conversación</a:t>
-            </a:r>
-            <a:r>
-              <a:rPr lang="en-US" sz="2800" dirty="0">
-                <a:solidFill>
-                  <a:srgbClr val="2D3B45"/>
-                </a:solidFill>
-                <a:latin typeface="Gill Sans MT" panose="020B0502020104020203" pitchFamily="34" charset="77"/>
-              </a:rPr>
-              <a:t> con </a:t>
-            </a:r>
-            <a:r>
-              <a:rPr lang="en-US" sz="2800" dirty="0" err="1">
-                <a:solidFill>
-                  <a:srgbClr val="2D3B45"/>
-                </a:solidFill>
-                <a:latin typeface="Gill Sans MT" panose="020B0502020104020203" pitchFamily="34" charset="77"/>
-              </a:rPr>
-              <a:t>el</a:t>
-            </a:r>
-            <a:r>
-              <a:rPr lang="en-US" sz="2800" dirty="0">
-                <a:solidFill>
-                  <a:srgbClr val="2D3B45"/>
-                </a:solidFill>
-                <a:latin typeface="Gill Sans MT" panose="020B0502020104020203" pitchFamily="34" charset="77"/>
-              </a:rPr>
-              <a:t> </a:t>
-            </a:r>
-            <a:r>
-              <a:rPr lang="en-US" sz="2800" dirty="0" err="1">
-                <a:solidFill>
-                  <a:srgbClr val="2D3B45"/>
-                </a:solidFill>
-                <a:latin typeface="Gill Sans MT" panose="020B0502020104020203" pitchFamily="34" charset="77"/>
-              </a:rPr>
-              <a:t>profesor</a:t>
-            </a:r>
-            <a:r>
-              <a:rPr lang="en-US" sz="2800" dirty="0">
-                <a:solidFill>
-                  <a:srgbClr val="2D3B45"/>
-                </a:solidFill>
-                <a:latin typeface="Gill Sans MT" panose="020B0502020104020203" pitchFamily="34" charset="77"/>
-              </a:rPr>
-              <a:t> del </a:t>
-            </a:r>
-            <a:r>
-              <a:rPr lang="en-US" sz="2800" dirty="0" err="1">
-                <a:solidFill>
-                  <a:srgbClr val="2D3B45"/>
-                </a:solidFill>
-                <a:latin typeface="Gill Sans MT" panose="020B0502020104020203" pitchFamily="34" charset="77"/>
-              </a:rPr>
-              <a:t>curso</a:t>
-            </a:r>
-            <a:r>
-              <a:rPr lang="en-US" sz="2800" dirty="0">
-                <a:solidFill>
-                  <a:srgbClr val="2D3B45"/>
-                </a:solidFill>
-                <a:latin typeface="Gill Sans MT" panose="020B0502020104020203" pitchFamily="34" charset="77"/>
-              </a:rPr>
-              <a:t> y </a:t>
-            </a:r>
-            <a:r>
-              <a:rPr lang="en-US" sz="2800" dirty="0" err="1">
-                <a:solidFill>
-                  <a:srgbClr val="2D3B45"/>
-                </a:solidFill>
-                <a:latin typeface="Gill Sans MT" panose="020B0502020104020203" pitchFamily="34" charset="77"/>
-              </a:rPr>
-              <a:t>otros</a:t>
-            </a:r>
-            <a:r>
-              <a:rPr lang="en-US" sz="2800" dirty="0">
-                <a:solidFill>
-                  <a:srgbClr val="2D3B45"/>
-                </a:solidFill>
-                <a:latin typeface="Gill Sans MT" panose="020B0502020104020203" pitchFamily="34" charset="77"/>
-              </a:rPr>
-              <a:t> </a:t>
-            </a:r>
-            <a:r>
-              <a:rPr lang="en-US" sz="2800" dirty="0" err="1">
-                <a:solidFill>
-                  <a:srgbClr val="2D3B45"/>
-                </a:solidFill>
-                <a:latin typeface="Gill Sans MT" panose="020B0502020104020203" pitchFamily="34" charset="77"/>
-              </a:rPr>
-              <a:t>estudiantes</a:t>
-            </a:r>
-            <a:r>
-              <a:rPr lang="en-US" sz="2800" dirty="0">
-                <a:solidFill>
-                  <a:srgbClr val="2D3B45"/>
-                </a:solidFill>
-                <a:latin typeface="Gill Sans MT" panose="020B0502020104020203" pitchFamily="34" charset="77"/>
-              </a:rPr>
-              <a:t> para </a:t>
-            </a:r>
-            <a:r>
-              <a:rPr lang="en-US" sz="2800" dirty="0" err="1">
-                <a:solidFill>
-                  <a:srgbClr val="2D3B45"/>
-                </a:solidFill>
-                <a:latin typeface="Gill Sans MT" panose="020B0502020104020203" pitchFamily="34" charset="77"/>
-              </a:rPr>
-              <a:t>aclarar</a:t>
-            </a:r>
-            <a:r>
-              <a:rPr lang="en-US" sz="2800" dirty="0">
-                <a:solidFill>
-                  <a:srgbClr val="2D3B45"/>
-                </a:solidFill>
-                <a:latin typeface="Gill Sans MT" panose="020B0502020104020203" pitchFamily="34" charset="77"/>
-              </a:rPr>
-              <a:t> </a:t>
-            </a:r>
-            <a:r>
-              <a:rPr lang="en-US" sz="2800" dirty="0" err="1">
-                <a:solidFill>
-                  <a:srgbClr val="2D3B45"/>
-                </a:solidFill>
-                <a:latin typeface="Gill Sans MT" panose="020B0502020104020203" pitchFamily="34" charset="77"/>
-              </a:rPr>
-              <a:t>todas</a:t>
-            </a:r>
-            <a:r>
-              <a:rPr lang="en-US" sz="2800" dirty="0">
-                <a:solidFill>
-                  <a:srgbClr val="2D3B45"/>
-                </a:solidFill>
-                <a:latin typeface="Gill Sans MT" panose="020B0502020104020203" pitchFamily="34" charset="77"/>
-              </a:rPr>
-              <a:t> las </a:t>
-            </a:r>
-            <a:r>
-              <a:rPr lang="en-US" sz="2800" dirty="0" err="1">
-                <a:solidFill>
-                  <a:srgbClr val="2D3B45"/>
-                </a:solidFill>
-                <a:latin typeface="Gill Sans MT" panose="020B0502020104020203" pitchFamily="34" charset="77"/>
-              </a:rPr>
-              <a:t>dudas</a:t>
-            </a:r>
-            <a:r>
-              <a:rPr lang="en-US" sz="2800" dirty="0">
-                <a:solidFill>
-                  <a:srgbClr val="2D3B45"/>
-                </a:solidFill>
-                <a:latin typeface="Gill Sans MT" panose="020B0502020104020203" pitchFamily="34" charset="77"/>
-              </a:rPr>
-              <a:t> que </a:t>
-            </a:r>
-            <a:r>
-              <a:rPr lang="en-US" sz="2800" dirty="0" err="1">
-                <a:solidFill>
-                  <a:srgbClr val="2D3B45"/>
-                </a:solidFill>
-                <a:latin typeface="Gill Sans MT" panose="020B0502020104020203" pitchFamily="34" charset="77"/>
-              </a:rPr>
-              <a:t>tengas</a:t>
-            </a:r>
-            <a:r>
-              <a:rPr lang="en-US" sz="2800" dirty="0">
-                <a:solidFill>
-                  <a:srgbClr val="2D3B45"/>
-                </a:solidFill>
-                <a:latin typeface="Gill Sans MT" panose="020B0502020104020203" pitchFamily="34" charset="77"/>
-              </a:rPr>
-              <a:t>.</a:t>
-            </a:r>
-          </a:p>
-          <a:p>
-            <a:pPr algn="l"/>
-            <a:endParaRPr lang="en-US" sz="2800" dirty="0">
-              <a:solidFill>
-                <a:srgbClr val="2D3B45"/>
-              </a:solidFill>
-              <a:latin typeface="Gill Sans MT" panose="020B0502020104020203" pitchFamily="34" charset="77"/>
-            </a:endParaRPr>
-          </a:p>
-          <a:p>
-            <a:pPr algn="l"/>
-            <a:r>
-              <a:rPr lang="en-US" sz="2800" dirty="0">
-                <a:solidFill>
-                  <a:srgbClr val="2D3B45"/>
-                </a:solidFill>
-                <a:latin typeface="Gill Sans MT" panose="020B0502020104020203" pitchFamily="34" charset="77"/>
-              </a:rPr>
-              <a:t>La </a:t>
-            </a:r>
-            <a:r>
-              <a:rPr lang="en-US" sz="2800" dirty="0" err="1">
-                <a:solidFill>
-                  <a:srgbClr val="2D3B45"/>
-                </a:solidFill>
-                <a:latin typeface="Gill Sans MT" panose="020B0502020104020203" pitchFamily="34" charset="77"/>
-              </a:rPr>
-              <a:t>actividad</a:t>
-            </a:r>
-            <a:r>
-              <a:rPr lang="en-US" sz="2800" dirty="0">
-                <a:solidFill>
-                  <a:srgbClr val="2D3B45"/>
-                </a:solidFill>
-                <a:latin typeface="Gill Sans MT" panose="020B0502020104020203" pitchFamily="34" charset="77"/>
-              </a:rPr>
-              <a:t> es individual, </a:t>
-            </a:r>
-            <a:r>
-              <a:rPr lang="en-US" sz="2800" dirty="0" err="1">
-                <a:solidFill>
-                  <a:srgbClr val="2D3B45"/>
-                </a:solidFill>
-                <a:latin typeface="Gill Sans MT" panose="020B0502020104020203" pitchFamily="34" charset="77"/>
-              </a:rPr>
-              <a:t>pero</a:t>
-            </a:r>
-            <a:r>
-              <a:rPr lang="en-US" sz="2800" dirty="0">
-                <a:solidFill>
-                  <a:srgbClr val="2D3B45"/>
-                </a:solidFill>
-                <a:latin typeface="Gill Sans MT" panose="020B0502020104020203" pitchFamily="34" charset="77"/>
-              </a:rPr>
-              <a:t> se </a:t>
-            </a:r>
-            <a:r>
-              <a:rPr lang="en-US" sz="2800" dirty="0" err="1">
-                <a:solidFill>
-                  <a:srgbClr val="2D3B45"/>
-                </a:solidFill>
-                <a:latin typeface="Gill Sans MT" panose="020B0502020104020203" pitchFamily="34" charset="77"/>
-              </a:rPr>
-              <a:t>puede</a:t>
-            </a:r>
-            <a:r>
-              <a:rPr lang="en-US" sz="2800" dirty="0">
-                <a:solidFill>
-                  <a:srgbClr val="2D3B45"/>
-                </a:solidFill>
-                <a:latin typeface="Gill Sans MT" panose="020B0502020104020203" pitchFamily="34" charset="77"/>
-              </a:rPr>
-              <a:t> </a:t>
-            </a:r>
-            <a:r>
-              <a:rPr lang="en-US" sz="2800" dirty="0" err="1">
-                <a:solidFill>
-                  <a:srgbClr val="2D3B45"/>
-                </a:solidFill>
-                <a:latin typeface="Gill Sans MT" panose="020B0502020104020203" pitchFamily="34" charset="77"/>
-              </a:rPr>
-              <a:t>conversar</a:t>
-            </a:r>
-            <a:r>
-              <a:rPr lang="en-US" sz="2800" dirty="0">
-                <a:solidFill>
-                  <a:srgbClr val="2D3B45"/>
-                </a:solidFill>
-                <a:latin typeface="Gill Sans MT" panose="020B0502020104020203" pitchFamily="34" charset="77"/>
-              </a:rPr>
-              <a:t> con </a:t>
-            </a:r>
-            <a:r>
-              <a:rPr lang="en-US" sz="2800" dirty="0" err="1">
-                <a:solidFill>
-                  <a:srgbClr val="2D3B45"/>
-                </a:solidFill>
-                <a:latin typeface="Gill Sans MT" panose="020B0502020104020203" pitchFamily="34" charset="77"/>
-              </a:rPr>
-              <a:t>otros</a:t>
-            </a:r>
-            <a:r>
-              <a:rPr lang="en-US" sz="2800" dirty="0">
-                <a:solidFill>
-                  <a:srgbClr val="2D3B45"/>
-                </a:solidFill>
-                <a:latin typeface="Gill Sans MT" panose="020B0502020104020203" pitchFamily="34" charset="77"/>
-              </a:rPr>
-              <a:t> </a:t>
-            </a:r>
-            <a:r>
-              <a:rPr lang="en-US" sz="2800" dirty="0" err="1">
-                <a:solidFill>
-                  <a:srgbClr val="2D3B45"/>
-                </a:solidFill>
-                <a:latin typeface="Gill Sans MT" panose="020B0502020104020203" pitchFamily="34" charset="77"/>
-              </a:rPr>
-              <a:t>estudiantes</a:t>
-            </a:r>
-            <a:r>
-              <a:rPr lang="en-US" sz="2800" dirty="0">
-                <a:solidFill>
-                  <a:srgbClr val="2D3B45"/>
-                </a:solidFill>
-                <a:latin typeface="Gill Sans MT" panose="020B0502020104020203" pitchFamily="34" charset="77"/>
-              </a:rPr>
-              <a:t> del </a:t>
-            </a:r>
-            <a:r>
-              <a:rPr lang="en-US" sz="2800" dirty="0" err="1">
-                <a:solidFill>
-                  <a:srgbClr val="2D3B45"/>
-                </a:solidFill>
-                <a:latin typeface="Gill Sans MT" panose="020B0502020104020203" pitchFamily="34" charset="77"/>
-              </a:rPr>
-              <a:t>curso</a:t>
-            </a:r>
-            <a:r>
-              <a:rPr lang="en-US" sz="2800" dirty="0">
-                <a:solidFill>
-                  <a:srgbClr val="2D3B45"/>
-                </a:solidFill>
-                <a:latin typeface="Gill Sans MT" panose="020B0502020104020203" pitchFamily="34" charset="77"/>
-              </a:rPr>
-              <a:t>.</a:t>
-            </a:r>
-          </a:p>
-        </p:txBody>
-      </p:sp>
-      <p:sp>
-        <p:nvSpPr>
-          <p:cNvPr id="2" name="Date Placeholder 1">
-            <a:extLst>
-              <a:ext uri="{FF2B5EF4-FFF2-40B4-BE49-F238E27FC236}">
-                <a16:creationId xmlns:a16="http://schemas.microsoft.com/office/drawing/2014/main" id="{1C381D52-23A7-24BE-8A56-7B19C012B3F5}"/>
-              </a:ext>
-            </a:extLst>
-          </p:cNvPr>
-          <p:cNvSpPr>
-            <a:spLocks noGrp="1"/>
-          </p:cNvSpPr>
-          <p:nvPr>
-            <p:ph type="dt" sz="half" idx="10"/>
-          </p:nvPr>
-        </p:nvSpPr>
-        <p:spPr/>
-        <p:txBody>
-          <a:bodyPr/>
-          <a:lstStyle/>
-          <a:p>
-            <a:r>
-              <a:rPr lang="en-US"/>
-              <a:t>(c) D.Mery - PR00</a:t>
-            </a:r>
-            <a:endParaRPr lang="en-CL"/>
-          </a:p>
-        </p:txBody>
-      </p:sp>
-      <p:sp>
-        <p:nvSpPr>
-          <p:cNvPr id="4" name="Slide Number Placeholder 3">
-            <a:extLst>
-              <a:ext uri="{FF2B5EF4-FFF2-40B4-BE49-F238E27FC236}">
-                <a16:creationId xmlns:a16="http://schemas.microsoft.com/office/drawing/2014/main" id="{4561F125-713B-8A0D-E3F0-158AA8AF9EF8}"/>
-              </a:ext>
-            </a:extLst>
-          </p:cNvPr>
-          <p:cNvSpPr>
-            <a:spLocks noGrp="1"/>
-          </p:cNvSpPr>
-          <p:nvPr>
-            <p:ph type="sldNum" sz="quarter" idx="12"/>
-          </p:nvPr>
-        </p:nvSpPr>
-        <p:spPr/>
-        <p:txBody>
-          <a:bodyPr/>
-          <a:lstStyle/>
-          <a:p>
-            <a:fld id="{006AE8E3-C79C-E14F-9140-34B0C7F543F1}" type="slidenum">
-              <a:rPr lang="en-CL" smtClean="0"/>
-              <a:t>21</a:t>
-            </a:fld>
-            <a:endParaRPr lang="en-CL"/>
-          </a:p>
-        </p:txBody>
-      </p:sp>
-    </p:spTree>
-    <p:extLst>
-      <p:ext uri="{BB962C8B-B14F-4D97-AF65-F5344CB8AC3E}">
-        <p14:creationId xmlns:p14="http://schemas.microsoft.com/office/powerpoint/2010/main" val="2890203229"/>
-      </p:ext>
-    </p:extLst>
-  </p:cSld>
-  <p:clrMapOvr>
-    <a:masterClrMapping/>
-  </p:clrMapOvr>
-</p:sld>
-</file>
-
-<file path=ppt/slides/slide22.xml><?xml version="1.0" encoding="utf-8"?>
-<p:sld xmlns:a="http://schemas.openxmlformats.org/drawingml/2006/main" xmlns:r="http://schemas.openxmlformats.org/officeDocument/2006/relationships" xmlns:p="http://schemas.openxmlformats.org/presentationml/2006/main">
-  <p:cSld>
-    <p:spTree>
-      <p:nvGrpSpPr>
-        <p:cNvPr id="1" name=""/>
-        <p:cNvGrpSpPr/>
-        <p:nvPr/>
-      </p:nvGrpSpPr>
-      <p:grpSpPr>
-        <a:xfrm>
-          <a:off x="0" y="0"/>
-          <a:ext cx="0" cy="0"/>
-          <a:chOff x="0" y="0"/>
-          <a:chExt cx="0" cy="0"/>
-        </a:xfrm>
-      </p:grpSpPr>
-      <p:sp>
-        <p:nvSpPr>
-          <p:cNvPr id="3" name="Text Box 2">
-            <a:extLst>
-              <a:ext uri="{FF2B5EF4-FFF2-40B4-BE49-F238E27FC236}">
-                <a16:creationId xmlns:a16="http://schemas.microsoft.com/office/drawing/2014/main" id="{27562974-A8B3-EAFC-1AE1-AF94766A6E9A}"/>
-              </a:ext>
-            </a:extLst>
-          </p:cNvPr>
-          <p:cNvSpPr txBox="1">
-            <a:spLocks noChangeArrowheads="1"/>
-          </p:cNvSpPr>
-          <p:nvPr/>
-        </p:nvSpPr>
-        <p:spPr bwMode="auto">
-          <a:xfrm>
-            <a:off x="1930579" y="1406832"/>
-            <a:ext cx="8490263" cy="584775"/>
-          </a:xfrm>
-          <a:prstGeom prst="rect">
-            <a:avLst/>
-          </a:prstGeom>
-          <a:noFill/>
-          <a:ln w="9525">
-            <a:noFill/>
-            <a:miter lim="800000"/>
-            <a:headEnd/>
-            <a:tailEnd/>
-          </a:ln>
-        </p:spPr>
-        <p:txBody>
-          <a:bodyPr wrap="square">
-            <a:prstTxWarp prst="textNoShape">
-              <a:avLst/>
-            </a:prstTxWarp>
-            <a:spAutoFit/>
-          </a:bodyPr>
-          <a:lstStyle/>
-          <a:p>
-            <a:r>
-              <a:rPr lang="es-ES" sz="3200" b="1" dirty="0">
-                <a:solidFill>
-                  <a:schemeClr val="accent2"/>
-                </a:solidFill>
-                <a:latin typeface="Gill Sans MT" panose="020B0502020104020203" pitchFamily="34" charset="77"/>
-              </a:rPr>
-              <a:t>Tareas</a:t>
-            </a:r>
-            <a:endParaRPr lang="es-CL" b="1" dirty="0">
-              <a:solidFill>
-                <a:schemeClr val="accent2"/>
-              </a:solidFill>
-              <a:latin typeface="Gill Sans MT" panose="020B0502020104020203" pitchFamily="34" charset="77"/>
-            </a:endParaRPr>
-          </a:p>
-        </p:txBody>
-      </p:sp>
-      <p:sp>
-        <p:nvSpPr>
-          <p:cNvPr id="2" name="TextBox 1">
-            <a:extLst>
-              <a:ext uri="{FF2B5EF4-FFF2-40B4-BE49-F238E27FC236}">
-                <a16:creationId xmlns:a16="http://schemas.microsoft.com/office/drawing/2014/main" id="{616007C7-8C86-9FD9-A0E4-4740C101329D}"/>
-              </a:ext>
-            </a:extLst>
-          </p:cNvPr>
-          <p:cNvSpPr txBox="1"/>
-          <p:nvPr/>
-        </p:nvSpPr>
-        <p:spPr>
-          <a:xfrm>
-            <a:off x="1930579" y="2404180"/>
-            <a:ext cx="8490263" cy="3046988"/>
-          </a:xfrm>
-          <a:prstGeom prst="rect">
-            <a:avLst/>
-          </a:prstGeom>
-          <a:noFill/>
-        </p:spPr>
-        <p:txBody>
-          <a:bodyPr wrap="square" rtlCol="0">
-            <a:spAutoFit/>
-          </a:bodyPr>
-          <a:lstStyle/>
-          <a:p>
-            <a:r>
-              <a:rPr lang="es-ES_tradnl" sz="2400" dirty="0">
-                <a:latin typeface="Gill Sans MT" panose="020B0502020104020203" pitchFamily="34" charset="77"/>
-              </a:rPr>
-              <a:t>Son tres tareas</a:t>
-            </a:r>
-          </a:p>
-          <a:p>
-            <a:endParaRPr lang="es-ES_tradnl" sz="2400" dirty="0">
-              <a:latin typeface="Gill Sans MT" panose="020B0502020104020203" pitchFamily="34" charset="77"/>
-            </a:endParaRPr>
-          </a:p>
-          <a:p>
-            <a:r>
-              <a:rPr lang="es-ES_tradnl" sz="2400" dirty="0">
-                <a:latin typeface="Gill Sans MT" panose="020B0502020104020203" pitchFamily="34" charset="77"/>
-              </a:rPr>
-              <a:t>La tarea consiste en un código desarrollado en Python bajo la plataforma de Google </a:t>
-            </a:r>
-            <a:r>
-              <a:rPr lang="es-ES_tradnl" sz="2400" dirty="0" err="1">
-                <a:latin typeface="Gill Sans MT" panose="020B0502020104020203" pitchFamily="34" charset="77"/>
-              </a:rPr>
-              <a:t>Colab</a:t>
-            </a:r>
-            <a:r>
-              <a:rPr lang="es-ES_tradnl" sz="2400" dirty="0">
-                <a:latin typeface="Gill Sans MT" panose="020B0502020104020203" pitchFamily="34" charset="77"/>
-              </a:rPr>
-              <a:t>, y un informe de una página (en Times New </a:t>
-            </a:r>
-            <a:r>
-              <a:rPr lang="es-ES_tradnl" sz="2400" dirty="0" err="1">
-                <a:latin typeface="Gill Sans MT" panose="020B0502020104020203" pitchFamily="34" charset="77"/>
-              </a:rPr>
-              <a:t>Roman</a:t>
-            </a:r>
-            <a:r>
-              <a:rPr lang="es-ES_tradnl" sz="2400" dirty="0">
-                <a:latin typeface="Gill Sans MT" panose="020B0502020104020203" pitchFamily="34" charset="77"/>
-              </a:rPr>
-              <a:t>, tamaño 12 espacio simple y márgenes de no menos de 2.5cm). Si el informe tiene más de una página, sólo se revisará la primera página. Se puede aprovechar los comentarios en el código de </a:t>
-            </a:r>
-            <a:r>
-              <a:rPr lang="es-ES_tradnl" sz="2400" dirty="0" err="1">
-                <a:latin typeface="Gill Sans MT" panose="020B0502020104020203" pitchFamily="34" charset="77"/>
-              </a:rPr>
-              <a:t>Colab</a:t>
-            </a:r>
-            <a:r>
-              <a:rPr lang="es-ES_tradnl" sz="2400" dirty="0">
-                <a:latin typeface="Gill Sans MT" panose="020B0502020104020203" pitchFamily="34" charset="77"/>
-              </a:rPr>
-              <a:t> para hacer explicaciones más detalladas.</a:t>
-            </a:r>
-          </a:p>
-        </p:txBody>
-      </p:sp>
-      <p:sp>
-        <p:nvSpPr>
-          <p:cNvPr id="4" name="Date Placeholder 3">
-            <a:extLst>
-              <a:ext uri="{FF2B5EF4-FFF2-40B4-BE49-F238E27FC236}">
-                <a16:creationId xmlns:a16="http://schemas.microsoft.com/office/drawing/2014/main" id="{92FCDC0E-7F58-D883-5D17-678FF37ED683}"/>
-              </a:ext>
-            </a:extLst>
-          </p:cNvPr>
-          <p:cNvSpPr>
-            <a:spLocks noGrp="1"/>
-          </p:cNvSpPr>
-          <p:nvPr>
-            <p:ph type="dt" sz="half" idx="10"/>
-          </p:nvPr>
-        </p:nvSpPr>
-        <p:spPr/>
-        <p:txBody>
-          <a:bodyPr/>
-          <a:lstStyle/>
-          <a:p>
-            <a:r>
-              <a:rPr lang="en-US"/>
-              <a:t>(c) D.Mery - PR00</a:t>
-            </a:r>
-            <a:endParaRPr lang="en-CL"/>
-          </a:p>
-        </p:txBody>
-      </p:sp>
-      <p:sp>
-        <p:nvSpPr>
-          <p:cNvPr id="5" name="Slide Number Placeholder 4">
-            <a:extLst>
-              <a:ext uri="{FF2B5EF4-FFF2-40B4-BE49-F238E27FC236}">
-                <a16:creationId xmlns:a16="http://schemas.microsoft.com/office/drawing/2014/main" id="{C4EFCC52-2089-52D7-4D83-F3A4B0EF9115}"/>
-              </a:ext>
-            </a:extLst>
-          </p:cNvPr>
-          <p:cNvSpPr>
-            <a:spLocks noGrp="1"/>
-          </p:cNvSpPr>
-          <p:nvPr>
-            <p:ph type="sldNum" sz="quarter" idx="12"/>
-          </p:nvPr>
-        </p:nvSpPr>
-        <p:spPr/>
-        <p:txBody>
-          <a:bodyPr/>
-          <a:lstStyle/>
-          <a:p>
-            <a:fld id="{006AE8E3-C79C-E14F-9140-34B0C7F543F1}" type="slidenum">
-              <a:rPr lang="en-CL" smtClean="0"/>
-              <a:t>22</a:t>
-            </a:fld>
-            <a:endParaRPr lang="en-CL"/>
-          </a:p>
-        </p:txBody>
-      </p:sp>
-    </p:spTree>
-    <p:extLst>
-      <p:ext uri="{BB962C8B-B14F-4D97-AF65-F5344CB8AC3E}">
-        <p14:creationId xmlns:p14="http://schemas.microsoft.com/office/powerpoint/2010/main" val="3492849868"/>
-      </p:ext>
-    </p:extLst>
-  </p:cSld>
-  <p:clrMapOvr>
-    <a:masterClrMapping/>
-  </p:clrMapOvr>
-  <p:timing>
-    <p:tnLst>
-      <p:par>
-        <p:cTn id="1" dur="indefinite" restart="never" nodeType="tmRoot">
-          <p:childTnLst>
-            <p:seq concurrent="1" nextAc="seek">
-              <p:cTn id="2" dur="indefinite" nodeType="mainSeq">
-                <p:childTnLst>
-                  <p:par>
-                    <p:cTn id="3" fill="hold">
-                      <p:stCondLst>
-                        <p:cond delay="indefinite"/>
-                      </p:stCondLst>
-                      <p:childTnLst>
-                        <p:par>
-                          <p:cTn id="4" fill="hold">
-                            <p:stCondLst>
-                              <p:cond delay="0"/>
-                            </p:stCondLst>
-                            <p:childTnLst>
-                              <p:par>
-                                <p:cTn id="5" presetID="1" presetClass="entr" presetSubtype="0" fill="hold" grpId="0" nodeType="clickEffect">
-                                  <p:stCondLst>
-                                    <p:cond delay="0"/>
-                                  </p:stCondLst>
-                                  <p:childTnLst>
-                                    <p:set>
-                                      <p:cBhvr>
-                                        <p:cTn id="6" dur="1" fill="hold">
-                                          <p:stCondLst>
-                                            <p:cond delay="0"/>
-                                          </p:stCondLst>
-                                        </p:cTn>
-                                        <p:tgtEl>
-                                          <p:spTgt spid="2">
-                                            <p:txEl>
-                                              <p:pRg st="0" end="0"/>
-                                            </p:txEl>
-                                          </p:spTgt>
-                                        </p:tgtEl>
-                                        <p:attrNameLst>
-                                          <p:attrName>style.visibility</p:attrName>
-                                        </p:attrNameLst>
-                                      </p:cBhvr>
-                                      <p:to>
-                                        <p:strVal val="visible"/>
-                                      </p:to>
-                                    </p:set>
-                                  </p:childTnLst>
-                                </p:cTn>
-                              </p:par>
-                            </p:childTnLst>
-                          </p:cTn>
-                        </p:par>
-                      </p:childTnLst>
-                    </p:cTn>
-                  </p:par>
-                  <p:par>
-                    <p:cTn id="7" fill="hold">
-                      <p:stCondLst>
-                        <p:cond delay="indefinite"/>
-                      </p:stCondLst>
-                      <p:childTnLst>
-                        <p:par>
-                          <p:cTn id="8" fill="hold">
-                            <p:stCondLst>
-                              <p:cond delay="0"/>
-                            </p:stCondLst>
-                            <p:childTnLst>
-                              <p:par>
-                                <p:cTn id="9" presetID="1" presetClass="entr" presetSubtype="0" fill="hold" grpId="0" nodeType="clickEffect">
-                                  <p:stCondLst>
-                                    <p:cond delay="0"/>
-                                  </p:stCondLst>
-                                  <p:childTnLst>
-                                    <p:set>
-                                      <p:cBhvr>
-                                        <p:cTn id="10" dur="1" fill="hold">
-                                          <p:stCondLst>
-                                            <p:cond delay="0"/>
-                                          </p:stCondLst>
-                                        </p:cTn>
-                                        <p:tgtEl>
-                                          <p:spTgt spid="2">
-                                            <p:txEl>
-                                              <p:pRg st="2" end="2"/>
-                                            </p:txEl>
-                                          </p:spTgt>
-                                        </p:tgtEl>
-                                        <p:attrNameLst>
-                                          <p:attrName>style.visibility</p:attrName>
-                                        </p:attrNameLst>
-                                      </p:cBhvr>
-                                      <p:to>
-                                        <p:strVal val="visible"/>
-                                      </p:to>
-                                    </p:set>
-                                  </p:childTnLst>
-                                </p:cTn>
-                              </p:par>
-                            </p:childTnLst>
-                          </p:cTn>
-                        </p:par>
-                      </p:childTnLst>
-                    </p:cTn>
-                  </p:par>
-                </p:childTnLst>
-              </p:cTn>
-              <p:prevCondLst>
-                <p:cond evt="onPrev" delay="0">
-                  <p:tgtEl>
-                    <p:sldTgt/>
-                  </p:tgtEl>
-                </p:cond>
-              </p:prevCondLst>
-              <p:nextCondLst>
-                <p:cond evt="onNext" delay="0">
-                  <p:tgtEl>
-                    <p:sldTgt/>
-                  </p:tgtEl>
-                </p:cond>
-              </p:nextCondLst>
-            </p:seq>
-          </p:childTnLst>
-        </p:cTn>
-      </p:par>
-    </p:tnLst>
-    <p:bldLst>
-      <p:bldP spid="2" grpId="0" build="p"/>
-    </p:bldLst>
-  </p:timing>
-</p:sld>
-</file>
-
-<file path=ppt/slides/slide23.xml><?xml version="1.0" encoding="utf-8"?>
-<p:sld xmlns:a="http://schemas.openxmlformats.org/drawingml/2006/main" xmlns:r="http://schemas.openxmlformats.org/officeDocument/2006/relationships" xmlns:p="http://schemas.openxmlformats.org/presentationml/2006/main">
-  <p:cSld>
-    <p:spTree>
-      <p:nvGrpSpPr>
-        <p:cNvPr id="1" name="">
-          <a:extLst>
-            <a:ext uri="{FF2B5EF4-FFF2-40B4-BE49-F238E27FC236}">
-              <a16:creationId xmlns:a16="http://schemas.microsoft.com/office/drawing/2014/main" id="{D58397E9-CF53-E304-FC05-5CAF8044640A}"/>
-            </a:ext>
-          </a:extLst>
-        </p:cNvPr>
-        <p:cNvGrpSpPr/>
-        <p:nvPr/>
-      </p:nvGrpSpPr>
-      <p:grpSpPr>
-        <a:xfrm>
-          <a:off x="0" y="0"/>
-          <a:ext cx="0" cy="0"/>
-          <a:chOff x="0" y="0"/>
-          <a:chExt cx="0" cy="0"/>
-        </a:xfrm>
-      </p:grpSpPr>
-      <p:sp>
-        <p:nvSpPr>
-          <p:cNvPr id="5" name="TextBox 4">
-            <a:extLst>
-              <a:ext uri="{FF2B5EF4-FFF2-40B4-BE49-F238E27FC236}">
-                <a16:creationId xmlns:a16="http://schemas.microsoft.com/office/drawing/2014/main" id="{32AD3A43-1C16-02F3-5EA8-CE56DFA14651}"/>
-              </a:ext>
-            </a:extLst>
-          </p:cNvPr>
-          <p:cNvSpPr txBox="1"/>
-          <p:nvPr/>
-        </p:nvSpPr>
-        <p:spPr>
-          <a:xfrm>
-            <a:off x="1568067" y="2594126"/>
-            <a:ext cx="9055866" cy="3416320"/>
-          </a:xfrm>
-          <a:prstGeom prst="rect">
-            <a:avLst/>
-          </a:prstGeom>
-          <a:noFill/>
-        </p:spPr>
-        <p:txBody>
-          <a:bodyPr wrap="square" rtlCol="0">
-            <a:spAutoFit/>
-          </a:bodyPr>
-          <a:lstStyle/>
-          <a:p>
-            <a:pPr marL="342900" indent="-342900">
-              <a:buFont typeface="Arial" panose="020B0604020202020204" pitchFamily="34" charset="0"/>
-              <a:buChar char="•"/>
-            </a:pPr>
-            <a:r>
-              <a:rPr lang="es-ES_tradnl" sz="2400" dirty="0">
-                <a:latin typeface="Gill Sans MT" panose="020B0502020104020203" pitchFamily="34" charset="77"/>
-              </a:rPr>
-              <a:t>La fecha y hora están definidos por la DIPRE.</a:t>
-            </a:r>
-          </a:p>
-          <a:p>
-            <a:pPr marL="342900" indent="-342900">
-              <a:buFont typeface="Arial" panose="020B0604020202020204" pitchFamily="34" charset="0"/>
-              <a:buChar char="•"/>
-            </a:pPr>
-            <a:r>
-              <a:rPr lang="es-ES_tradnl" sz="2400" dirty="0">
-                <a:latin typeface="Gill Sans MT" panose="020B0502020104020203" pitchFamily="34" charset="77"/>
-              </a:rPr>
-              <a:t>No hay eximición.</a:t>
-            </a:r>
-          </a:p>
-          <a:p>
-            <a:pPr marL="342900" indent="-342900">
-              <a:buFont typeface="Arial" panose="020B0604020202020204" pitchFamily="34" charset="0"/>
-              <a:buChar char="•"/>
-            </a:pPr>
-            <a:r>
-              <a:rPr lang="es-ES_tradnl" sz="2400" dirty="0">
-                <a:latin typeface="Gill Sans MT" panose="020B0502020104020203" pitchFamily="34" charset="77"/>
-              </a:rPr>
-              <a:t>Se podrá llevar un cuaderno de no más de 100 hojas con apuntes escritos a mano de la materia del curso (no se acepta impresiones, fotocopias, hojas sueltas, ni ningún tipo de reproducción, sólo un cuaderno escrito a mano).</a:t>
-            </a:r>
-          </a:p>
-          <a:p>
-            <a:pPr marL="342900" indent="-342900">
-              <a:buFont typeface="Arial" panose="020B0604020202020204" pitchFamily="34" charset="0"/>
-              <a:buChar char="•"/>
-            </a:pPr>
-            <a:r>
-              <a:rPr lang="es-ES_tradnl" sz="2400" dirty="0">
-                <a:latin typeface="Gill Sans MT" panose="020B0502020104020203" pitchFamily="34" charset="77"/>
-              </a:rPr>
-              <a:t>En el examen no se admite ningún tipo de dispositivo electrónico.</a:t>
-            </a:r>
-          </a:p>
-          <a:p>
-            <a:pPr marL="342900" indent="-342900">
-              <a:buFont typeface="Arial" panose="020B0604020202020204" pitchFamily="34" charset="0"/>
-              <a:buChar char="•"/>
-            </a:pPr>
-            <a:endParaRPr lang="es-ES_tradnl" sz="2400" dirty="0">
-              <a:latin typeface="Gill Sans MT" panose="020B0502020104020203" pitchFamily="34" charset="77"/>
-            </a:endParaRPr>
-          </a:p>
-          <a:p>
-            <a:pPr marL="342900" indent="-342900">
-              <a:buFont typeface="Arial" panose="020B0604020202020204" pitchFamily="34" charset="0"/>
-              <a:buChar char="•"/>
-            </a:pPr>
-            <a:endParaRPr lang="es-ES_tradnl" sz="2400" dirty="0">
-              <a:latin typeface="Gill Sans MT" panose="020B0502020104020203" pitchFamily="34" charset="77"/>
-            </a:endParaRPr>
-          </a:p>
-        </p:txBody>
-      </p:sp>
-      <p:sp>
-        <p:nvSpPr>
-          <p:cNvPr id="3" name="Text Box 2">
-            <a:extLst>
-              <a:ext uri="{FF2B5EF4-FFF2-40B4-BE49-F238E27FC236}">
-                <a16:creationId xmlns:a16="http://schemas.microsoft.com/office/drawing/2014/main" id="{0F48AB43-F72A-3CA9-0FBE-60FC1DD7FD8D}"/>
-              </a:ext>
-            </a:extLst>
-          </p:cNvPr>
-          <p:cNvSpPr txBox="1">
-            <a:spLocks noChangeArrowheads="1"/>
-          </p:cNvSpPr>
-          <p:nvPr/>
-        </p:nvSpPr>
-        <p:spPr bwMode="auto">
-          <a:xfrm>
-            <a:off x="1927609" y="1263397"/>
-            <a:ext cx="8490263" cy="584775"/>
-          </a:xfrm>
-          <a:prstGeom prst="rect">
-            <a:avLst/>
-          </a:prstGeom>
-          <a:noFill/>
-          <a:ln w="9525">
-            <a:noFill/>
-            <a:miter lim="800000"/>
-            <a:headEnd/>
-            <a:tailEnd/>
-          </a:ln>
-        </p:spPr>
-        <p:txBody>
-          <a:bodyPr wrap="square">
-            <a:prstTxWarp prst="textNoShape">
-              <a:avLst/>
-            </a:prstTxWarp>
-            <a:spAutoFit/>
-          </a:bodyPr>
-          <a:lstStyle/>
-          <a:p>
-            <a:r>
-              <a:rPr lang="es-ES" sz="3200" b="1" dirty="0">
-                <a:solidFill>
-                  <a:schemeClr val="accent2"/>
-                </a:solidFill>
-                <a:latin typeface="Gill Sans MT" panose="020B0502020104020203" pitchFamily="34" charset="77"/>
-              </a:rPr>
-              <a:t>Interrogaciones</a:t>
-            </a:r>
-            <a:endParaRPr lang="es-CL" b="1" dirty="0">
-              <a:solidFill>
-                <a:schemeClr val="accent2"/>
-              </a:solidFill>
-              <a:latin typeface="Gill Sans MT" panose="020B0502020104020203" pitchFamily="34" charset="77"/>
-            </a:endParaRPr>
-          </a:p>
-        </p:txBody>
-      </p:sp>
-      <p:sp>
-        <p:nvSpPr>
-          <p:cNvPr id="2" name="Date Placeholder 1">
-            <a:extLst>
-              <a:ext uri="{FF2B5EF4-FFF2-40B4-BE49-F238E27FC236}">
-                <a16:creationId xmlns:a16="http://schemas.microsoft.com/office/drawing/2014/main" id="{21BE5DC2-DAC8-1F30-8F5C-AD9CE91E984B}"/>
-              </a:ext>
-            </a:extLst>
-          </p:cNvPr>
-          <p:cNvSpPr>
-            <a:spLocks noGrp="1"/>
-          </p:cNvSpPr>
-          <p:nvPr>
-            <p:ph type="dt" sz="half" idx="10"/>
-          </p:nvPr>
-        </p:nvSpPr>
-        <p:spPr/>
-        <p:txBody>
-          <a:bodyPr/>
-          <a:lstStyle/>
-          <a:p>
-            <a:r>
-              <a:rPr lang="en-US"/>
-              <a:t>(c) D.Mery - PR00</a:t>
-            </a:r>
-            <a:endParaRPr lang="en-CL"/>
-          </a:p>
-        </p:txBody>
-      </p:sp>
-      <p:sp>
-        <p:nvSpPr>
-          <p:cNvPr id="4" name="Slide Number Placeholder 3">
-            <a:extLst>
-              <a:ext uri="{FF2B5EF4-FFF2-40B4-BE49-F238E27FC236}">
-                <a16:creationId xmlns:a16="http://schemas.microsoft.com/office/drawing/2014/main" id="{A10936B8-4672-5A62-59FA-98704ED79BA9}"/>
-              </a:ext>
-            </a:extLst>
-          </p:cNvPr>
-          <p:cNvSpPr>
-            <a:spLocks noGrp="1"/>
-          </p:cNvSpPr>
-          <p:nvPr>
-            <p:ph type="sldNum" sz="quarter" idx="12"/>
-          </p:nvPr>
-        </p:nvSpPr>
-        <p:spPr/>
-        <p:txBody>
-          <a:bodyPr/>
-          <a:lstStyle/>
-          <a:p>
-            <a:fld id="{006AE8E3-C79C-E14F-9140-34B0C7F543F1}" type="slidenum">
-              <a:rPr lang="en-CL" smtClean="0"/>
-              <a:t>23</a:t>
-            </a:fld>
-            <a:endParaRPr lang="en-CL"/>
-          </a:p>
-        </p:txBody>
-      </p:sp>
-    </p:spTree>
-    <p:extLst>
-      <p:ext uri="{BB962C8B-B14F-4D97-AF65-F5344CB8AC3E}">
-        <p14:creationId xmlns:p14="http://schemas.microsoft.com/office/powerpoint/2010/main" val="2057375521"/>
-      </p:ext>
-    </p:extLst>
-  </p:cSld>
-  <p:clrMapOvr>
-    <a:masterClrMapping/>
-  </p:clrMapOvr>
-  <p:timing>
-    <p:tnLst>
-      <p:par>
-        <p:cTn id="1" dur="indefinite" restart="never" nodeType="tmRoot">
-          <p:childTnLst>
-            <p:seq concurrent="1" nextAc="seek">
-              <p:cTn id="2" dur="indefinite" nodeType="mainSeq">
-                <p:childTnLst>
-                  <p:par>
-                    <p:cTn id="3" fill="hold">
-                      <p:stCondLst>
-                        <p:cond delay="indefinite"/>
-                      </p:stCondLst>
-                      <p:childTnLst>
-                        <p:par>
-                          <p:cTn id="4" fill="hold">
-                            <p:stCondLst>
-                              <p:cond delay="0"/>
-                            </p:stCondLst>
-                            <p:childTnLst>
-                              <p:par>
-                                <p:cTn id="5" presetID="1" presetClass="entr" presetSubtype="0" fill="hold" grpId="0" nodeType="clickEffect">
-                                  <p:stCondLst>
-                                    <p:cond delay="0"/>
-                                  </p:stCondLst>
-                                  <p:childTnLst>
-                                    <p:set>
-                                      <p:cBhvr>
-                                        <p:cTn id="6" dur="1" fill="hold">
-                                          <p:stCondLst>
-                                            <p:cond delay="0"/>
-                                          </p:stCondLst>
-                                        </p:cTn>
-                                        <p:tgtEl>
-                                          <p:spTgt spid="5">
-                                            <p:txEl>
-                                              <p:pRg st="0" end="0"/>
-                                            </p:txEl>
-                                          </p:spTgt>
-                                        </p:tgtEl>
-                                        <p:attrNameLst>
-                                          <p:attrName>style.visibility</p:attrName>
-                                        </p:attrNameLst>
-                                      </p:cBhvr>
-                                      <p:to>
-                                        <p:strVal val="visible"/>
-                                      </p:to>
-                                    </p:set>
-                                  </p:childTnLst>
-                                </p:cTn>
-                              </p:par>
-                            </p:childTnLst>
-                          </p:cTn>
-                        </p:par>
-                      </p:childTnLst>
-                    </p:cTn>
-                  </p:par>
-                  <p:par>
-                    <p:cTn id="7" fill="hold">
-                      <p:stCondLst>
-                        <p:cond delay="indefinite"/>
-                      </p:stCondLst>
-                      <p:childTnLst>
-                        <p:par>
-                          <p:cTn id="8" fill="hold">
-                            <p:stCondLst>
-                              <p:cond delay="0"/>
-                            </p:stCondLst>
-                            <p:childTnLst>
-                              <p:par>
-                                <p:cTn id="9" presetID="1" presetClass="entr" presetSubtype="0" fill="hold" grpId="0" nodeType="clickEffect">
-                                  <p:stCondLst>
-                                    <p:cond delay="0"/>
-                                  </p:stCondLst>
-                                  <p:childTnLst>
-                                    <p:set>
-                                      <p:cBhvr>
-                                        <p:cTn id="10" dur="1" fill="hold">
-                                          <p:stCondLst>
-                                            <p:cond delay="0"/>
-                                          </p:stCondLst>
-                                        </p:cTn>
-                                        <p:tgtEl>
-                                          <p:spTgt spid="5">
-                                            <p:txEl>
-                                              <p:pRg st="1" end="1"/>
-                                            </p:txEl>
-                                          </p:spTgt>
-                                        </p:tgtEl>
-                                        <p:attrNameLst>
-                                          <p:attrName>style.visibility</p:attrName>
-                                        </p:attrNameLst>
-                                      </p:cBhvr>
-                                      <p:to>
-                                        <p:strVal val="visible"/>
-                                      </p:to>
-                                    </p:set>
-                                  </p:childTnLst>
-                                </p:cTn>
-                              </p:par>
-                            </p:childTnLst>
-                          </p:cTn>
-                        </p:par>
-                      </p:childTnLst>
-                    </p:cTn>
-                  </p:par>
-                  <p:par>
-                    <p:cTn id="11" fill="hold">
-                      <p:stCondLst>
-                        <p:cond delay="indefinite"/>
-                      </p:stCondLst>
-                      <p:childTnLst>
-                        <p:par>
-                          <p:cTn id="12" fill="hold">
-                            <p:stCondLst>
-                              <p:cond delay="0"/>
-                            </p:stCondLst>
-                            <p:childTnLst>
-                              <p:par>
-                                <p:cTn id="13" presetID="1" presetClass="entr" presetSubtype="0" fill="hold" grpId="0" nodeType="clickEffect">
-                                  <p:stCondLst>
-                                    <p:cond delay="0"/>
-                                  </p:stCondLst>
-                                  <p:childTnLst>
-                                    <p:set>
-                                      <p:cBhvr>
-                                        <p:cTn id="14" dur="1" fill="hold">
-                                          <p:stCondLst>
-                                            <p:cond delay="0"/>
-                                          </p:stCondLst>
-                                        </p:cTn>
-                                        <p:tgtEl>
-                                          <p:spTgt spid="5">
-                                            <p:txEl>
-                                              <p:pRg st="2" end="2"/>
-                                            </p:txEl>
-                                          </p:spTgt>
-                                        </p:tgtEl>
-                                        <p:attrNameLst>
-                                          <p:attrName>style.visibility</p:attrName>
-                                        </p:attrNameLst>
-                                      </p:cBhvr>
-                                      <p:to>
-                                        <p:strVal val="visible"/>
-                                      </p:to>
-                                    </p:set>
-                                  </p:childTnLst>
-                                </p:cTn>
-                              </p:par>
-                            </p:childTnLst>
-                          </p:cTn>
-                        </p:par>
-                      </p:childTnLst>
-                    </p:cTn>
-                  </p:par>
-                  <p:par>
-                    <p:cTn id="15" fill="hold">
-                      <p:stCondLst>
-                        <p:cond delay="indefinite"/>
-                      </p:stCondLst>
-                      <p:childTnLst>
-                        <p:par>
-                          <p:cTn id="16" fill="hold">
-                            <p:stCondLst>
-                              <p:cond delay="0"/>
-                            </p:stCondLst>
-                            <p:childTnLst>
-                              <p:par>
-                                <p:cTn id="17" presetID="1" presetClass="entr" presetSubtype="0" fill="hold" grpId="0" nodeType="clickEffect">
-                                  <p:stCondLst>
-                                    <p:cond delay="0"/>
-                                  </p:stCondLst>
-                                  <p:childTnLst>
-                                    <p:set>
-                                      <p:cBhvr>
-                                        <p:cTn id="18" dur="1" fill="hold">
-                                          <p:stCondLst>
-                                            <p:cond delay="0"/>
-                                          </p:stCondLst>
-                                        </p:cTn>
-                                        <p:tgtEl>
-                                          <p:spTgt spid="5">
-                                            <p:txEl>
-                                              <p:pRg st="3" end="3"/>
-                                            </p:txEl>
-                                          </p:spTgt>
-                                        </p:tgtEl>
-                                        <p:attrNameLst>
-                                          <p:attrName>style.visibility</p:attrName>
-                                        </p:attrNameLst>
-                                      </p:cBhvr>
-                                      <p:to>
-                                        <p:strVal val="visible"/>
-                                      </p:to>
-                                    </p:set>
-                                  </p:childTnLst>
-                                </p:cTn>
-                              </p:par>
-                            </p:childTnLst>
-                          </p:cTn>
-                        </p:par>
-                      </p:childTnLst>
-                    </p:cTn>
-                  </p:par>
-                </p:childTnLst>
-              </p:cTn>
-              <p:prevCondLst>
-                <p:cond evt="onPrev" delay="0">
-                  <p:tgtEl>
-                    <p:sldTgt/>
-                  </p:tgtEl>
-                </p:cond>
-              </p:prevCondLst>
-              <p:nextCondLst>
-                <p:cond evt="onNext" delay="0">
-                  <p:tgtEl>
-                    <p:sldTgt/>
-                  </p:tgtEl>
-                </p:cond>
-              </p:nextCondLst>
-            </p:seq>
-          </p:childTnLst>
-        </p:cTn>
-      </p:par>
-    </p:tnLst>
-    <p:bldLst>
-      <p:bldP spid="5" grpId="0" build="p"/>
-    </p:bldLst>
-  </p:timing>
-</p:sld>
-</file>
-
-<file path=ppt/slides/slide24.xml><?xml version="1.0" encoding="utf-8"?>
-<p:sld xmlns:a="http://schemas.openxmlformats.org/drawingml/2006/main" xmlns:r="http://schemas.openxmlformats.org/officeDocument/2006/relationships" xmlns:p="http://schemas.openxmlformats.org/presentationml/2006/main">
-  <p:cSld>
-    <p:spTree>
-      <p:nvGrpSpPr>
-        <p:cNvPr id="1" name="">
-          <a:extLst>
-            <a:ext uri="{FF2B5EF4-FFF2-40B4-BE49-F238E27FC236}">
-              <a16:creationId xmlns:a16="http://schemas.microsoft.com/office/drawing/2014/main" id="{3368F736-9CDA-1B18-D2F0-533CCBCE11DE}"/>
-            </a:ext>
-          </a:extLst>
-        </p:cNvPr>
-        <p:cNvGrpSpPr/>
-        <p:nvPr/>
-      </p:nvGrpSpPr>
-      <p:grpSpPr>
-        <a:xfrm>
-          <a:off x="0" y="0"/>
-          <a:ext cx="0" cy="0"/>
-          <a:chOff x="0" y="0"/>
-          <a:chExt cx="0" cy="0"/>
-        </a:xfrm>
-      </p:grpSpPr>
-      <p:sp>
-        <p:nvSpPr>
-          <p:cNvPr id="5" name="TextBox 4">
-            <a:extLst>
-              <a:ext uri="{FF2B5EF4-FFF2-40B4-BE49-F238E27FC236}">
-                <a16:creationId xmlns:a16="http://schemas.microsoft.com/office/drawing/2014/main" id="{3583BA5D-B9F5-07E3-F7F6-AF91E8689142}"/>
-              </a:ext>
-            </a:extLst>
-          </p:cNvPr>
-          <p:cNvSpPr txBox="1"/>
-          <p:nvPr/>
-        </p:nvSpPr>
-        <p:spPr>
-          <a:xfrm>
-            <a:off x="1612134" y="1643867"/>
-            <a:ext cx="9055866" cy="4524315"/>
-          </a:xfrm>
-          <a:prstGeom prst="rect">
-            <a:avLst/>
-          </a:prstGeom>
-          <a:noFill/>
-        </p:spPr>
-        <p:txBody>
-          <a:bodyPr wrap="square" rtlCol="0">
-            <a:spAutoFit/>
-          </a:bodyPr>
-          <a:lstStyle/>
-          <a:p>
-            <a:pPr marL="342900" indent="-342900">
-              <a:buFont typeface="Arial" panose="020B0604020202020204" pitchFamily="34" charset="0"/>
-              <a:buChar char="•"/>
-            </a:pPr>
-            <a:r>
-              <a:rPr lang="es-ES_tradnl" sz="2400" dirty="0">
-                <a:latin typeface="Gill Sans MT" panose="020B0502020104020203" pitchFamily="34" charset="77"/>
-              </a:rPr>
-              <a:t>En la semana de exámenes, habrá un Examen Final INDIVIDUAL que entra toda la materia del curso.</a:t>
-            </a:r>
-          </a:p>
-          <a:p>
-            <a:pPr marL="342900" indent="-342900">
-              <a:buFont typeface="Arial" panose="020B0604020202020204" pitchFamily="34" charset="0"/>
-              <a:buChar char="•"/>
-            </a:pPr>
-            <a:r>
-              <a:rPr lang="es-ES_tradnl" sz="2400" dirty="0">
-                <a:latin typeface="Gill Sans MT" panose="020B0502020104020203" pitchFamily="34" charset="77"/>
-              </a:rPr>
-              <a:t>La fecha y hora están definidos por la DIPRE.</a:t>
-            </a:r>
-          </a:p>
-          <a:p>
-            <a:pPr marL="342900" indent="-342900">
-              <a:buFont typeface="Arial" panose="020B0604020202020204" pitchFamily="34" charset="0"/>
-              <a:buChar char="•"/>
-            </a:pPr>
-            <a:r>
-              <a:rPr lang="es-ES_tradnl" sz="2400" dirty="0">
-                <a:latin typeface="Gill Sans MT" panose="020B0502020104020203" pitchFamily="34" charset="77"/>
-              </a:rPr>
-              <a:t>No hay eximición.</a:t>
-            </a:r>
-          </a:p>
-          <a:p>
-            <a:pPr marL="342900" indent="-342900">
-              <a:buFont typeface="Arial" panose="020B0604020202020204" pitchFamily="34" charset="0"/>
-              <a:buChar char="•"/>
-            </a:pPr>
-            <a:r>
-              <a:rPr lang="es-ES_tradnl" sz="2400" dirty="0">
-                <a:solidFill>
-                  <a:srgbClr val="FF0000"/>
-                </a:solidFill>
-                <a:latin typeface="Gill Sans MT" panose="020B0502020104020203" pitchFamily="34" charset="77"/>
-              </a:rPr>
-              <a:t>Si más de un 85% de los estudiantes contestan la encuesta docente final del curso,</a:t>
-            </a:r>
-            <a:r>
-              <a:rPr lang="es-ES_tradnl" sz="2400" dirty="0">
-                <a:latin typeface="Gill Sans MT" panose="020B0502020104020203" pitchFamily="34" charset="77"/>
-              </a:rPr>
-              <a:t> se podrá llevar un cuaderno de no más de 100 hojas con apuntes escritos a mano de la materia del curso (no se acepta impresiones, fotocopias, hojas sueltas, ni ningún tipo de reproducción, sólo un cuaderno escrito a mano).</a:t>
-            </a:r>
-          </a:p>
-          <a:p>
-            <a:pPr marL="342900" indent="-342900">
-              <a:buFont typeface="Arial" panose="020B0604020202020204" pitchFamily="34" charset="0"/>
-              <a:buChar char="•"/>
-            </a:pPr>
-            <a:r>
-              <a:rPr lang="es-ES_tradnl" sz="2400" dirty="0">
-                <a:latin typeface="Gill Sans MT" panose="020B0502020104020203" pitchFamily="34" charset="77"/>
-              </a:rPr>
-              <a:t>En el examen no se admite ningún tipo de dispositivo electrónico.</a:t>
-            </a:r>
-          </a:p>
-          <a:p>
-            <a:pPr marL="342900" indent="-342900">
-              <a:buFont typeface="Arial" panose="020B0604020202020204" pitchFamily="34" charset="0"/>
-              <a:buChar char="•"/>
-            </a:pPr>
-            <a:endParaRPr lang="es-ES_tradnl" sz="2400" dirty="0">
-              <a:latin typeface="Gill Sans MT" panose="020B0502020104020203" pitchFamily="34" charset="77"/>
-            </a:endParaRPr>
-          </a:p>
-          <a:p>
-            <a:pPr marL="342900" indent="-342900">
-              <a:buFont typeface="Arial" panose="020B0604020202020204" pitchFamily="34" charset="0"/>
-              <a:buChar char="•"/>
-            </a:pPr>
-            <a:endParaRPr lang="es-ES_tradnl" sz="2400" dirty="0">
-              <a:latin typeface="Gill Sans MT" panose="020B0502020104020203" pitchFamily="34" charset="77"/>
-            </a:endParaRPr>
-          </a:p>
-        </p:txBody>
-      </p:sp>
-      <p:sp>
-        <p:nvSpPr>
-          <p:cNvPr id="3" name="Text Box 2">
-            <a:extLst>
-              <a:ext uri="{FF2B5EF4-FFF2-40B4-BE49-F238E27FC236}">
-                <a16:creationId xmlns:a16="http://schemas.microsoft.com/office/drawing/2014/main" id="{FC3EE630-3EBE-C4AD-EA7D-4F1E0E085345}"/>
-              </a:ext>
-            </a:extLst>
-          </p:cNvPr>
-          <p:cNvSpPr txBox="1">
-            <a:spLocks noChangeArrowheads="1"/>
-          </p:cNvSpPr>
-          <p:nvPr/>
-        </p:nvSpPr>
-        <p:spPr bwMode="auto">
-          <a:xfrm>
-            <a:off x="1971676" y="313138"/>
-            <a:ext cx="8490263" cy="584775"/>
-          </a:xfrm>
-          <a:prstGeom prst="rect">
-            <a:avLst/>
-          </a:prstGeom>
-          <a:noFill/>
-          <a:ln w="9525">
-            <a:noFill/>
-            <a:miter lim="800000"/>
-            <a:headEnd/>
-            <a:tailEnd/>
-          </a:ln>
-        </p:spPr>
-        <p:txBody>
-          <a:bodyPr wrap="square">
-            <a:prstTxWarp prst="textNoShape">
-              <a:avLst/>
-            </a:prstTxWarp>
-            <a:spAutoFit/>
-          </a:bodyPr>
-          <a:lstStyle/>
-          <a:p>
-            <a:r>
-              <a:rPr lang="es-ES" sz="3200" b="1" dirty="0">
-                <a:solidFill>
-                  <a:schemeClr val="accent2"/>
-                </a:solidFill>
-                <a:latin typeface="Gill Sans MT" panose="020B0502020104020203" pitchFamily="34" charset="77"/>
-              </a:rPr>
-              <a:t>Examen Final</a:t>
-            </a:r>
-            <a:endParaRPr lang="es-CL" b="1" dirty="0">
-              <a:solidFill>
-                <a:schemeClr val="accent2"/>
-              </a:solidFill>
-              <a:latin typeface="Gill Sans MT" panose="020B0502020104020203" pitchFamily="34" charset="77"/>
-            </a:endParaRPr>
-          </a:p>
-        </p:txBody>
-      </p:sp>
-      <p:sp>
-        <p:nvSpPr>
-          <p:cNvPr id="2" name="Date Placeholder 1">
-            <a:extLst>
-              <a:ext uri="{FF2B5EF4-FFF2-40B4-BE49-F238E27FC236}">
-                <a16:creationId xmlns:a16="http://schemas.microsoft.com/office/drawing/2014/main" id="{A95132D5-892A-B5CA-E367-93DA5CD76646}"/>
-              </a:ext>
-            </a:extLst>
-          </p:cNvPr>
-          <p:cNvSpPr>
-            <a:spLocks noGrp="1"/>
-          </p:cNvSpPr>
-          <p:nvPr>
-            <p:ph type="dt" sz="half" idx="10"/>
-          </p:nvPr>
-        </p:nvSpPr>
-        <p:spPr/>
-        <p:txBody>
-          <a:bodyPr/>
-          <a:lstStyle/>
-          <a:p>
-            <a:r>
-              <a:rPr lang="en-US"/>
-              <a:t>(c) D.Mery - PR00</a:t>
-            </a:r>
-            <a:endParaRPr lang="en-CL"/>
-          </a:p>
-        </p:txBody>
-      </p:sp>
-      <p:sp>
-        <p:nvSpPr>
-          <p:cNvPr id="4" name="Slide Number Placeholder 3">
-            <a:extLst>
-              <a:ext uri="{FF2B5EF4-FFF2-40B4-BE49-F238E27FC236}">
-                <a16:creationId xmlns:a16="http://schemas.microsoft.com/office/drawing/2014/main" id="{CBB053F0-F6C1-A879-7B62-23BB6F16E254}"/>
-              </a:ext>
-            </a:extLst>
-          </p:cNvPr>
-          <p:cNvSpPr>
-            <a:spLocks noGrp="1"/>
-          </p:cNvSpPr>
-          <p:nvPr>
-            <p:ph type="sldNum" sz="quarter" idx="12"/>
-          </p:nvPr>
-        </p:nvSpPr>
-        <p:spPr/>
-        <p:txBody>
-          <a:bodyPr/>
-          <a:lstStyle/>
-          <a:p>
-            <a:fld id="{006AE8E3-C79C-E14F-9140-34B0C7F543F1}" type="slidenum">
-              <a:rPr lang="en-CL" smtClean="0"/>
-              <a:t>24</a:t>
-            </a:fld>
-            <a:endParaRPr lang="en-CL"/>
-          </a:p>
-        </p:txBody>
-      </p:sp>
-    </p:spTree>
-    <p:extLst>
-      <p:ext uri="{BB962C8B-B14F-4D97-AF65-F5344CB8AC3E}">
-        <p14:creationId xmlns:p14="http://schemas.microsoft.com/office/powerpoint/2010/main" val="1058858298"/>
-      </p:ext>
-    </p:extLst>
-  </p:cSld>
-  <p:clrMapOvr>
-    <a:masterClrMapping/>
-  </p:clrMapOvr>
-  <p:timing>
-    <p:tnLst>
-      <p:par>
-        <p:cTn id="1" dur="indefinite" restart="never" nodeType="tmRoot">
-          <p:childTnLst>
-            <p:seq concurrent="1" nextAc="seek">
-              <p:cTn id="2" dur="indefinite" nodeType="mainSeq">
-                <p:childTnLst>
-                  <p:par>
-                    <p:cTn id="3" fill="hold">
-                      <p:stCondLst>
-                        <p:cond delay="indefinite"/>
-                      </p:stCondLst>
-                      <p:childTnLst>
-                        <p:par>
-                          <p:cTn id="4" fill="hold">
-                            <p:stCondLst>
-                              <p:cond delay="0"/>
-                            </p:stCondLst>
-                            <p:childTnLst>
-                              <p:par>
-                                <p:cTn id="5" presetID="1" presetClass="entr" presetSubtype="0" fill="hold" grpId="0" nodeType="clickEffect">
-                                  <p:stCondLst>
-                                    <p:cond delay="0"/>
-                                  </p:stCondLst>
-                                  <p:childTnLst>
-                                    <p:set>
-                                      <p:cBhvr>
-                                        <p:cTn id="6" dur="1" fill="hold">
-                                          <p:stCondLst>
-                                            <p:cond delay="0"/>
-                                          </p:stCondLst>
-                                        </p:cTn>
-                                        <p:tgtEl>
-                                          <p:spTgt spid="5">
-                                            <p:txEl>
-                                              <p:pRg st="0" end="0"/>
-                                            </p:txEl>
-                                          </p:spTgt>
-                                        </p:tgtEl>
-                                        <p:attrNameLst>
-                                          <p:attrName>style.visibility</p:attrName>
-                                        </p:attrNameLst>
-                                      </p:cBhvr>
-                                      <p:to>
-                                        <p:strVal val="visible"/>
-                                      </p:to>
-                                    </p:set>
-                                  </p:childTnLst>
-                                </p:cTn>
-                              </p:par>
-                            </p:childTnLst>
-                          </p:cTn>
-                        </p:par>
-                      </p:childTnLst>
-                    </p:cTn>
-                  </p:par>
-                  <p:par>
-                    <p:cTn id="7" fill="hold">
-                      <p:stCondLst>
-                        <p:cond delay="indefinite"/>
-                      </p:stCondLst>
-                      <p:childTnLst>
-                        <p:par>
-                          <p:cTn id="8" fill="hold">
-                            <p:stCondLst>
-                              <p:cond delay="0"/>
-                            </p:stCondLst>
-                            <p:childTnLst>
-                              <p:par>
-                                <p:cTn id="9" presetID="1" presetClass="entr" presetSubtype="0" fill="hold" grpId="0" nodeType="clickEffect">
-                                  <p:stCondLst>
-                                    <p:cond delay="0"/>
-                                  </p:stCondLst>
-                                  <p:childTnLst>
-                                    <p:set>
-                                      <p:cBhvr>
-                                        <p:cTn id="10" dur="1" fill="hold">
-                                          <p:stCondLst>
-                                            <p:cond delay="0"/>
-                                          </p:stCondLst>
-                                        </p:cTn>
-                                        <p:tgtEl>
-                                          <p:spTgt spid="5">
-                                            <p:txEl>
-                                              <p:pRg st="1" end="1"/>
-                                            </p:txEl>
-                                          </p:spTgt>
-                                        </p:tgtEl>
-                                        <p:attrNameLst>
-                                          <p:attrName>style.visibility</p:attrName>
-                                        </p:attrNameLst>
-                                      </p:cBhvr>
-                                      <p:to>
-                                        <p:strVal val="visible"/>
-                                      </p:to>
-                                    </p:set>
-                                  </p:childTnLst>
-                                </p:cTn>
-                              </p:par>
-                            </p:childTnLst>
-                          </p:cTn>
-                        </p:par>
-                      </p:childTnLst>
-                    </p:cTn>
-                  </p:par>
-                  <p:par>
-                    <p:cTn id="11" fill="hold">
-                      <p:stCondLst>
-                        <p:cond delay="indefinite"/>
-                      </p:stCondLst>
-                      <p:childTnLst>
-                        <p:par>
-                          <p:cTn id="12" fill="hold">
-                            <p:stCondLst>
-                              <p:cond delay="0"/>
-                            </p:stCondLst>
-                            <p:childTnLst>
-                              <p:par>
-                                <p:cTn id="13" presetID="1" presetClass="entr" presetSubtype="0" fill="hold" grpId="0" nodeType="clickEffect">
-                                  <p:stCondLst>
-                                    <p:cond delay="0"/>
-                                  </p:stCondLst>
-                                  <p:childTnLst>
-                                    <p:set>
-                                      <p:cBhvr>
-                                        <p:cTn id="14" dur="1" fill="hold">
-                                          <p:stCondLst>
-                                            <p:cond delay="0"/>
-                                          </p:stCondLst>
-                                        </p:cTn>
-                                        <p:tgtEl>
-                                          <p:spTgt spid="5">
-                                            <p:txEl>
-                                              <p:pRg st="2" end="2"/>
-                                            </p:txEl>
-                                          </p:spTgt>
-                                        </p:tgtEl>
-                                        <p:attrNameLst>
-                                          <p:attrName>style.visibility</p:attrName>
-                                        </p:attrNameLst>
-                                      </p:cBhvr>
-                                      <p:to>
-                                        <p:strVal val="visible"/>
-                                      </p:to>
-                                    </p:set>
-                                  </p:childTnLst>
-                                </p:cTn>
-                              </p:par>
-                            </p:childTnLst>
-                          </p:cTn>
-                        </p:par>
-                      </p:childTnLst>
-                    </p:cTn>
-                  </p:par>
-                  <p:par>
-                    <p:cTn id="15" fill="hold">
-                      <p:stCondLst>
-                        <p:cond delay="indefinite"/>
-                      </p:stCondLst>
-                      <p:childTnLst>
-                        <p:par>
-                          <p:cTn id="16" fill="hold">
-                            <p:stCondLst>
-                              <p:cond delay="0"/>
-                            </p:stCondLst>
-                            <p:childTnLst>
-                              <p:par>
-                                <p:cTn id="17" presetID="1" presetClass="entr" presetSubtype="0" fill="hold" grpId="0" nodeType="clickEffect">
-                                  <p:stCondLst>
-                                    <p:cond delay="0"/>
-                                  </p:stCondLst>
-                                  <p:childTnLst>
-                                    <p:set>
-                                      <p:cBhvr>
-                                        <p:cTn id="18" dur="1" fill="hold">
-                                          <p:stCondLst>
-                                            <p:cond delay="0"/>
-                                          </p:stCondLst>
-                                        </p:cTn>
-                                        <p:tgtEl>
-                                          <p:spTgt spid="5">
-                                            <p:txEl>
-                                              <p:pRg st="3" end="3"/>
-                                            </p:txEl>
-                                          </p:spTgt>
-                                        </p:tgtEl>
-                                        <p:attrNameLst>
-                                          <p:attrName>style.visibility</p:attrName>
-                                        </p:attrNameLst>
-                                      </p:cBhvr>
-                                      <p:to>
-                                        <p:strVal val="visible"/>
-                                      </p:to>
-                                    </p:set>
-                                  </p:childTnLst>
-                                </p:cTn>
-                              </p:par>
-                            </p:childTnLst>
-                          </p:cTn>
-                        </p:par>
-                      </p:childTnLst>
-                    </p:cTn>
-                  </p:par>
-                  <p:par>
-                    <p:cTn id="19" fill="hold">
-                      <p:stCondLst>
-                        <p:cond delay="indefinite"/>
-                      </p:stCondLst>
-                      <p:childTnLst>
-                        <p:par>
-                          <p:cTn id="20" fill="hold">
-                            <p:stCondLst>
-                              <p:cond delay="0"/>
-                            </p:stCondLst>
-                            <p:childTnLst>
-                              <p:par>
-                                <p:cTn id="21" presetID="1" presetClass="entr" presetSubtype="0" fill="hold" grpId="0" nodeType="clickEffect">
-                                  <p:stCondLst>
-                                    <p:cond delay="0"/>
-                                  </p:stCondLst>
-                                  <p:childTnLst>
-                                    <p:set>
-                                      <p:cBhvr>
-                                        <p:cTn id="22" dur="1" fill="hold">
-                                          <p:stCondLst>
-                                            <p:cond delay="0"/>
-                                          </p:stCondLst>
-                                        </p:cTn>
-                                        <p:tgtEl>
-                                          <p:spTgt spid="5">
-                                            <p:txEl>
-                                              <p:pRg st="4" end="4"/>
-                                            </p:txEl>
-                                          </p:spTgt>
-                                        </p:tgtEl>
-                                        <p:attrNameLst>
-                                          <p:attrName>style.visibility</p:attrName>
-                                        </p:attrNameLst>
-                                      </p:cBhvr>
-                                      <p:to>
-                                        <p:strVal val="visible"/>
-                                      </p:to>
-                                    </p:set>
-                                  </p:childTnLst>
-                                </p:cTn>
-                              </p:par>
-                            </p:childTnLst>
-                          </p:cTn>
-                        </p:par>
-                      </p:childTnLst>
-                    </p:cTn>
-                  </p:par>
-                </p:childTnLst>
-              </p:cTn>
-              <p:prevCondLst>
-                <p:cond evt="onPrev" delay="0">
-                  <p:tgtEl>
-                    <p:sldTgt/>
-                  </p:tgtEl>
-                </p:cond>
-              </p:prevCondLst>
-              <p:nextCondLst>
-                <p:cond evt="onNext" delay="0">
-                  <p:tgtEl>
-                    <p:sldTgt/>
-                  </p:tgtEl>
-                </p:cond>
-              </p:nextCondLst>
-            </p:seq>
-          </p:childTnLst>
-        </p:cTn>
-      </p:par>
-    </p:tnLst>
-    <p:bldLst>
-      <p:bldP spid="5" grpId="0" build="p"/>
     </p:bldLst>
   </p:timing>
 </p:sld>
@@ -13697,249 +7542,6 @@
   <p:cSld>
     <p:spTree>
       <p:nvGrpSpPr>
-        <p:cNvPr id="1" name=""/>
-        <p:cNvGrpSpPr/>
-        <p:nvPr/>
-      </p:nvGrpSpPr>
-      <p:grpSpPr>
-        <a:xfrm>
-          <a:off x="0" y="0"/>
-          <a:ext cx="0" cy="0"/>
-          <a:chOff x="0" y="0"/>
-          <a:chExt cx="0" cy="0"/>
-        </a:xfrm>
-      </p:grpSpPr>
-      <p:sp>
-        <p:nvSpPr>
-          <p:cNvPr id="2" name="TextBox 1">
-            <a:extLst>
-              <a:ext uri="{FF2B5EF4-FFF2-40B4-BE49-F238E27FC236}">
-                <a16:creationId xmlns:a16="http://schemas.microsoft.com/office/drawing/2014/main" id="{7C408FE7-E967-6D0D-6E1F-4D7A76C429FB}"/>
-              </a:ext>
-            </a:extLst>
-          </p:cNvPr>
-          <p:cNvSpPr txBox="1"/>
-          <p:nvPr/>
-        </p:nvSpPr>
-        <p:spPr>
-          <a:xfrm>
-            <a:off x="842682" y="243512"/>
-            <a:ext cx="10183906" cy="4893647"/>
-          </a:xfrm>
-          <a:prstGeom prst="rect">
-            <a:avLst/>
-          </a:prstGeom>
-          <a:noFill/>
-        </p:spPr>
-        <p:txBody>
-          <a:bodyPr wrap="square" rtlCol="0">
-            <a:spAutoFit/>
-          </a:bodyPr>
-          <a:lstStyle/>
-          <a:p>
-            <a:r>
-              <a:rPr lang="es-ES_tradnl" sz="2400" b="1" dirty="0">
-                <a:solidFill>
-                  <a:schemeClr val="accent2"/>
-                </a:solidFill>
-                <a:latin typeface="Gill Sans MT" panose="020B0502020104020203" pitchFamily="34" charset="77"/>
-              </a:rPr>
-              <a:t>Evaluación</a:t>
-            </a:r>
-            <a:endParaRPr lang="en-CL" sz="2400" b="1" dirty="0">
-              <a:solidFill>
-                <a:schemeClr val="accent2"/>
-              </a:solidFill>
-              <a:latin typeface="Gill Sans MT" panose="020B0502020104020203" pitchFamily="34" charset="77"/>
-            </a:endParaRPr>
-          </a:p>
-          <a:p>
-            <a:r>
-              <a:rPr lang="es-CL" sz="2400" dirty="0">
-                <a:latin typeface="Gill Sans MT" panose="020B0502020104020203" pitchFamily="34" charset="77"/>
-              </a:rPr>
-              <a:t> </a:t>
-            </a:r>
-            <a:endParaRPr lang="en-CL" sz="2400" dirty="0">
-              <a:latin typeface="Gill Sans MT" panose="020B0502020104020203" pitchFamily="34" charset="77"/>
-            </a:endParaRPr>
-          </a:p>
-          <a:p>
-            <a:pPr lvl="0"/>
-            <a:r>
-              <a:rPr lang="es-ES_tradnl" sz="2400" dirty="0">
-                <a:latin typeface="Gill Sans MT" panose="020B0502020104020203" pitchFamily="34" charset="77"/>
-              </a:rPr>
-              <a:t>Ejercicios en clases	12% </a:t>
-            </a:r>
-            <a:endParaRPr lang="en-CL" sz="2400" dirty="0">
-              <a:latin typeface="Gill Sans MT" panose="020B0502020104020203" pitchFamily="34" charset="77"/>
-            </a:endParaRPr>
-          </a:p>
-          <a:p>
-            <a:pPr lvl="0"/>
-            <a:r>
-              <a:rPr lang="es-ES_tradnl" sz="2400" dirty="0">
-                <a:latin typeface="Gill Sans MT" panose="020B0502020104020203" pitchFamily="34" charset="77"/>
-              </a:rPr>
-              <a:t>Tres tareas		24%</a:t>
-            </a:r>
-            <a:endParaRPr lang="en-CL" sz="2400" dirty="0">
-              <a:latin typeface="Gill Sans MT" panose="020B0502020104020203" pitchFamily="34" charset="77"/>
-            </a:endParaRPr>
-          </a:p>
-          <a:p>
-            <a:pPr lvl="0"/>
-            <a:r>
-              <a:rPr lang="es-ES_tradnl" sz="2400" dirty="0">
-                <a:latin typeface="Gill Sans MT" panose="020B0502020104020203" pitchFamily="34" charset="77"/>
-              </a:rPr>
-              <a:t>Dos Interrogaciones	36%</a:t>
-            </a:r>
-            <a:endParaRPr lang="en-CL" sz="2400" dirty="0">
-              <a:latin typeface="Gill Sans MT" panose="020B0502020104020203" pitchFamily="34" charset="77"/>
-            </a:endParaRPr>
-          </a:p>
-          <a:p>
-            <a:pPr lvl="0"/>
-            <a:r>
-              <a:rPr lang="es-ES_tradnl" sz="2400" dirty="0">
-                <a:latin typeface="Gill Sans MT" panose="020B0502020104020203" pitchFamily="34" charset="77"/>
-              </a:rPr>
-              <a:t>Examen Final 		28%</a:t>
-            </a:r>
-            <a:endParaRPr lang="en-CL" sz="2400" dirty="0">
-              <a:latin typeface="Gill Sans MT" panose="020B0502020104020203" pitchFamily="34" charset="77"/>
-            </a:endParaRPr>
-          </a:p>
-          <a:p>
-            <a:r>
-              <a:rPr lang="es-ES_tradnl" sz="2400" dirty="0">
-                <a:latin typeface="Gill Sans MT" panose="020B0502020104020203" pitchFamily="34" charset="77"/>
-              </a:rPr>
-              <a:t> </a:t>
-            </a:r>
-            <a:endParaRPr lang="en-CL" sz="2400" dirty="0">
-              <a:latin typeface="Gill Sans MT" panose="020B0502020104020203" pitchFamily="34" charset="77"/>
-            </a:endParaRPr>
-          </a:p>
-          <a:p>
-            <a:r>
-              <a:rPr lang="es-ES_tradnl" sz="2400" dirty="0">
-                <a:latin typeface="Gill Sans MT" panose="020B0502020104020203" pitchFamily="34" charset="77"/>
-              </a:rPr>
-              <a:t>En escala de 1 a 7, para aprobar el curso se debe obtener en cada uno de estos cuatro ítems 3.4500 o más (</a:t>
-            </a:r>
-            <a:r>
-              <a:rPr lang="es-ES" sz="2400" dirty="0">
-                <a:latin typeface="Gill Sans MT" panose="020B0502020104020203" pitchFamily="34" charset="77"/>
-              </a:rPr>
-              <a:t>en casos muy excepcionales y justificados se bajará este umbral hasta 2.9500</a:t>
-            </a:r>
-            <a:r>
-              <a:rPr lang="es-ES_tradnl" sz="2400" dirty="0">
-                <a:latin typeface="Gill Sans MT" panose="020B0502020104020203" pitchFamily="34" charset="77"/>
-              </a:rPr>
-              <a:t>), de lo contrario la nota será el mínimo de ellas.</a:t>
-            </a:r>
-            <a:endParaRPr lang="en-CL" sz="2400" dirty="0">
-              <a:latin typeface="Gill Sans MT" panose="020B0502020104020203" pitchFamily="34" charset="77"/>
-            </a:endParaRPr>
-          </a:p>
-          <a:p>
-            <a:r>
-              <a:rPr lang="es-CL" sz="2400" dirty="0">
-                <a:latin typeface="Gill Sans MT" panose="020B0502020104020203" pitchFamily="34" charset="77"/>
-              </a:rPr>
-              <a:t> </a:t>
-            </a:r>
-            <a:endParaRPr lang="en-CL" sz="2400" dirty="0">
-              <a:latin typeface="Gill Sans MT" panose="020B0502020104020203" pitchFamily="34" charset="77"/>
-            </a:endParaRPr>
-          </a:p>
-          <a:p>
-            <a:endParaRPr lang="en-CL" sz="2400" dirty="0">
-              <a:latin typeface="Gill Sans MT" panose="020B0502020104020203" pitchFamily="34" charset="77"/>
-            </a:endParaRPr>
-          </a:p>
-          <a:p>
-            <a:endParaRPr lang="en-CL" sz="2400" dirty="0">
-              <a:latin typeface="Gill Sans MT" panose="020B0502020104020203" pitchFamily="34" charset="77"/>
-            </a:endParaRPr>
-          </a:p>
-        </p:txBody>
-      </p:sp>
-      <p:sp>
-        <p:nvSpPr>
-          <p:cNvPr id="3" name="Date Placeholder 2">
-            <a:extLst>
-              <a:ext uri="{FF2B5EF4-FFF2-40B4-BE49-F238E27FC236}">
-                <a16:creationId xmlns:a16="http://schemas.microsoft.com/office/drawing/2014/main" id="{AEE73E4E-1BEF-2F6C-9308-449A49A730EF}"/>
-              </a:ext>
-            </a:extLst>
-          </p:cNvPr>
-          <p:cNvSpPr>
-            <a:spLocks noGrp="1"/>
-          </p:cNvSpPr>
-          <p:nvPr>
-            <p:ph type="dt" sz="half" idx="10"/>
-          </p:nvPr>
-        </p:nvSpPr>
-        <p:spPr/>
-        <p:txBody>
-          <a:bodyPr/>
-          <a:lstStyle/>
-          <a:p>
-            <a:r>
-              <a:rPr lang="en-US"/>
-              <a:t>(c) D.Mery - PR00</a:t>
-            </a:r>
-            <a:endParaRPr lang="en-CL"/>
-          </a:p>
-        </p:txBody>
-      </p:sp>
-      <p:sp>
-        <p:nvSpPr>
-          <p:cNvPr id="4" name="Slide Number Placeholder 3">
-            <a:extLst>
-              <a:ext uri="{FF2B5EF4-FFF2-40B4-BE49-F238E27FC236}">
-                <a16:creationId xmlns:a16="http://schemas.microsoft.com/office/drawing/2014/main" id="{8D07BE62-7141-3BD1-43C0-956A8A939F82}"/>
-              </a:ext>
-            </a:extLst>
-          </p:cNvPr>
-          <p:cNvSpPr>
-            <a:spLocks noGrp="1"/>
-          </p:cNvSpPr>
-          <p:nvPr>
-            <p:ph type="sldNum" sz="quarter" idx="12"/>
-          </p:nvPr>
-        </p:nvSpPr>
-        <p:spPr/>
-        <p:txBody>
-          <a:bodyPr/>
-          <a:lstStyle/>
-          <a:p>
-            <a:fld id="{006AE8E3-C79C-E14F-9140-34B0C7F543F1}" type="slidenum">
-              <a:rPr lang="en-CL" smtClean="0"/>
-              <a:t>7</a:t>
-            </a:fld>
-            <a:endParaRPr lang="en-CL"/>
-          </a:p>
-        </p:txBody>
-      </p:sp>
-    </p:spTree>
-  </p:cSld>
-  <p:clrMapOvr>
-    <a:masterClrMapping/>
-  </p:clrMapOvr>
-</p:sld>
-</file>
-
-<file path=ppt/slides/slide8.xml><?xml version="1.0" encoding="utf-8"?>
-<p:sld xmlns:a="http://schemas.openxmlformats.org/drawingml/2006/main" xmlns:r="http://schemas.openxmlformats.org/officeDocument/2006/relationships" xmlns:p="http://schemas.openxmlformats.org/presentationml/2006/main">
-  <p:cSld>
-    <p:spTree>
-      <p:nvGrpSpPr>
         <p:cNvPr id="1" name="">
           <a:extLst>
             <a:ext uri="{FF2B5EF4-FFF2-40B4-BE49-F238E27FC236}">
@@ -13972,8 +7574,8 @@
         </p:nvSpPr>
         <p:spPr>
           <a:xfrm>
-            <a:off x="842682" y="243512"/>
-            <a:ext cx="10183906" cy="6370975"/>
+            <a:off x="1346264" y="2274838"/>
+            <a:ext cx="10183906" cy="2308324"/>
           </a:xfrm>
           <a:prstGeom prst="rect">
             <a:avLst/>
@@ -13987,13 +7589,13 @@
           <a:lstStyle/>
           <a:p>
             <a:r>
-              <a:rPr lang="es-ES_tradnl" sz="2400" b="1" dirty="0">
+              <a:rPr lang="es-ES" sz="2400" b="1" dirty="0">
                 <a:solidFill>
                   <a:schemeClr val="accent2"/>
                 </a:solidFill>
                 <a:latin typeface="Gill Sans MT" panose="020B0502020104020203" pitchFamily="34" charset="77"/>
               </a:rPr>
-              <a:t>Evaluación</a:t>
+              <a:t>Fechas Importantes:</a:t>
             </a:r>
             <a:endParaRPr lang="en-CL" sz="2400" b="1" dirty="0">
               <a:solidFill>
@@ -14004,7 +7606,7 @@
           </a:p>
           <a:p>
             <a:r>
-              <a:rPr lang="es-CL" sz="2400" dirty="0">
+              <a:rPr lang="es-ES" sz="2400" dirty="0">
                 <a:latin typeface="Gill Sans MT" panose="020B0502020104020203" pitchFamily="34" charset="77"/>
               </a:rPr>
               <a:t> </a:t>
@@ -14014,132 +7616,23 @@
             </a:endParaRPr>
           </a:p>
           <a:p>
-            <a:pPr lvl="0"/>
             <a:r>
               <a:rPr lang="es-ES_tradnl" sz="2400" dirty="0">
                 <a:latin typeface="Gill Sans MT" panose="020B0502020104020203" pitchFamily="34" charset="77"/>
               </a:rPr>
-              <a:t>Ejercicios en clases	12% </a:t>
-            </a:r>
-            <a:endParaRPr lang="en-CL" sz="2400" dirty="0">
-              <a:latin typeface="Gill Sans MT" panose="020B0502020104020203" pitchFamily="34" charset="77"/>
-            </a:endParaRPr>
-          </a:p>
-          <a:p>
-            <a:pPr lvl="0"/>
+              <a:t>Primera Interrogación: 		Mar. 22/09/26 17:30 – 19:30 </a:t>
+            </a:r>
+            <a:r>
+              <a:rPr lang="es-ES_tradnl" sz="2400" dirty="0" err="1">
+                <a:latin typeface="Gill Sans MT" panose="020B0502020104020203" pitchFamily="34" charset="77"/>
+              </a:rPr>
+              <a:t>hrs</a:t>
+            </a:r>
             <a:r>
               <a:rPr lang="es-ES_tradnl" sz="2400" dirty="0">
                 <a:latin typeface="Gill Sans MT" panose="020B0502020104020203" pitchFamily="34" charset="77"/>
               </a:rPr>
-              <a:t>Tres tareas		24%</a:t>
-            </a:r>
-            <a:endParaRPr lang="en-CL" sz="2400" dirty="0">
-              <a:latin typeface="Gill Sans MT" panose="020B0502020104020203" pitchFamily="34" charset="77"/>
-            </a:endParaRPr>
-          </a:p>
-          <a:p>
-            <a:pPr lvl="0"/>
-            <a:r>
-              <a:rPr lang="es-ES_tradnl" sz="2400" dirty="0">
-                <a:latin typeface="Gill Sans MT" panose="020B0502020104020203" pitchFamily="34" charset="77"/>
-              </a:rPr>
-              <a:t>Dos Interrogaciones	36%</a:t>
-            </a:r>
-            <a:endParaRPr lang="en-CL" sz="2400" dirty="0">
-              <a:latin typeface="Gill Sans MT" panose="020B0502020104020203" pitchFamily="34" charset="77"/>
-            </a:endParaRPr>
-          </a:p>
-          <a:p>
-            <a:pPr lvl="0"/>
-            <a:r>
-              <a:rPr lang="es-ES_tradnl" sz="2400" dirty="0">
-                <a:latin typeface="Gill Sans MT" panose="020B0502020104020203" pitchFamily="34" charset="77"/>
-              </a:rPr>
-              <a:t>Examen Final 		28%</a:t>
-            </a:r>
-            <a:endParaRPr lang="en-CL" sz="2400" dirty="0">
-              <a:latin typeface="Gill Sans MT" panose="020B0502020104020203" pitchFamily="34" charset="77"/>
-            </a:endParaRPr>
-          </a:p>
-          <a:p>
-            <a:r>
-              <a:rPr lang="es-ES_tradnl" sz="2400" dirty="0">
-                <a:latin typeface="Gill Sans MT" panose="020B0502020104020203" pitchFamily="34" charset="77"/>
-              </a:rPr>
-              <a:t> </a:t>
-            </a:r>
-            <a:endParaRPr lang="en-CL" sz="2400" dirty="0">
-              <a:latin typeface="Gill Sans MT" panose="020B0502020104020203" pitchFamily="34" charset="77"/>
-            </a:endParaRPr>
-          </a:p>
-          <a:p>
-            <a:r>
-              <a:rPr lang="es-ES_tradnl" sz="2400" dirty="0">
-                <a:latin typeface="Gill Sans MT" panose="020B0502020104020203" pitchFamily="34" charset="77"/>
-              </a:rPr>
-              <a:t>En escala de 1 a 7, para aprobar el curso se debe obtener en cada uno de estos cuatro ítems 3.4500 o más (</a:t>
-            </a:r>
-            <a:r>
-              <a:rPr lang="es-ES" sz="2400" dirty="0">
-                <a:latin typeface="Gill Sans MT" panose="020B0502020104020203" pitchFamily="34" charset="77"/>
-              </a:rPr>
-              <a:t>en casos muy excepcionales y justificados se bajará este umbral hasta 2.9500</a:t>
-            </a:r>
-            <a:r>
-              <a:rPr lang="es-ES_tradnl" sz="2400" dirty="0">
-                <a:latin typeface="Gill Sans MT" panose="020B0502020104020203" pitchFamily="34" charset="77"/>
-              </a:rPr>
-              <a:t>), de lo contrario la nota será el mínimo de ellas.</a:t>
-            </a:r>
-            <a:endParaRPr lang="en-CL" sz="2400" dirty="0">
-              <a:latin typeface="Gill Sans MT" panose="020B0502020104020203" pitchFamily="34" charset="77"/>
-            </a:endParaRPr>
-          </a:p>
-          <a:p>
-            <a:r>
-              <a:rPr lang="es-CL" sz="2400" dirty="0">
-                <a:latin typeface="Gill Sans MT" panose="020B0502020104020203" pitchFamily="34" charset="77"/>
-              </a:rPr>
-              <a:t> </a:t>
-            </a:r>
-            <a:endParaRPr lang="en-CL" sz="2400" dirty="0">
-              <a:latin typeface="Gill Sans MT" panose="020B0502020104020203" pitchFamily="34" charset="77"/>
-            </a:endParaRPr>
-          </a:p>
-          <a:p>
-            <a:r>
-              <a:rPr lang="es-ES" sz="2400" b="1" dirty="0">
-                <a:solidFill>
-                  <a:schemeClr val="accent2"/>
-                </a:solidFill>
-                <a:latin typeface="Gill Sans MT" panose="020B0502020104020203" pitchFamily="34" charset="77"/>
-              </a:rPr>
-              <a:t>Fechas</a:t>
-            </a:r>
-            <a:endParaRPr lang="en-CL" sz="2400" b="1" dirty="0">
-              <a:solidFill>
-                <a:schemeClr val="accent2"/>
-              </a:solidFill>
-              <a:latin typeface="Gill Sans MT" panose="020B0502020104020203" pitchFamily="34" charset="77"/>
-            </a:endParaRPr>
-          </a:p>
-          <a:p>
-            <a:r>
-              <a:rPr lang="es-ES" sz="2400" dirty="0">
-                <a:latin typeface="Gill Sans MT" panose="020B0502020104020203" pitchFamily="34" charset="77"/>
-              </a:rPr>
-              <a:t> </a:t>
-            </a:r>
-            <a:endParaRPr lang="en-CL" sz="2400" dirty="0">
-              <a:latin typeface="Gill Sans MT" panose="020B0502020104020203" pitchFamily="34" charset="77"/>
-            </a:endParaRPr>
-          </a:p>
-          <a:p>
-            <a:r>
-              <a:rPr lang="es-ES_tradnl" sz="2400" dirty="0">
-                <a:latin typeface="Gill Sans MT" panose="020B0502020104020203" pitchFamily="34" charset="77"/>
-              </a:rPr>
-              <a:t>Primera Interrogación: 		será anunciada</a:t>
+              <a:t>.</a:t>
             </a:r>
             <a:endParaRPr lang="en-CL" sz="2400" dirty="0">
               <a:solidFill>
@@ -14153,7 +7646,19 @@
               <a:rPr lang="es-ES_tradnl" sz="2400" dirty="0">
                 <a:latin typeface="Gill Sans MT" panose="020B0502020104020203" pitchFamily="34" charset="77"/>
               </a:rPr>
-              <a:t>Segunda Interrogación: 		será anunciada</a:t>
+              <a:t>Segunda Interrogación: 		Vie. 06/11/26 17:30 – 19:30 </a:t>
+            </a:r>
+            <a:r>
+              <a:rPr lang="es-ES_tradnl" sz="2400" dirty="0" err="1">
+                <a:latin typeface="Gill Sans MT" panose="020B0502020104020203" pitchFamily="34" charset="77"/>
+              </a:rPr>
+              <a:t>hrs</a:t>
+            </a:r>
+            <a:r>
+              <a:rPr lang="es-ES_tradnl" sz="2400" dirty="0">
+                <a:latin typeface="Gill Sans MT" panose="020B0502020104020203" pitchFamily="34" charset="77"/>
+              </a:rPr>
+              <a:t>.</a:t>
             </a:r>
             <a:endParaRPr lang="en-CL" sz="2400" dirty="0">
               <a:latin typeface="Gill Sans MT" panose="020B0502020104020203" pitchFamily="34" charset="77"/>
@@ -14164,25 +7669,13 @@
               <a:rPr lang="en-US" sz="2400" dirty="0">
                 <a:latin typeface="Gill Sans MT" panose="020B0502020104020203" pitchFamily="34" charset="77"/>
               </a:rPr>
-              <a:t>Examen Final:				</a:t>
+              <a:t>Examen Final:				Jue. 03/12/26	9:00 – 12:00 </a:t>
             </a:r>
             <a:r>
               <a:rPr lang="en-US" sz="2400" dirty="0" err="1">
                 <a:latin typeface="Gill Sans MT" panose="020B0502020104020203" pitchFamily="34" charset="77"/>
               </a:rPr>
-              <a:t>será</a:t>
-            </a:r>
-            <a:r>
-              <a:rPr lang="en-US" sz="2400" dirty="0">
-                <a:latin typeface="Gill Sans MT" panose="020B0502020104020203" pitchFamily="34" charset="77"/>
-              </a:rPr>
-              <a:t> </a:t>
-            </a:r>
-            <a:r>
-              <a:rPr lang="en-US" sz="2400" dirty="0" err="1">
-                <a:latin typeface="Gill Sans MT" panose="020B0502020104020203" pitchFamily="34" charset="77"/>
-              </a:rPr>
-              <a:t>anunciada</a:t>
+              <a:t>hrs</a:t>
             </a:r>
             <a:endParaRPr lang="en-CL" sz="2400" dirty="0">
               <a:latin typeface="Gill Sans MT" panose="020B0502020104020203" pitchFamily="34" charset="77"/>
@@ -14247,7 +7740,7 @@
           <a:p>
             <a:fld id="{006AE8E3-C79C-E14F-9140-34B0C7F543F1}" type="slidenum">
               <a:rPr lang="en-CL" smtClean="0"/>
-              <a:t>8</a:t>
+              <a:t>7</a:t>
             </a:fld>
             <a:endParaRPr lang="en-CL"/>
           </a:p>
@@ -14266,7 +7759,7 @@
 </p:sld>
 </file>
 
-<file path=ppt/slides/slide9.xml><?xml version="1.0" encoding="utf-8"?>
+<file path=ppt/slides/slide8.xml><?xml version="1.0" encoding="utf-8"?>
 <p:sld xmlns:a="http://schemas.openxmlformats.org/drawingml/2006/main" xmlns:r="http://schemas.openxmlformats.org/officeDocument/2006/relationships" xmlns:p="http://schemas.openxmlformats.org/presentationml/2006/main">
   <p:cSld>
     <p:spTree>
@@ -15331,7 +8824,7 @@
           <a:p>
             <a:fld id="{006AE8E3-C79C-E14F-9140-34B0C7F543F1}" type="slidenum">
               <a:rPr lang="en-CL" smtClean="0"/>
-              <a:t>9</a:t>
+              <a:t>8</a:t>
             </a:fld>
             <a:endParaRPr lang="en-CL"/>
           </a:p>
